--- a/GitHub_AI_Appendix.pptx
+++ b/GitHub_AI_Appendix.pptx
@@ -4,6 +4,9 @@
   <p:sldMasterIdLst>
     <p:sldMasterId id="2147483648" r:id="rId1"/>
   </p:sldMasterIdLst>
+  <p:notesMasterIdLst>
+    <p:notesMasterId r:id="rId17"/>
+  </p:notesMasterIdLst>
   <p:sldIdLst>
     <p:sldId id="256" r:id="rId2"/>
     <p:sldId id="257" r:id="rId3"/>
@@ -21,10 +24,7 @@
     <p:sldId id="269" r:id="rId15"/>
     <p:sldId id="270" r:id="rId16"/>
   </p:sldIdLst>
-  <p:notesMasterIdLst>
-    <p:notesMasterId r:id="rId17"/>
-  </p:notesMasterIdLst>
-  <p:sldSz cx="9144000" cy="5143500"/>
+  <p:sldSz cx="9144000" cy="5143500" type="screen16x9"/>
   <p:notesSz cx="5143500" cy="9144000"/>
   <p:defaultTextStyle>
     <a:lvl1pPr marL="0" algn="l" defTabSz="914400" rtl="0" eaLnBrk="1" latinLnBrk="0" hangingPunct="1">
@@ -118,6 +118,11 @@
       </a:defRPr>
     </a:lvl9pPr>
   </p:defaultTextStyle>
+  <p:extLst>
+    <p:ext uri="{EFAFB233-063F-42B5-8137-9DF3F51BA10A}">
+      <p15:sldGuideLst xmlns:p15="http://schemas.microsoft.com/office/powerpoint/2012/main"/>
+    </p:ext>
+  </p:extLst>
 </p:presentation>
 </file>
 
@@ -143,234 +148,10 @@
           <a:chExt cx="0" cy="0"/>
         </a:xfrm>
       </p:grpSpPr>
-      <p:sp>
-        <p:nvSpPr>
-          <p:cNvPr id="2" name="Header Placeholder 1"/>
-          <p:cNvSpPr>
-            <a:spLocks noGrp="1"/>
-          </p:cNvSpPr>
-          <p:nvPr>
-            <p:ph type="hdr" sz="quarter"/>
-          </p:nvPr>
-        </p:nvSpPr>
-        <p:spPr>
-          <a:xfrm>
-            <a:off x="0" y="0"/>
-            <a:ext cx="2971800" cy="458788"/>
-          </a:xfrm>
-          <a:prstGeom prst="rect">
-            <a:avLst/>
-          </a:prstGeom>
-        </p:spPr>
-        <p:txBody>
-          <a:bodyPr vert="horz" lIns="91440" tIns="45720" rIns="91440" bIns="45720" rtlCol="0"/>
-          <a:lstStyle>
-            <a:lvl1pPr algn="l">
-              <a:defRPr sz="1200"/>
-            </a:lvl1pPr>
-          </a:lstStyle>
-          <a:p>
-            <a:endParaRPr lang="en-US"/>
-          </a:p>
-        </p:txBody>
-      </p:sp>
-      <p:sp>
-        <p:nvSpPr>
-          <p:cNvPr id="3" name="Date Placeholder 2"/>
-          <p:cNvSpPr>
-            <a:spLocks noGrp="1"/>
-          </p:cNvSpPr>
-          <p:nvPr>
-            <p:ph type="dt" idx="1"/>
-          </p:nvPr>
-        </p:nvSpPr>
-        <p:spPr>
-          <a:xfrm>
-            <a:off x="3884613" y="0"/>
-            <a:ext cx="2971800" cy="458788"/>
-          </a:xfrm>
-          <a:prstGeom prst="rect">
-            <a:avLst/>
-          </a:prstGeom>
-        </p:spPr>
-        <p:txBody>
-          <a:bodyPr vert="horz" lIns="91440" tIns="45720" rIns="91440" bIns="45720" rtlCol="0"/>
-          <a:lstStyle>
-            <a:lvl1pPr algn="r">
-              <a:defRPr sz="1200"/>
-            </a:lvl1pPr>
-          </a:lstStyle>
-          <a:p>
-            <a:fld id="{5282F153-3F37-0F45-9E97-73ACFA13230C}" type="datetimeFigureOut">
-              <a:rPr lang="en-US"/>
-              <a:t>7/23/19</a:t>
-            </a:fld>
-            <a:endParaRPr lang="en-US"/>
-          </a:p>
-        </p:txBody>
-      </p:sp>
-      <p:sp>
-        <p:nvSpPr>
-          <p:cNvPr id="4" name="Slide Image Placeholder 3"/>
-          <p:cNvSpPr>
-            <a:spLocks noGrp="1" noRot="1" noChangeAspect="1"/>
-          </p:cNvSpPr>
-          <p:nvPr>
-            <p:ph type="sldImg" idx="2"/>
-          </p:nvPr>
-        </p:nvSpPr>
-        <p:spPr>
-          <a:xfrm>
-            <a:off x="685800" y="1143000"/>
-            <a:ext cx="5486400" cy="3086100"/>
-          </a:xfrm>
-          <a:prstGeom prst="rect">
-            <a:avLst/>
-          </a:prstGeom>
-          <a:noFill/>
-          <a:ln w="12700">
-            <a:solidFill>
-              <a:prstClr val="black"/>
-            </a:solidFill>
-          </a:ln>
-        </p:spPr>
-        <p:txBody>
-          <a:bodyPr vert="horz" lIns="91440" tIns="45720" rIns="91440" bIns="45720" rtlCol="0" anchor="ctr"/>
-          <a:lstStyle/>
-          <a:p>
-            <a:endParaRPr lang="en-US"/>
-          </a:p>
-        </p:txBody>
-      </p:sp>
-      <p:sp>
-        <p:nvSpPr>
-          <p:cNvPr id="5" name="Notes Placeholder 4"/>
-          <p:cNvSpPr>
-            <a:spLocks noGrp="1"/>
-          </p:cNvSpPr>
-          <p:nvPr>
-            <p:ph type="body" sz="quarter" idx="3"/>
-          </p:nvPr>
-        </p:nvSpPr>
-        <p:spPr>
-          <a:xfrm>
-            <a:off x="685800" y="4400550"/>
-            <a:ext cx="5486400" cy="3600450"/>
-          </a:xfrm>
-          <a:prstGeom prst="rect">
-            <a:avLst/>
-          </a:prstGeom>
-        </p:spPr>
-        <p:txBody>
-          <a:bodyPr vert="horz" lIns="91440" tIns="45720" rIns="91440" bIns="45720" rtlCol="0"/>
-          <a:lstStyle/>
-          <a:p>
-            <a:pPr lvl="0"/>
-            <a:r>
-              <a:rPr lang="en-US"/>
-              <a:t>Click to edit Master text styles</a:t>
-            </a:r>
-          </a:p>
-          <a:p>
-            <a:pPr lvl="1"/>
-            <a:r>
-              <a:rPr lang="en-US"/>
-              <a:t>Second level</a:t>
-            </a:r>
-          </a:p>
-          <a:p>
-            <a:pPr lvl="2"/>
-            <a:r>
-              <a:rPr lang="en-US"/>
-              <a:t>Third level</a:t>
-            </a:r>
-          </a:p>
-          <a:p>
-            <a:pPr lvl="3"/>
-            <a:r>
-              <a:rPr lang="en-US"/>
-              <a:t>Fourth level</a:t>
-            </a:r>
-          </a:p>
-          <a:p>
-            <a:pPr lvl="4"/>
-            <a:r>
-              <a:rPr lang="en-US"/>
-              <a:t>Fifth level</a:t>
-            </a:r>
-          </a:p>
-        </p:txBody>
-      </p:sp>
-      <p:sp>
-        <p:nvSpPr>
-          <p:cNvPr id="6" name="Footer Placeholder 5"/>
-          <p:cNvSpPr>
-            <a:spLocks noGrp="1"/>
-          </p:cNvSpPr>
-          <p:nvPr>
-            <p:ph type="ftr" sz="quarter" idx="4"/>
-          </p:nvPr>
-        </p:nvSpPr>
-        <p:spPr>
-          <a:xfrm>
-            <a:off x="0" y="8685213"/>
-            <a:ext cx="2971800" cy="458787"/>
-          </a:xfrm>
-          <a:prstGeom prst="rect">
-            <a:avLst/>
-          </a:prstGeom>
-        </p:spPr>
-        <p:txBody>
-          <a:bodyPr vert="horz" lIns="91440" tIns="45720" rIns="91440" bIns="45720" rtlCol="0" anchor="b"/>
-          <a:lstStyle>
-            <a:lvl1pPr algn="l">
-              <a:defRPr sz="1200"/>
-            </a:lvl1pPr>
-          </a:lstStyle>
-          <a:p>
-            <a:endParaRPr lang="en-US"/>
-          </a:p>
-        </p:txBody>
-      </p:sp>
-      <p:sp>
-        <p:nvSpPr>
-          <p:cNvPr id="7" name="Slide Number Placeholder 6"/>
-          <p:cNvSpPr>
-            <a:spLocks noGrp="1"/>
-          </p:cNvSpPr>
-          <p:nvPr>
-            <p:ph type="sldNum" sz="quarter" idx="5"/>
-          </p:nvPr>
-        </p:nvSpPr>
-        <p:spPr>
-          <a:xfrm>
-            <a:off x="3884613" y="8685213"/>
-            <a:ext cx="2971800" cy="458787"/>
-          </a:xfrm>
-          <a:prstGeom prst="rect">
-            <a:avLst/>
-          </a:prstGeom>
-        </p:spPr>
-        <p:txBody>
-          <a:bodyPr vert="horz" lIns="91440" tIns="45720" rIns="91440" bIns="45720" rtlCol="0" anchor="b"/>
-          <a:lstStyle>
-            <a:lvl1pPr algn="r">
-              <a:defRPr sz="1200"/>
-            </a:lvl1pPr>
-          </a:lstStyle>
-          <a:p>
-            <a:fld id="{CE5E9CC1-C706-0F49-92D6-E571CC5EEA8F}" type="slidenum">
-              <a:rPr lang="en-US"/>
-              <a:t>‹#›</a:t>
-            </a:fld>
-            <a:endParaRPr lang="en-US"/>
-          </a:p>
-        </p:txBody>
-      </p:sp>
     </p:spTree>
     <p:extLst>
       <p:ext uri="{BB962C8B-B14F-4D97-AF65-F5344CB8AC3E}">
-        <p14:creationId xmlns:p14="http://schemas.microsoft.com/office/powerpoint/2010/main" val="1024086991"/>
+        <p14:creationId xmlns:p14="http://schemas.microsoft.com/office/powerpoint/2010/main" val="1903248369"/>
       </p:ext>
     </p:extLst>
   </p:cSld>
@@ -514,10 +295,6 @@
           <a:bodyPr/>
           <a:lstStyle/>
           <a:p>
-            <a:r>
-              <a:rPr lang="en-US" dirty="0"/>
-              <a:t/>
-            </a:r>
             <a:endParaRPr lang="en-US" dirty="0"/>
           </a:p>
         </p:txBody>
@@ -602,10 +379,6 @@
           <a:bodyPr/>
           <a:lstStyle/>
           <a:p>
-            <a:r>
-              <a:rPr lang="en-US" dirty="0"/>
-              <a:t/>
-            </a:r>
             <a:endParaRPr lang="en-US" dirty="0"/>
           </a:p>
         </p:txBody>
@@ -690,10 +463,6 @@
           <a:bodyPr/>
           <a:lstStyle/>
           <a:p>
-            <a:r>
-              <a:rPr lang="en-US" dirty="0"/>
-              <a:t/>
-            </a:r>
             <a:endParaRPr lang="en-US" dirty="0"/>
           </a:p>
         </p:txBody>
@@ -778,10 +547,6 @@
           <a:bodyPr/>
           <a:lstStyle/>
           <a:p>
-            <a:r>
-              <a:rPr lang="en-US" dirty="0"/>
-              <a:t/>
-            </a:r>
             <a:endParaRPr lang="en-US" dirty="0"/>
           </a:p>
         </p:txBody>
@@ -866,10 +631,6 @@
           <a:bodyPr/>
           <a:lstStyle/>
           <a:p>
-            <a:r>
-              <a:rPr lang="en-US" dirty="0"/>
-              <a:t/>
-            </a:r>
             <a:endParaRPr lang="en-US" dirty="0"/>
           </a:p>
         </p:txBody>
@@ -954,10 +715,6 @@
           <a:bodyPr/>
           <a:lstStyle/>
           <a:p>
-            <a:r>
-              <a:rPr lang="en-US" dirty="0"/>
-              <a:t/>
-            </a:r>
             <a:endParaRPr lang="en-US" dirty="0"/>
           </a:p>
         </p:txBody>
@@ -1042,10 +799,6 @@
           <a:bodyPr/>
           <a:lstStyle/>
           <a:p>
-            <a:r>
-              <a:rPr lang="en-US" dirty="0"/>
-              <a:t/>
-            </a:r>
             <a:endParaRPr lang="en-US" dirty="0"/>
           </a:p>
         </p:txBody>
@@ -1130,10 +883,6 @@
           <a:bodyPr/>
           <a:lstStyle/>
           <a:p>
-            <a:r>
-              <a:rPr lang="en-US" dirty="0"/>
-              <a:t/>
-            </a:r>
             <a:endParaRPr lang="en-US" dirty="0"/>
           </a:p>
         </p:txBody>
@@ -1218,10 +967,6 @@
           <a:bodyPr/>
           <a:lstStyle/>
           <a:p>
-            <a:r>
-              <a:rPr lang="en-US" dirty="0"/>
-              <a:t/>
-            </a:r>
             <a:endParaRPr lang="en-US" dirty="0"/>
           </a:p>
         </p:txBody>
@@ -1306,10 +1051,6 @@
           <a:bodyPr/>
           <a:lstStyle/>
           <a:p>
-            <a:r>
-              <a:rPr lang="en-US" dirty="0"/>
-              <a:t/>
-            </a:r>
             <a:endParaRPr lang="en-US" dirty="0"/>
           </a:p>
         </p:txBody>
@@ -1394,10 +1135,6 @@
           <a:bodyPr/>
           <a:lstStyle/>
           <a:p>
-            <a:r>
-              <a:rPr lang="en-US" dirty="0"/>
-              <a:t/>
-            </a:r>
             <a:endParaRPr lang="en-US" dirty="0"/>
           </a:p>
         </p:txBody>
@@ -1482,10 +1219,6 @@
           <a:bodyPr/>
           <a:lstStyle/>
           <a:p>
-            <a:r>
-              <a:rPr lang="en-US" dirty="0"/>
-              <a:t/>
-            </a:r>
             <a:endParaRPr lang="en-US" dirty="0"/>
           </a:p>
         </p:txBody>
@@ -1570,10 +1303,6 @@
           <a:bodyPr/>
           <a:lstStyle/>
           <a:p>
-            <a:r>
-              <a:rPr lang="en-US" dirty="0"/>
-              <a:t/>
-            </a:r>
             <a:endParaRPr lang="en-US" dirty="0"/>
           </a:p>
         </p:txBody>
@@ -1658,10 +1387,6 @@
           <a:bodyPr/>
           <a:lstStyle/>
           <a:p>
-            <a:r>
-              <a:rPr lang="en-US" dirty="0"/>
-              <a:t/>
-            </a:r>
             <a:endParaRPr lang="en-US" dirty="0"/>
           </a:p>
         </p:txBody>
@@ -1746,10 +1471,6 @@
           <a:bodyPr/>
           <a:lstStyle/>
           <a:p>
-            <a:r>
-              <a:rPr lang="en-US" dirty="0"/>
-              <a:t/>
-            </a:r>
             <a:endParaRPr lang="en-US" dirty="0"/>
           </a:p>
         </p:txBody>
@@ -1823,6 +1544,11 @@
 <file path=ppt/slideMasters/slideMaster1.xml><?xml version="1.0" encoding="utf-8"?>
 <p:sldMaster xmlns:a="http://schemas.openxmlformats.org/drawingml/2006/main" xmlns:r="http://schemas.openxmlformats.org/officeDocument/2006/relationships" xmlns:p="http://schemas.openxmlformats.org/presentationml/2006/main">
   <p:cSld>
+    <p:bg>
+      <p:bgRef idx="1001">
+        <a:schemeClr val="bg1"/>
+      </p:bgRef>
+    </p:bg>
     <p:spTree>
       <p:nvGrpSpPr>
         <p:cNvPr id="1" name=""/>
@@ -2105,6 +1831,7 @@
         <a:solidFill>
           <a:srgbClr val="1E2530"/>
         </a:solidFill>
+        <a:effectLst/>
       </p:bgPr>
     </p:bg>
     <p:spTree>
@@ -2140,6 +1867,13 @@
           </a:solidFill>
           <a:ln/>
         </p:spPr>
+        <p:txBody>
+          <a:bodyPr/>
+          <a:lstStyle/>
+          <a:p>
+            <a:endParaRPr lang="en-US"/>
+          </a:p>
+        </p:txBody>
       </p:sp>
       <p:sp>
         <p:nvSpPr>
@@ -2162,11 +1896,11 @@
           <a:bodyPr wrap="square" lIns="0" tIns="0" rIns="0" bIns="0" rtlCol="0" anchor="ctr"/>
           <a:lstStyle/>
           <a:p>
-            <a:pPr indent="0" marL="0">
-              <a:buNone/>
-            </a:pPr>
-            <a:r>
-              <a:rPr lang="en-US" sz="1400" b="1" spc="600" kern="0" dirty="0">
+            <a:pPr marL="0" indent="0">
+              <a:buNone/>
+            </a:pPr>
+            <a:r>
+              <a:rPr lang="en-US" sz="1400" b="1" kern="0" spc="600" dirty="0">
                 <a:solidFill>
                   <a:srgbClr val="B8975C"/>
                 </a:solidFill>
@@ -2201,7 +1935,7 @@
           <a:bodyPr wrap="square" lIns="0" tIns="0" rIns="0" bIns="0" rtlCol="0" anchor="ctr"/>
           <a:lstStyle/>
           <a:p>
-            <a:pPr indent="0" marL="0">
+            <a:pPr marL="0" indent="0">
               <a:lnSpc>
                 <a:spcPct val="110000"/>
               </a:lnSpc>
@@ -2221,7 +1955,7 @@
             <a:endParaRPr lang="en-US" sz="4000" dirty="0"/>
           </a:p>
           <a:p>
-            <a:pPr indent="0" marL="0">
+            <a:pPr marL="0" indent="0">
               <a:lnSpc>
                 <a:spcPct val="110000"/>
               </a:lnSpc>
@@ -2261,6 +1995,13 @@
           </a:solidFill>
           <a:ln/>
         </p:spPr>
+        <p:txBody>
+          <a:bodyPr/>
+          <a:lstStyle/>
+          <a:p>
+            <a:endParaRPr lang="en-US"/>
+          </a:p>
+        </p:txBody>
       </p:sp>
       <p:sp>
         <p:nvSpPr>
@@ -2283,7 +2024,7 @@
           <a:bodyPr wrap="square" lIns="0" tIns="0" rIns="0" bIns="0" rtlCol="0" anchor="ctr"/>
           <a:lstStyle/>
           <a:p>
-            <a:pPr indent="0" marL="0">
+            <a:pPr marL="0" indent="0">
               <a:lnSpc>
                 <a:spcPct val="140000"/>
               </a:lnSpc>
@@ -2303,7 +2044,7 @@
             <a:endParaRPr lang="en-US" sz="1400" dirty="0"/>
           </a:p>
           <a:p>
-            <a:pPr indent="0" marL="0">
+            <a:pPr marL="0" indent="0">
               <a:lnSpc>
                 <a:spcPct val="140000"/>
               </a:lnSpc>
@@ -2326,14 +2067,14 @@
       </p:sp>
       <p:pic>
         <p:nvPicPr>
-          <p:cNvPr id="7" name="Image 0" descr="preencoded.png">    </p:cNvPr>
+          <p:cNvPr id="7" name="Image 0" descr="preencoded.png"/>
           <p:cNvPicPr>
             <a:picLocks noChangeAspect="1"/>
           </p:cNvPicPr>
           <p:nvPr/>
         </p:nvPicPr>
         <p:blipFill>
-          <a:blip r:embed="rId1"/>
+          <a:blip r:embed="rId3"/>
           <a:stretch>
             <a:fillRect/>
           </a:stretch>
@@ -2369,7 +2110,7 @@
           <a:bodyPr wrap="square" rtlCol="0" anchor="ctr"/>
           <a:lstStyle/>
           <a:p>
-            <a:pPr algn="ctr" indent="0" marL="0">
+            <a:pPr marL="0" indent="0" algn="ctr">
               <a:buNone/>
             </a:pPr>
             <a:r>
@@ -2381,7 +2122,7 @@
                 <a:ea typeface="Open Sans" pitchFamily="34" charset="-122"/>
                 <a:cs typeface="Open Sans" pitchFamily="34" charset="-120"/>
               </a:rPr>
-              <a:t>BUS-314  |  Shidler College of Business  |  University of Hawaiʻi at Mānoa</a:t>
+              <a:t>Stauffer  |  Shidler College of Business  |  University of Hawaiʻi at Mānoa</a:t>
             </a:r>
             <a:endParaRPr lang="en-US" sz="1000" dirty="0"/>
           </a:p>
@@ -2403,6 +2144,7 @@
         <a:solidFill>
           <a:srgbClr val="1E2530"/>
         </a:solidFill>
+        <a:effectLst/>
       </p:bgPr>
     </p:bg>
     <p:spTree>
@@ -2438,6 +2180,13 @@
           </a:solidFill>
           <a:ln/>
         </p:spPr>
+        <p:txBody>
+          <a:bodyPr/>
+          <a:lstStyle/>
+          <a:p>
+            <a:endParaRPr lang="en-US"/>
+          </a:p>
+        </p:txBody>
       </p:sp>
       <p:sp>
         <p:nvSpPr>
@@ -2460,11 +2209,11 @@
           <a:bodyPr wrap="square" lIns="0" tIns="0" rIns="0" bIns="0" rtlCol="0" anchor="ctr"/>
           <a:lstStyle/>
           <a:p>
-            <a:pPr indent="0" marL="0">
-              <a:buNone/>
-            </a:pPr>
-            <a:r>
-              <a:rPr lang="en-US" sz="1400" b="1" spc="600" kern="0" dirty="0">
+            <a:pPr marL="0" indent="0">
+              <a:buNone/>
+            </a:pPr>
+            <a:r>
+              <a:rPr lang="en-US" sz="1400" b="1" kern="0" spc="600" dirty="0">
                 <a:solidFill>
                   <a:srgbClr val="B8975C"/>
                 </a:solidFill>
@@ -2499,7 +2248,7 @@
           <a:bodyPr wrap="square" lIns="0" tIns="0" rIns="0" bIns="0" rtlCol="0" anchor="ctr"/>
           <a:lstStyle/>
           <a:p>
-            <a:pPr indent="0" marL="0">
+            <a:pPr marL="0" indent="0">
               <a:lnSpc>
                 <a:spcPct val="110000"/>
               </a:lnSpc>
@@ -2519,7 +2268,7 @@
             <a:endParaRPr lang="en-US" sz="4000" dirty="0"/>
           </a:p>
           <a:p>
-            <a:pPr indent="0" marL="0">
+            <a:pPr marL="0" indent="0">
               <a:lnSpc>
                 <a:spcPct val="110000"/>
               </a:lnSpc>
@@ -2559,6 +2308,13 @@
           </a:solidFill>
           <a:ln/>
         </p:spPr>
+        <p:txBody>
+          <a:bodyPr/>
+          <a:lstStyle/>
+          <a:p>
+            <a:endParaRPr lang="en-US"/>
+          </a:p>
+        </p:txBody>
       </p:sp>
       <p:sp>
         <p:nvSpPr>
@@ -2581,7 +2337,7 @@
           <a:bodyPr wrap="square" lIns="0" tIns="0" rIns="0" bIns="0" rtlCol="0" anchor="ctr"/>
           <a:lstStyle/>
           <a:p>
-            <a:pPr indent="0" marL="0">
+            <a:pPr marL="0" indent="0">
               <a:lnSpc>
                 <a:spcPct val="140000"/>
               </a:lnSpc>
@@ -2601,7 +2357,7 @@
             <a:endParaRPr lang="en-US" sz="1400" dirty="0"/>
           </a:p>
           <a:p>
-            <a:pPr indent="0" marL="0">
+            <a:pPr marL="0" indent="0">
               <a:lnSpc>
                 <a:spcPct val="140000"/>
               </a:lnSpc>
@@ -2624,14 +2380,14 @@
       </p:sp>
       <p:pic>
         <p:nvPicPr>
-          <p:cNvPr id="7" name="Image 0" descr="preencoded.png">    </p:cNvPr>
+          <p:cNvPr id="7" name="Image 0" descr="preencoded.png"/>
           <p:cNvPicPr>
             <a:picLocks noChangeAspect="1"/>
           </p:cNvPicPr>
           <p:nvPr/>
         </p:nvPicPr>
         <p:blipFill>
-          <a:blip r:embed="rId1"/>
+          <a:blip r:embed="rId3"/>
           <a:stretch>
             <a:fillRect/>
           </a:stretch>
@@ -2667,7 +2423,7 @@
           <a:bodyPr wrap="square" rtlCol="0" anchor="ctr"/>
           <a:lstStyle/>
           <a:p>
-            <a:pPr algn="ctr" indent="0" marL="0">
+            <a:pPr marL="0" indent="0" algn="ctr">
               <a:buNone/>
             </a:pPr>
             <a:r>
@@ -2679,7 +2435,7 @@
                 <a:ea typeface="Open Sans" pitchFamily="34" charset="-122"/>
                 <a:cs typeface="Open Sans" pitchFamily="34" charset="-120"/>
               </a:rPr>
-              <a:t>BUS-314  |  Shidler College of Business  |  University of Hawaiʻi at Mānoa</a:t>
+              <a:t>Stauffer  |  Shidler College of Business  |  University of Hawaiʻi at Mānoa</a:t>
             </a:r>
             <a:endParaRPr lang="en-US" sz="1000" dirty="0"/>
           </a:p>
@@ -2701,6 +2457,7 @@
         <a:solidFill>
           <a:srgbClr val="FAF9F7"/>
         </a:solidFill>
+        <a:effectLst/>
       </p:bgPr>
     </p:bg>
     <p:spTree>
@@ -2736,6 +2493,13 @@
           </a:solidFill>
           <a:ln/>
         </p:spPr>
+        <p:txBody>
+          <a:bodyPr/>
+          <a:lstStyle/>
+          <a:p>
+            <a:endParaRPr lang="en-US"/>
+          </a:p>
+        </p:txBody>
       </p:sp>
       <p:sp>
         <p:nvSpPr>
@@ -2756,6 +2520,13 @@
           </a:solidFill>
           <a:ln/>
         </p:spPr>
+        <p:txBody>
+          <a:bodyPr/>
+          <a:lstStyle/>
+          <a:p>
+            <a:endParaRPr lang="en-US"/>
+          </a:p>
+        </p:txBody>
       </p:sp>
       <p:sp>
         <p:nvSpPr>
@@ -2778,7 +2549,7 @@
           <a:bodyPr wrap="square" rtlCol="0" anchor="ctr"/>
           <a:lstStyle/>
           <a:p>
-            <a:pPr algn="ctr" indent="0" marL="0">
+            <a:pPr marL="0" indent="0" algn="ctr">
               <a:buNone/>
             </a:pPr>
             <a:r>
@@ -2790,7 +2561,7 @@
                 <a:ea typeface="Open Sans" pitchFamily="34" charset="-122"/>
                 <a:cs typeface="Open Sans" pitchFamily="34" charset="-120"/>
               </a:rPr>
-              <a:t>BUS-314  |  Appendix: GitHub &amp; AI Setup Guide  |  Shidler College of Business</a:t>
+              <a:t>Stauffer  |  Appendix: GitHub &amp; AI Setup Guide  |  Shidler College of Business</a:t>
             </a:r>
             <a:endParaRPr lang="en-US" sz="900" dirty="0"/>
           </a:p>
@@ -2817,7 +2588,7 @@
           <a:bodyPr wrap="square" lIns="0" tIns="0" rIns="0" bIns="0" rtlCol="0" anchor="ctr"/>
           <a:lstStyle/>
           <a:p>
-            <a:pPr indent="0" marL="0">
+            <a:pPr marL="0" indent="0">
               <a:buNone/>
             </a:pPr>
             <a:r>
@@ -2856,7 +2627,7 @@
           <a:bodyPr wrap="square" lIns="0" tIns="0" rIns="0" bIns="0" rtlCol="0" anchor="ctr"/>
           <a:lstStyle/>
           <a:p>
-            <a:pPr indent="0" marL="0">
+            <a:pPr marL="0" indent="0">
               <a:buNone/>
             </a:pPr>
             <a:r>
@@ -2893,24 +2664,31 @@
           </a:solidFill>
           <a:ln/>
           <a:effectLst>
-            <a:outerShdw sx="100000" sy="100000" kx="0" ky="0" algn="bl" rotWithShape="0" blurRad="50800" dist="25400" dir="8100000">
+            <a:outerShdw blurRad="50800" dist="25400" dir="8100000" algn="bl" rotWithShape="0">
               <a:srgbClr val="000000">
                 <a:alpha val="6000"/>
               </a:srgbClr>
             </a:outerShdw>
           </a:effectLst>
         </p:spPr>
+        <p:txBody>
+          <a:bodyPr/>
+          <a:lstStyle/>
+          <a:p>
+            <a:endParaRPr lang="en-US"/>
+          </a:p>
+        </p:txBody>
       </p:sp>
       <p:pic>
         <p:nvPicPr>
-          <p:cNvPr id="8" name="Image 0" descr="preencoded.png">    </p:cNvPr>
+          <p:cNvPr id="8" name="Image 0" descr="preencoded.png"/>
           <p:cNvPicPr>
             <a:picLocks noChangeAspect="1"/>
           </p:cNvPicPr>
           <p:nvPr/>
         </p:nvPicPr>
         <p:blipFill>
-          <a:blip r:embed="rId1"/>
+          <a:blip r:embed="rId3"/>
           <a:stretch>
             <a:fillRect/>
           </a:stretch>
@@ -2946,7 +2724,7 @@
           <a:bodyPr wrap="square" lIns="0" tIns="0" rIns="0" bIns="0" rtlCol="0" anchor="ctr"/>
           <a:lstStyle/>
           <a:p>
-            <a:pPr indent="0" marL="0">
+            <a:pPr marL="0" indent="0">
               <a:buNone/>
             </a:pPr>
             <a:r>
@@ -3223,24 +3001,31 @@
           </a:solidFill>
           <a:ln/>
           <a:effectLst>
-            <a:outerShdw sx="100000" sy="100000" kx="0" ky="0" algn="bl" rotWithShape="0" blurRad="50800" dist="25400" dir="8100000">
+            <a:outerShdw blurRad="50800" dist="25400" dir="8100000" algn="bl" rotWithShape="0">
               <a:srgbClr val="000000">
                 <a:alpha val="6000"/>
               </a:srgbClr>
             </a:outerShdw>
           </a:effectLst>
         </p:spPr>
+        <p:txBody>
+          <a:bodyPr/>
+          <a:lstStyle/>
+          <a:p>
+            <a:endParaRPr lang="en-US"/>
+          </a:p>
+        </p:txBody>
       </p:sp>
       <p:pic>
         <p:nvPicPr>
-          <p:cNvPr id="17" name="Image 1" descr="preencoded.png">    </p:cNvPr>
+          <p:cNvPr id="17" name="Image 1" descr="preencoded.png"/>
           <p:cNvPicPr>
             <a:picLocks noChangeAspect="1"/>
           </p:cNvPicPr>
           <p:nvPr/>
         </p:nvPicPr>
         <p:blipFill>
-          <a:blip r:embed="rId2"/>
+          <a:blip r:embed="rId4"/>
           <a:stretch>
             <a:fillRect/>
           </a:stretch>
@@ -3276,7 +3061,7 @@
           <a:bodyPr wrap="square" lIns="0" tIns="0" rIns="0" bIns="0" rtlCol="0" anchor="ctr"/>
           <a:lstStyle/>
           <a:p>
-            <a:pPr indent="0" marL="0">
+            <a:pPr marL="0" indent="0">
               <a:buNone/>
             </a:pPr>
             <a:r>
@@ -3525,6 +3310,7 @@
         <a:solidFill>
           <a:srgbClr val="FAF9F7"/>
         </a:solidFill>
+        <a:effectLst/>
       </p:bgPr>
     </p:bg>
     <p:spTree>
@@ -3560,6 +3346,13 @@
           </a:solidFill>
           <a:ln/>
         </p:spPr>
+        <p:txBody>
+          <a:bodyPr/>
+          <a:lstStyle/>
+          <a:p>
+            <a:endParaRPr lang="en-US"/>
+          </a:p>
+        </p:txBody>
       </p:sp>
       <p:sp>
         <p:nvSpPr>
@@ -3580,6 +3373,13 @@
           </a:solidFill>
           <a:ln/>
         </p:spPr>
+        <p:txBody>
+          <a:bodyPr/>
+          <a:lstStyle/>
+          <a:p>
+            <a:endParaRPr lang="en-US"/>
+          </a:p>
+        </p:txBody>
       </p:sp>
       <p:sp>
         <p:nvSpPr>
@@ -3602,7 +3402,7 @@
           <a:bodyPr wrap="square" rtlCol="0" anchor="ctr"/>
           <a:lstStyle/>
           <a:p>
-            <a:pPr algn="ctr" indent="0" marL="0">
+            <a:pPr marL="0" indent="0" algn="ctr">
               <a:buNone/>
             </a:pPr>
             <a:r>
@@ -3614,7 +3414,7 @@
                 <a:ea typeface="Open Sans" pitchFamily="34" charset="-122"/>
                 <a:cs typeface="Open Sans" pitchFamily="34" charset="-120"/>
               </a:rPr>
-              <a:t>BUS-314  |  Appendix: GitHub &amp; AI Setup Guide  |  Shidler College of Business</a:t>
+              <a:t>Stauffer  |  Appendix: GitHub &amp; AI Setup Guide  |  Shidler College of Business</a:t>
             </a:r>
             <a:endParaRPr lang="en-US" sz="900" dirty="0"/>
           </a:p>
@@ -3641,7 +3441,7 @@
           <a:bodyPr wrap="square" lIns="0" tIns="0" rIns="0" bIns="0" rtlCol="0" anchor="ctr"/>
           <a:lstStyle/>
           <a:p>
-            <a:pPr indent="0" marL="0">
+            <a:pPr marL="0" indent="0">
               <a:buNone/>
             </a:pPr>
             <a:r>
@@ -3680,7 +3480,7 @@
           <a:bodyPr wrap="square" lIns="0" tIns="0" rIns="0" bIns="0" rtlCol="0" anchor="ctr"/>
           <a:lstStyle/>
           <a:p>
-            <a:pPr indent="0" marL="0">
+            <a:pPr marL="0" indent="0">
               <a:buNone/>
             </a:pPr>
             <a:r>
@@ -3717,13 +3517,20 @@
           </a:solidFill>
           <a:ln/>
           <a:effectLst>
-            <a:outerShdw sx="100000" sy="100000" kx="0" ky="0" algn="bl" rotWithShape="0" blurRad="50800" dist="25400" dir="8100000">
+            <a:outerShdw blurRad="50800" dist="25400" dir="8100000" algn="bl" rotWithShape="0">
               <a:srgbClr val="000000">
                 <a:alpha val="6000"/>
               </a:srgbClr>
             </a:outerShdw>
           </a:effectLst>
         </p:spPr>
+        <p:txBody>
+          <a:bodyPr/>
+          <a:lstStyle/>
+          <a:p>
+            <a:endParaRPr lang="en-US"/>
+          </a:p>
+        </p:txBody>
       </p:sp>
       <p:sp>
         <p:nvSpPr>
@@ -3746,7 +3553,7 @@
           <a:bodyPr wrap="square" lIns="0" tIns="0" rIns="0" bIns="0" rtlCol="0" anchor="ctr"/>
           <a:lstStyle/>
           <a:p>
-            <a:pPr indent="0" marL="0">
+            <a:pPr marL="0" indent="0">
               <a:buNone/>
             </a:pPr>
             <a:r>
@@ -3943,13 +3750,20 @@
           </a:solidFill>
           <a:ln/>
           <a:effectLst>
-            <a:outerShdw sx="100000" sy="100000" kx="0" ky="0" algn="bl" rotWithShape="0" blurRad="50800" dist="25400" dir="8100000">
+            <a:outerShdw blurRad="50800" dist="25400" dir="8100000" algn="bl" rotWithShape="0">
               <a:srgbClr val="000000">
                 <a:alpha val="6000"/>
               </a:srgbClr>
             </a:outerShdw>
           </a:effectLst>
         </p:spPr>
+        <p:txBody>
+          <a:bodyPr/>
+          <a:lstStyle/>
+          <a:p>
+            <a:endParaRPr lang="en-US"/>
+          </a:p>
+        </p:txBody>
       </p:sp>
       <p:sp>
         <p:nvSpPr>
@@ -3972,7 +3786,7 @@
           <a:bodyPr wrap="square" lIns="0" tIns="0" rIns="0" bIns="0" rtlCol="0" anchor="ctr"/>
           <a:lstStyle/>
           <a:p>
-            <a:pPr indent="0" marL="0">
+            <a:pPr marL="0" indent="0">
               <a:buNone/>
             </a:pPr>
             <a:r>
@@ -4162,26 +3976,31 @@
             <a:ext cx="7680960" cy="1005840"/>
           </a:xfrm>
           <a:prstGeom prst="rect">
-            <a:avLst>
-              <a:gd name="adj" fmla="val 3636"/>
-            </a:avLst>
+            <a:avLst/>
           </a:prstGeom>
           <a:solidFill>
             <a:srgbClr val="36454F"/>
           </a:solidFill>
           <a:ln/>
         </p:spPr>
+        <p:txBody>
+          <a:bodyPr/>
+          <a:lstStyle/>
+          <a:p>
+            <a:endParaRPr lang="en-US"/>
+          </a:p>
+        </p:txBody>
       </p:sp>
       <p:pic>
         <p:nvPicPr>
-          <p:cNvPr id="20" name="Image 0" descr="preencoded.png">    </p:cNvPr>
+          <p:cNvPr id="20" name="Image 0" descr="preencoded.png"/>
           <p:cNvPicPr>
             <a:picLocks noChangeAspect="1"/>
           </p:cNvPicPr>
           <p:nvPr/>
         </p:nvPicPr>
         <p:blipFill>
-          <a:blip r:embed="rId1"/>
+          <a:blip r:embed="rId3"/>
           <a:stretch>
             <a:fillRect/>
           </a:stretch>
@@ -4217,7 +4036,7 @@
           <a:bodyPr wrap="square" lIns="0" tIns="0" rIns="0" bIns="0" rtlCol="0" anchor="ctr"/>
           <a:lstStyle/>
           <a:p>
-            <a:pPr indent="0" marL="0">
+            <a:pPr marL="0" indent="0">
               <a:buNone/>
             </a:pPr>
             <a:r>
@@ -4256,7 +4075,7 @@
           <a:bodyPr wrap="square" lIns="0" tIns="0" rIns="0" bIns="0" rtlCol="0" anchor="ctr"/>
           <a:lstStyle/>
           <a:p>
-            <a:pPr indent="0" marL="0">
+            <a:pPr marL="0" indent="0">
               <a:lnSpc>
                 <a:spcPct val="130000"/>
               </a:lnSpc>
@@ -4293,6 +4112,7 @@
         <a:solidFill>
           <a:srgbClr val="FAF9F7"/>
         </a:solidFill>
+        <a:effectLst/>
       </p:bgPr>
     </p:bg>
     <p:spTree>
@@ -4328,6 +4148,13 @@
           </a:solidFill>
           <a:ln/>
         </p:spPr>
+        <p:txBody>
+          <a:bodyPr/>
+          <a:lstStyle/>
+          <a:p>
+            <a:endParaRPr lang="en-US"/>
+          </a:p>
+        </p:txBody>
       </p:sp>
       <p:sp>
         <p:nvSpPr>
@@ -4348,6 +4175,13 @@
           </a:solidFill>
           <a:ln/>
         </p:spPr>
+        <p:txBody>
+          <a:bodyPr/>
+          <a:lstStyle/>
+          <a:p>
+            <a:endParaRPr lang="en-US"/>
+          </a:p>
+        </p:txBody>
       </p:sp>
       <p:sp>
         <p:nvSpPr>
@@ -4370,7 +4204,7 @@
           <a:bodyPr wrap="square" rtlCol="0" anchor="ctr"/>
           <a:lstStyle/>
           <a:p>
-            <a:pPr algn="ctr" indent="0" marL="0">
+            <a:pPr marL="0" indent="0" algn="ctr">
               <a:buNone/>
             </a:pPr>
             <a:r>
@@ -4382,7 +4216,7 @@
                 <a:ea typeface="Open Sans" pitchFamily="34" charset="-122"/>
                 <a:cs typeface="Open Sans" pitchFamily="34" charset="-120"/>
               </a:rPr>
-              <a:t>BUS-314  |  Appendix: GitHub &amp; AI Setup Guide  |  Shidler College of Business</a:t>
+              <a:t>Stauffer  |  Appendix: GitHub &amp; AI Setup Guide  |  Shidler College of Business</a:t>
             </a:r>
             <a:endParaRPr lang="en-US" sz="900" dirty="0"/>
           </a:p>
@@ -4409,7 +4243,7 @@
           <a:bodyPr wrap="square" lIns="0" tIns="0" rIns="0" bIns="0" rtlCol="0" anchor="ctr"/>
           <a:lstStyle/>
           <a:p>
-            <a:pPr indent="0" marL="0">
+            <a:pPr marL="0" indent="0">
               <a:buNone/>
             </a:pPr>
             <a:r>
@@ -4448,7 +4282,7 @@
           <a:bodyPr wrap="square" lIns="0" tIns="0" rIns="0" bIns="0" rtlCol="0" anchor="ctr"/>
           <a:lstStyle/>
           <a:p>
-            <a:pPr indent="0" marL="0">
+            <a:pPr marL="0" indent="0">
               <a:buNone/>
             </a:pPr>
             <a:r>
@@ -4485,13 +4319,20 @@
           </a:solidFill>
           <a:ln/>
           <a:effectLst>
-            <a:outerShdw sx="100000" sy="100000" kx="0" ky="0" algn="bl" rotWithShape="0" blurRad="38100" dist="12700" dir="8100000">
+            <a:outerShdw blurRad="38100" dist="12700" dir="8100000" algn="bl" rotWithShape="0">
               <a:srgbClr val="000000">
                 <a:alpha val="5000"/>
               </a:srgbClr>
             </a:outerShdw>
           </a:effectLst>
         </p:spPr>
+        <p:txBody>
+          <a:bodyPr/>
+          <a:lstStyle/>
+          <a:p>
+            <a:endParaRPr lang="en-US"/>
+          </a:p>
+        </p:txBody>
       </p:sp>
       <p:sp>
         <p:nvSpPr>
@@ -4512,6 +4353,13 @@
           </a:solidFill>
           <a:ln/>
         </p:spPr>
+        <p:txBody>
+          <a:bodyPr/>
+          <a:lstStyle/>
+          <a:p>
+            <a:endParaRPr lang="en-US"/>
+          </a:p>
+        </p:txBody>
       </p:sp>
       <p:sp>
         <p:nvSpPr>
@@ -4534,7 +4382,7 @@
           <a:bodyPr wrap="square" lIns="0" tIns="0" rIns="0" bIns="0" rtlCol="0" anchor="ctr"/>
           <a:lstStyle/>
           <a:p>
-            <a:pPr indent="0" marL="0">
+            <a:pPr marL="0" indent="0">
               <a:buNone/>
             </a:pPr>
             <a:r>
@@ -4573,7 +4421,7 @@
           <a:bodyPr wrap="square" lIns="0" tIns="0" rIns="0" bIns="0" rtlCol="0" anchor="ctr"/>
           <a:lstStyle/>
           <a:p>
-            <a:pPr indent="0" marL="0">
+            <a:pPr marL="0" indent="0">
               <a:buNone/>
             </a:pPr>
             <a:r>
@@ -4584,9 +4432,6 @@
               </a:rPr>
               <a:t>Vague:  </a:t>
             </a:r>
-            <a:pPr indent="0" marL="0">
-              <a:buNone/>
-            </a:pPr>
             <a:r>
               <a:rPr lang="en-US" sz="1000" i="1" dirty="0">
                 <a:solidFill>
@@ -4620,7 +4465,7 @@
           <a:bodyPr wrap="square" lIns="0" tIns="0" rIns="0" bIns="0" rtlCol="0" anchor="ctr"/>
           <a:lstStyle/>
           <a:p>
-            <a:pPr indent="0" marL="0">
+            <a:pPr marL="0" indent="0">
               <a:lnSpc>
                 <a:spcPct val="130000"/>
               </a:lnSpc>
@@ -4634,12 +4479,6 @@
               </a:rPr>
               <a:t>Better:  </a:t>
             </a:r>
-            <a:pPr indent="0" marL="0">
-              <a:lnSpc>
-                <a:spcPct val="130000"/>
-              </a:lnSpc>
-              <a:buNone/>
-            </a:pPr>
             <a:r>
               <a:rPr lang="en-US" sz="1000" dirty="0">
                 <a:solidFill>
@@ -4671,13 +4510,20 @@
           </a:solidFill>
           <a:ln/>
           <a:effectLst>
-            <a:outerShdw sx="100000" sy="100000" kx="0" ky="0" algn="bl" rotWithShape="0" blurRad="38100" dist="12700" dir="8100000">
+            <a:outerShdw blurRad="38100" dist="12700" dir="8100000" algn="bl" rotWithShape="0">
               <a:srgbClr val="000000">
                 <a:alpha val="5000"/>
               </a:srgbClr>
             </a:outerShdw>
           </a:effectLst>
         </p:spPr>
+        <p:txBody>
+          <a:bodyPr/>
+          <a:lstStyle/>
+          <a:p>
+            <a:endParaRPr lang="en-US"/>
+          </a:p>
+        </p:txBody>
       </p:sp>
       <p:sp>
         <p:nvSpPr>
@@ -4698,6 +4544,13 @@
           </a:solidFill>
           <a:ln/>
         </p:spPr>
+        <p:txBody>
+          <a:bodyPr/>
+          <a:lstStyle/>
+          <a:p>
+            <a:endParaRPr lang="en-US"/>
+          </a:p>
+        </p:txBody>
       </p:sp>
       <p:sp>
         <p:nvSpPr>
@@ -4720,7 +4573,7 @@
           <a:bodyPr wrap="square" lIns="0" tIns="0" rIns="0" bIns="0" rtlCol="0" anchor="ctr"/>
           <a:lstStyle/>
           <a:p>
-            <a:pPr indent="0" marL="0">
+            <a:pPr marL="0" indent="0">
               <a:buNone/>
             </a:pPr>
             <a:r>
@@ -4759,7 +4612,7 @@
           <a:bodyPr wrap="square" lIns="0" tIns="0" rIns="0" bIns="0" rtlCol="0" anchor="ctr"/>
           <a:lstStyle/>
           <a:p>
-            <a:pPr indent="0" marL="0">
+            <a:pPr marL="0" indent="0">
               <a:buNone/>
             </a:pPr>
             <a:r>
@@ -4770,9 +4623,6 @@
               </a:rPr>
               <a:t>Vague:  </a:t>
             </a:r>
-            <a:pPr indent="0" marL="0">
-              <a:buNone/>
-            </a:pPr>
             <a:r>
               <a:rPr lang="en-US" sz="1000" i="1" dirty="0">
                 <a:solidFill>
@@ -4806,7 +4656,7 @@
           <a:bodyPr wrap="square" lIns="0" tIns="0" rIns="0" bIns="0" rtlCol="0" anchor="ctr"/>
           <a:lstStyle/>
           <a:p>
-            <a:pPr indent="0" marL="0">
+            <a:pPr marL="0" indent="0">
               <a:lnSpc>
                 <a:spcPct val="130000"/>
               </a:lnSpc>
@@ -4820,12 +4670,6 @@
               </a:rPr>
               <a:t>Better:  </a:t>
             </a:r>
-            <a:pPr indent="0" marL="0">
-              <a:lnSpc>
-                <a:spcPct val="130000"/>
-              </a:lnSpc>
-              <a:buNone/>
-            </a:pPr>
             <a:r>
               <a:rPr lang="en-US" sz="1000" dirty="0">
                 <a:solidFill>
@@ -4857,13 +4701,20 @@
           </a:solidFill>
           <a:ln/>
           <a:effectLst>
-            <a:outerShdw sx="100000" sy="100000" kx="0" ky="0" algn="bl" rotWithShape="0" blurRad="38100" dist="12700" dir="8100000">
+            <a:outerShdw blurRad="38100" dist="12700" dir="8100000" algn="bl" rotWithShape="0">
               <a:srgbClr val="000000">
                 <a:alpha val="5000"/>
               </a:srgbClr>
             </a:outerShdw>
           </a:effectLst>
         </p:spPr>
+        <p:txBody>
+          <a:bodyPr/>
+          <a:lstStyle/>
+          <a:p>
+            <a:endParaRPr lang="en-US"/>
+          </a:p>
+        </p:txBody>
       </p:sp>
       <p:sp>
         <p:nvSpPr>
@@ -4884,6 +4735,13 @@
           </a:solidFill>
           <a:ln/>
         </p:spPr>
+        <p:txBody>
+          <a:bodyPr/>
+          <a:lstStyle/>
+          <a:p>
+            <a:endParaRPr lang="en-US"/>
+          </a:p>
+        </p:txBody>
       </p:sp>
       <p:sp>
         <p:nvSpPr>
@@ -4906,7 +4764,7 @@
           <a:bodyPr wrap="square" lIns="0" tIns="0" rIns="0" bIns="0" rtlCol="0" anchor="ctr"/>
           <a:lstStyle/>
           <a:p>
-            <a:pPr indent="0" marL="0">
+            <a:pPr marL="0" indent="0">
               <a:buNone/>
             </a:pPr>
             <a:r>
@@ -4945,7 +4803,7 @@
           <a:bodyPr wrap="square" lIns="0" tIns="0" rIns="0" bIns="0" rtlCol="0" anchor="ctr"/>
           <a:lstStyle/>
           <a:p>
-            <a:pPr indent="0" marL="0">
+            <a:pPr marL="0" indent="0">
               <a:buNone/>
             </a:pPr>
             <a:r>
@@ -4956,9 +4814,6 @@
               </a:rPr>
               <a:t>Vague:  </a:t>
             </a:r>
-            <a:pPr indent="0" marL="0">
-              <a:buNone/>
-            </a:pPr>
             <a:r>
               <a:rPr lang="en-US" sz="1000" i="1" dirty="0">
                 <a:solidFill>
@@ -4992,7 +4847,7 @@
           <a:bodyPr wrap="square" lIns="0" tIns="0" rIns="0" bIns="0" rtlCol="0" anchor="ctr"/>
           <a:lstStyle/>
           <a:p>
-            <a:pPr indent="0" marL="0">
+            <a:pPr marL="0" indent="0">
               <a:lnSpc>
                 <a:spcPct val="130000"/>
               </a:lnSpc>
@@ -5006,12 +4861,6 @@
               </a:rPr>
               <a:t>Better:  </a:t>
             </a:r>
-            <a:pPr indent="0" marL="0">
-              <a:lnSpc>
-                <a:spcPct val="130000"/>
-              </a:lnSpc>
-              <a:buNone/>
-            </a:pPr>
             <a:r>
               <a:rPr lang="en-US" sz="1000" dirty="0">
                 <a:solidFill>
@@ -5043,13 +4892,20 @@
           </a:solidFill>
           <a:ln/>
           <a:effectLst>
-            <a:outerShdw sx="100000" sy="100000" kx="0" ky="0" algn="bl" rotWithShape="0" blurRad="38100" dist="12700" dir="8100000">
+            <a:outerShdw blurRad="38100" dist="12700" dir="8100000" algn="bl" rotWithShape="0">
               <a:srgbClr val="000000">
                 <a:alpha val="5000"/>
               </a:srgbClr>
             </a:outerShdw>
           </a:effectLst>
         </p:spPr>
+        <p:txBody>
+          <a:bodyPr/>
+          <a:lstStyle/>
+          <a:p>
+            <a:endParaRPr lang="en-US"/>
+          </a:p>
+        </p:txBody>
       </p:sp>
       <p:sp>
         <p:nvSpPr>
@@ -5070,6 +4926,13 @@
           </a:solidFill>
           <a:ln/>
         </p:spPr>
+        <p:txBody>
+          <a:bodyPr/>
+          <a:lstStyle/>
+          <a:p>
+            <a:endParaRPr lang="en-US"/>
+          </a:p>
+        </p:txBody>
       </p:sp>
       <p:sp>
         <p:nvSpPr>
@@ -5092,7 +4955,7 @@
           <a:bodyPr wrap="square" lIns="0" tIns="0" rIns="0" bIns="0" rtlCol="0" anchor="ctr"/>
           <a:lstStyle/>
           <a:p>
-            <a:pPr indent="0" marL="0">
+            <a:pPr marL="0" indent="0">
               <a:buNone/>
             </a:pPr>
             <a:r>
@@ -5131,7 +4994,7 @@
           <a:bodyPr wrap="square" lIns="0" tIns="0" rIns="0" bIns="0" rtlCol="0" anchor="ctr"/>
           <a:lstStyle/>
           <a:p>
-            <a:pPr indent="0" marL="0">
+            <a:pPr marL="0" indent="0">
               <a:buNone/>
             </a:pPr>
             <a:r>
@@ -5142,9 +5005,6 @@
               </a:rPr>
               <a:t>Vague:  </a:t>
             </a:r>
-            <a:pPr indent="0" marL="0">
-              <a:buNone/>
-            </a:pPr>
             <a:r>
               <a:rPr lang="en-US" sz="1000" i="1" dirty="0">
                 <a:solidFill>
@@ -5178,7 +5038,7 @@
           <a:bodyPr wrap="square" lIns="0" tIns="0" rIns="0" bIns="0" rtlCol="0" anchor="ctr"/>
           <a:lstStyle/>
           <a:p>
-            <a:pPr indent="0" marL="0">
+            <a:pPr marL="0" indent="0">
               <a:lnSpc>
                 <a:spcPct val="130000"/>
               </a:lnSpc>
@@ -5192,12 +5052,6 @@
               </a:rPr>
               <a:t>Better:  </a:t>
             </a:r>
-            <a:pPr indent="0" marL="0">
-              <a:lnSpc>
-                <a:spcPct val="130000"/>
-              </a:lnSpc>
-              <a:buNone/>
-            </a:pPr>
             <a:r>
               <a:rPr lang="en-US" sz="1000" dirty="0">
                 <a:solidFill>
@@ -5226,6 +5080,7 @@
         <a:solidFill>
           <a:srgbClr val="FAF9F7"/>
         </a:solidFill>
+        <a:effectLst/>
       </p:bgPr>
     </p:bg>
     <p:spTree>
@@ -5261,6 +5116,13 @@
           </a:solidFill>
           <a:ln/>
         </p:spPr>
+        <p:txBody>
+          <a:bodyPr/>
+          <a:lstStyle/>
+          <a:p>
+            <a:endParaRPr lang="en-US"/>
+          </a:p>
+        </p:txBody>
       </p:sp>
       <p:sp>
         <p:nvSpPr>
@@ -5281,6 +5143,13 @@
           </a:solidFill>
           <a:ln/>
         </p:spPr>
+        <p:txBody>
+          <a:bodyPr/>
+          <a:lstStyle/>
+          <a:p>
+            <a:endParaRPr lang="en-US"/>
+          </a:p>
+        </p:txBody>
       </p:sp>
       <p:sp>
         <p:nvSpPr>
@@ -5303,7 +5172,7 @@
           <a:bodyPr wrap="square" rtlCol="0" anchor="ctr"/>
           <a:lstStyle/>
           <a:p>
-            <a:pPr algn="ctr" indent="0" marL="0">
+            <a:pPr marL="0" indent="0" algn="ctr">
               <a:buNone/>
             </a:pPr>
             <a:r>
@@ -5315,7 +5184,7 @@
                 <a:ea typeface="Open Sans" pitchFamily="34" charset="-122"/>
                 <a:cs typeface="Open Sans" pitchFamily="34" charset="-120"/>
               </a:rPr>
-              <a:t>BUS-314  |  Appendix: GitHub &amp; AI Setup Guide  |  Shidler College of Business</a:t>
+              <a:t>Stauffer  |  Appendix: GitHub &amp; AI Setup Guide  |  Shidler College of Business</a:t>
             </a:r>
             <a:endParaRPr lang="en-US" sz="900" dirty="0"/>
           </a:p>
@@ -5342,7 +5211,7 @@
           <a:bodyPr wrap="square" lIns="0" tIns="0" rIns="0" bIns="0" rtlCol="0" anchor="ctr"/>
           <a:lstStyle/>
           <a:p>
-            <a:pPr indent="0" marL="0">
+            <a:pPr marL="0" indent="0">
               <a:buNone/>
             </a:pPr>
             <a:r>
@@ -5379,399 +5248,24 @@
           </a:solidFill>
           <a:ln/>
           <a:effectLst>
-            <a:outerShdw sx="100000" sy="100000" kx="0" ky="0" algn="bl" rotWithShape="0" blurRad="50800" dist="25400" dir="8100000">
+            <a:outerShdw blurRad="50800" dist="25400" dir="8100000" algn="bl" rotWithShape="0">
               <a:srgbClr val="000000">
                 <a:alpha val="6000"/>
               </a:srgbClr>
             </a:outerShdw>
           </a:effectLst>
         </p:spPr>
+        <p:txBody>
+          <a:bodyPr/>
+          <a:lstStyle/>
+          <a:p>
+            <a:endParaRPr lang="en-US"/>
+          </a:p>
+        </p:txBody>
       </p:sp>
       <p:pic>
         <p:nvPicPr>
-          <p:cNvPr id="7" name="Image 0" descr="preencoded.png">    </p:cNvPr>
-          <p:cNvPicPr>
-            <a:picLocks noChangeAspect="1"/>
-          </p:cNvPicPr>
-          <p:nvPr/>
-        </p:nvPicPr>
-        <p:blipFill>
-          <a:blip r:embed="rId1"/>
-          <a:stretch>
-            <a:fillRect/>
-          </a:stretch>
-        </p:blipFill>
-        <p:spPr>
-          <a:xfrm>
-            <a:off x="960120" y="1188720"/>
-            <a:ext cx="365760" cy="365760"/>
-          </a:xfrm>
-          <a:prstGeom prst="rect">
-            <a:avLst/>
-          </a:prstGeom>
-        </p:spPr>
-      </p:pic>
-      <p:sp>
-        <p:nvSpPr>
-          <p:cNvPr id="8" name="Text 5"/>
-          <p:cNvSpPr/>
-          <p:nvPr/>
-        </p:nvSpPr>
-        <p:spPr>
-          <a:xfrm>
-            <a:off x="548640" y="1645920"/>
-            <a:ext cx="1280160" cy="274320"/>
-          </a:xfrm>
-          <a:prstGeom prst="rect">
-            <a:avLst/>
-          </a:prstGeom>
-          <a:noFill/>
-          <a:ln/>
-        </p:spPr>
-        <p:txBody>
-          <a:bodyPr wrap="square" lIns="0" tIns="0" rIns="0" bIns="0" rtlCol="0" anchor="ctr"/>
-          <a:lstStyle/>
-          <a:p>
-            <a:pPr algn="ctr" indent="0" marL="0">
-              <a:buNone/>
-            </a:pPr>
-            <a:r>
-              <a:rPr lang="en-US" sz="1400" b="1" dirty="0">
-                <a:solidFill>
-                  <a:srgbClr val="1E2530"/>
-                </a:solidFill>
-                <a:latin typeface="Open Sans" pitchFamily="34" charset="0"/>
-                <a:ea typeface="Open Sans" pitchFamily="34" charset="-122"/>
-                <a:cs typeface="Open Sans" pitchFamily="34" charset="-120"/>
-              </a:rPr>
-              <a:t>Draft</a:t>
-            </a:r>
-            <a:endParaRPr lang="en-US" sz="1400" dirty="0"/>
-          </a:p>
-        </p:txBody>
-      </p:sp>
-      <p:sp>
-        <p:nvSpPr>
-          <p:cNvPr id="9" name="Text 6"/>
-          <p:cNvSpPr/>
-          <p:nvPr/>
-        </p:nvSpPr>
-        <p:spPr>
-          <a:xfrm>
-            <a:off x="548640" y="1965960"/>
-            <a:ext cx="1280160" cy="640080"/>
-          </a:xfrm>
-          <a:prstGeom prst="rect">
-            <a:avLst/>
-          </a:prstGeom>
-          <a:noFill/>
-          <a:ln/>
-        </p:spPr>
-        <p:txBody>
-          <a:bodyPr wrap="square" lIns="0" tIns="0" rIns="0" bIns="0" rtlCol="0" anchor="t"/>
-          <a:lstStyle/>
-          <a:p>
-            <a:pPr algn="ctr" indent="0" marL="0">
-              <a:lnSpc>
-                <a:spcPct val="130000"/>
-              </a:lnSpc>
-              <a:buNone/>
-            </a:pPr>
-            <a:r>
-              <a:rPr lang="en-US" sz="1000" dirty="0">
-                <a:solidFill>
-                  <a:srgbClr val="5A6B7A"/>
-                </a:solidFill>
-                <a:latin typeface="Open Sans" pitchFamily="34" charset="0"/>
-                <a:ea typeface="Open Sans" pitchFamily="34" charset="-122"/>
-                <a:cs typeface="Open Sans" pitchFamily="34" charset="-120"/>
-              </a:rPr>
-              <a:t>Use AI to draft</a:t>
-            </a:r>
-            <a:endParaRPr lang="en-US" sz="1000" dirty="0"/>
-          </a:p>
-          <a:p>
-            <a:pPr algn="ctr" indent="0" marL="0">
-              <a:lnSpc>
-                <a:spcPct val="130000"/>
-              </a:lnSpc>
-              <a:buNone/>
-            </a:pPr>
-            <a:r>
-              <a:rPr lang="en-US" sz="1000" dirty="0">
-                <a:solidFill>
-                  <a:srgbClr val="5A6B7A"/>
-                </a:solidFill>
-                <a:latin typeface="Open Sans" pitchFamily="34" charset="0"/>
-                <a:ea typeface="Open Sans" pitchFamily="34" charset="-122"/>
-                <a:cs typeface="Open Sans" pitchFamily="34" charset="-120"/>
-              </a:rPr>
-              <a:t>memo or spec</a:t>
-            </a:r>
-            <a:endParaRPr lang="en-US" sz="1000" dirty="0"/>
-          </a:p>
-        </p:txBody>
-      </p:sp>
-      <p:sp>
-        <p:nvSpPr>
-          <p:cNvPr id="10" name="Text 7"/>
-          <p:cNvSpPr/>
-          <p:nvPr/>
-        </p:nvSpPr>
-        <p:spPr>
-          <a:xfrm>
-            <a:off x="1920240" y="1645920"/>
-            <a:ext cx="274320" cy="365760"/>
-          </a:xfrm>
-          <a:prstGeom prst="rect">
-            <a:avLst/>
-          </a:prstGeom>
-          <a:noFill/>
-          <a:ln/>
-        </p:spPr>
-        <p:txBody>
-          <a:bodyPr wrap="square" lIns="0" tIns="0" rIns="0" bIns="0" rtlCol="0" anchor="ctr"/>
-          <a:lstStyle/>
-          <a:p>
-            <a:pPr algn="ctr" indent="0" marL="0">
-              <a:buNone/>
-            </a:pPr>
-            <a:r>
-              <a:rPr lang="en-US" sz="1800" b="1" dirty="0">
-                <a:solidFill>
-                  <a:srgbClr val="B8975C"/>
-                </a:solidFill>
-                <a:latin typeface="Open Sans" pitchFamily="34" charset="0"/>
-                <a:ea typeface="Open Sans" pitchFamily="34" charset="-122"/>
-                <a:cs typeface="Open Sans" pitchFamily="34" charset="-120"/>
-              </a:rPr>
-              <a:t>→</a:t>
-            </a:r>
-            <a:endParaRPr lang="en-US" sz="1800" dirty="0"/>
-          </a:p>
-        </p:txBody>
-      </p:sp>
-      <p:sp>
-        <p:nvSpPr>
-          <p:cNvPr id="11" name="Shape 8"/>
-          <p:cNvSpPr/>
-          <p:nvPr/>
-        </p:nvSpPr>
-        <p:spPr>
-          <a:xfrm>
-            <a:off x="2194560" y="1051560"/>
-            <a:ext cx="1463040" cy="1828800"/>
-          </a:xfrm>
-          <a:prstGeom prst="rect">
-            <a:avLst/>
-          </a:prstGeom>
-          <a:solidFill>
-            <a:srgbClr val="FFFFFF"/>
-          </a:solidFill>
-          <a:ln/>
-          <a:effectLst>
-            <a:outerShdw sx="100000" sy="100000" kx="0" ky="0" algn="bl" rotWithShape="0" blurRad="50800" dist="25400" dir="8100000">
-              <a:srgbClr val="000000">
-                <a:alpha val="6000"/>
-              </a:srgbClr>
-            </a:outerShdw>
-          </a:effectLst>
-        </p:spPr>
-      </p:sp>
-      <p:pic>
-        <p:nvPicPr>
-          <p:cNvPr id="12" name="Image 1" descr="preencoded.png">    </p:cNvPr>
-          <p:cNvPicPr>
-            <a:picLocks noChangeAspect="1"/>
-          </p:cNvPicPr>
-          <p:nvPr/>
-        </p:nvPicPr>
-        <p:blipFill>
-          <a:blip r:embed="rId2"/>
-          <a:stretch>
-            <a:fillRect/>
-          </a:stretch>
-        </p:blipFill>
-        <p:spPr>
-          <a:xfrm>
-            <a:off x="2697480" y="1188720"/>
-            <a:ext cx="365760" cy="365760"/>
-          </a:xfrm>
-          <a:prstGeom prst="rect">
-            <a:avLst/>
-          </a:prstGeom>
-        </p:spPr>
-      </p:pic>
-      <p:sp>
-        <p:nvSpPr>
-          <p:cNvPr id="13" name="Text 9"/>
-          <p:cNvSpPr/>
-          <p:nvPr/>
-        </p:nvSpPr>
-        <p:spPr>
-          <a:xfrm>
-            <a:off x="2286000" y="1645920"/>
-            <a:ext cx="1280160" cy="274320"/>
-          </a:xfrm>
-          <a:prstGeom prst="rect">
-            <a:avLst/>
-          </a:prstGeom>
-          <a:noFill/>
-          <a:ln/>
-        </p:spPr>
-        <p:txBody>
-          <a:bodyPr wrap="square" lIns="0" tIns="0" rIns="0" bIns="0" rtlCol="0" anchor="ctr"/>
-          <a:lstStyle/>
-          <a:p>
-            <a:pPr algn="ctr" indent="0" marL="0">
-              <a:buNone/>
-            </a:pPr>
-            <a:r>
-              <a:rPr lang="en-US" sz="1400" b="1" dirty="0">
-                <a:solidFill>
-                  <a:srgbClr val="1E2530"/>
-                </a:solidFill>
-                <a:latin typeface="Open Sans" pitchFamily="34" charset="0"/>
-                <a:ea typeface="Open Sans" pitchFamily="34" charset="-122"/>
-                <a:cs typeface="Open Sans" pitchFamily="34" charset="-120"/>
-              </a:rPr>
-              <a:t>Edit</a:t>
-            </a:r>
-            <a:endParaRPr lang="en-US" sz="1400" dirty="0"/>
-          </a:p>
-        </p:txBody>
-      </p:sp>
-      <p:sp>
-        <p:nvSpPr>
-          <p:cNvPr id="14" name="Text 10"/>
-          <p:cNvSpPr/>
-          <p:nvPr/>
-        </p:nvSpPr>
-        <p:spPr>
-          <a:xfrm>
-            <a:off x="2286000" y="1965960"/>
-            <a:ext cx="1280160" cy="640080"/>
-          </a:xfrm>
-          <a:prstGeom prst="rect">
-            <a:avLst/>
-          </a:prstGeom>
-          <a:noFill/>
-          <a:ln/>
-        </p:spPr>
-        <p:txBody>
-          <a:bodyPr wrap="square" lIns="0" tIns="0" rIns="0" bIns="0" rtlCol="0" anchor="t"/>
-          <a:lstStyle/>
-          <a:p>
-            <a:pPr algn="ctr" indent="0" marL="0">
-              <a:lnSpc>
-                <a:spcPct val="130000"/>
-              </a:lnSpc>
-              <a:buNone/>
-            </a:pPr>
-            <a:r>
-              <a:rPr lang="en-US" sz="1000" dirty="0">
-                <a:solidFill>
-                  <a:srgbClr val="5A6B7A"/>
-                </a:solidFill>
-                <a:latin typeface="Open Sans" pitchFamily="34" charset="0"/>
-                <a:ea typeface="Open Sans" pitchFamily="34" charset="-122"/>
-                <a:cs typeface="Open Sans" pitchFamily="34" charset="-120"/>
-              </a:rPr>
-              <a:t>Revise in your</a:t>
-            </a:r>
-            <a:endParaRPr lang="en-US" sz="1000" dirty="0"/>
-          </a:p>
-          <a:p>
-            <a:pPr algn="ctr" indent="0" marL="0">
-              <a:lnSpc>
-                <a:spcPct val="130000"/>
-              </a:lnSpc>
-              <a:buNone/>
-            </a:pPr>
-            <a:r>
-              <a:rPr lang="en-US" sz="1000" dirty="0">
-                <a:solidFill>
-                  <a:srgbClr val="5A6B7A"/>
-                </a:solidFill>
-                <a:latin typeface="Open Sans" pitchFamily="34" charset="0"/>
-                <a:ea typeface="Open Sans" pitchFamily="34" charset="-122"/>
-                <a:cs typeface="Open Sans" pitchFamily="34" charset="-120"/>
-              </a:rPr>
-              <a:t>text editor</a:t>
-            </a:r>
-            <a:endParaRPr lang="en-US" sz="1000" dirty="0"/>
-          </a:p>
-        </p:txBody>
-      </p:sp>
-      <p:sp>
-        <p:nvSpPr>
-          <p:cNvPr id="15" name="Text 11"/>
-          <p:cNvSpPr/>
-          <p:nvPr/>
-        </p:nvSpPr>
-        <p:spPr>
-          <a:xfrm>
-            <a:off x="3657600" y="1645920"/>
-            <a:ext cx="274320" cy="365760"/>
-          </a:xfrm>
-          <a:prstGeom prst="rect">
-            <a:avLst/>
-          </a:prstGeom>
-          <a:noFill/>
-          <a:ln/>
-        </p:spPr>
-        <p:txBody>
-          <a:bodyPr wrap="square" lIns="0" tIns="0" rIns="0" bIns="0" rtlCol="0" anchor="ctr"/>
-          <a:lstStyle/>
-          <a:p>
-            <a:pPr algn="ctr" indent="0" marL="0">
-              <a:buNone/>
-            </a:pPr>
-            <a:r>
-              <a:rPr lang="en-US" sz="1800" b="1" dirty="0">
-                <a:solidFill>
-                  <a:srgbClr val="B8975C"/>
-                </a:solidFill>
-                <a:latin typeface="Open Sans" pitchFamily="34" charset="0"/>
-                <a:ea typeface="Open Sans" pitchFamily="34" charset="-122"/>
-                <a:cs typeface="Open Sans" pitchFamily="34" charset="-120"/>
-              </a:rPr>
-              <a:t>→</a:t>
-            </a:r>
-            <a:endParaRPr lang="en-US" sz="1800" dirty="0"/>
-          </a:p>
-        </p:txBody>
-      </p:sp>
-      <p:sp>
-        <p:nvSpPr>
-          <p:cNvPr id="16" name="Shape 12"/>
-          <p:cNvSpPr/>
-          <p:nvPr/>
-        </p:nvSpPr>
-        <p:spPr>
-          <a:xfrm>
-            <a:off x="3931920" y="1051560"/>
-            <a:ext cx="1463040" cy="1828800"/>
-          </a:xfrm>
-          <a:prstGeom prst="rect">
-            <a:avLst/>
-          </a:prstGeom>
-          <a:solidFill>
-            <a:srgbClr val="FFFFFF"/>
-          </a:solidFill>
-          <a:ln/>
-          <a:effectLst>
-            <a:outerShdw sx="100000" sy="100000" kx="0" ky="0" algn="bl" rotWithShape="0" blurRad="50800" dist="25400" dir="8100000">
-              <a:srgbClr val="000000">
-                <a:alpha val="6000"/>
-              </a:srgbClr>
-            </a:outerShdw>
-          </a:effectLst>
-        </p:spPr>
-      </p:sp>
-      <p:pic>
-        <p:nvPicPr>
-          <p:cNvPr id="17" name="Image 2" descr="preencoded.png">    </p:cNvPr>
+          <p:cNvPr id="7" name="Image 0" descr="preencoded.png"/>
           <p:cNvPicPr>
             <a:picLocks noChangeAspect="1"/>
           </p:cNvPicPr>
@@ -5785,7 +5279,7 @@
         </p:blipFill>
         <p:spPr>
           <a:xfrm>
-            <a:off x="4434840" y="1188720"/>
+            <a:off x="960120" y="1188720"/>
             <a:ext cx="365760" cy="365760"/>
           </a:xfrm>
           <a:prstGeom prst="rect">
@@ -5795,13 +5289,13 @@
       </p:pic>
       <p:sp>
         <p:nvSpPr>
-          <p:cNvPr id="18" name="Text 13"/>
-          <p:cNvSpPr/>
-          <p:nvPr/>
-        </p:nvSpPr>
-        <p:spPr>
-          <a:xfrm>
-            <a:off x="4023360" y="1645920"/>
+          <p:cNvPr id="8" name="Text 5"/>
+          <p:cNvSpPr/>
+          <p:nvPr/>
+        </p:nvSpPr>
+        <p:spPr>
+          <a:xfrm>
+            <a:off x="548640" y="1645920"/>
             <a:ext cx="1280160" cy="274320"/>
           </a:xfrm>
           <a:prstGeom prst="rect">
@@ -5814,7 +5308,7 @@
           <a:bodyPr wrap="square" lIns="0" tIns="0" rIns="0" bIns="0" rtlCol="0" anchor="ctr"/>
           <a:lstStyle/>
           <a:p>
-            <a:pPr algn="ctr" indent="0" marL="0">
+            <a:pPr marL="0" indent="0" algn="ctr">
               <a:buNone/>
             </a:pPr>
             <a:r>
@@ -5826,7 +5320,7 @@
                 <a:ea typeface="Open Sans" pitchFamily="34" charset="-122"/>
                 <a:cs typeface="Open Sans" pitchFamily="34" charset="-120"/>
               </a:rPr>
-              <a:t>Save</a:t>
+              <a:t>Draft</a:t>
             </a:r>
             <a:endParaRPr lang="en-US" sz="1400" dirty="0"/>
           </a:p>
@@ -5834,13 +5328,13 @@
       </p:sp>
       <p:sp>
         <p:nvSpPr>
-          <p:cNvPr id="19" name="Text 14"/>
-          <p:cNvSpPr/>
-          <p:nvPr/>
-        </p:nvSpPr>
-        <p:spPr>
-          <a:xfrm>
-            <a:off x="4023360" y="1965960"/>
+          <p:cNvPr id="9" name="Text 6"/>
+          <p:cNvSpPr/>
+          <p:nvPr/>
+        </p:nvSpPr>
+        <p:spPr>
+          <a:xfrm>
+            <a:off x="548640" y="1965960"/>
             <a:ext cx="1280160" cy="640080"/>
           </a:xfrm>
           <a:prstGeom prst="rect">
@@ -5853,7 +5347,7 @@
           <a:bodyPr wrap="square" lIns="0" tIns="0" rIns="0" bIns="0" rtlCol="0" anchor="t"/>
           <a:lstStyle/>
           <a:p>
-            <a:pPr algn="ctr" indent="0" marL="0">
+            <a:pPr marL="0" indent="0" algn="ctr">
               <a:lnSpc>
                 <a:spcPct val="130000"/>
               </a:lnSpc>
@@ -5868,12 +5362,12 @@
                 <a:ea typeface="Open Sans" pitchFamily="34" charset="-122"/>
                 <a:cs typeface="Open Sans" pitchFamily="34" charset="-120"/>
               </a:rPr>
-              <a:t>Save the .md or</a:t>
+              <a:t>Use AI to draft</a:t>
             </a:r>
             <a:endParaRPr lang="en-US" sz="1000" dirty="0"/>
           </a:p>
           <a:p>
-            <a:pPr algn="ctr" indent="0" marL="0">
+            <a:pPr marL="0" indent="0" algn="ctr">
               <a:lnSpc>
                 <a:spcPct val="130000"/>
               </a:lnSpc>
@@ -5888,7 +5382,7 @@
                 <a:ea typeface="Open Sans" pitchFamily="34" charset="-122"/>
                 <a:cs typeface="Open Sans" pitchFamily="34" charset="-120"/>
               </a:rPr>
-              <a:t>.xlsx file locally</a:t>
+              <a:t>memo or spec</a:t>
             </a:r>
             <a:endParaRPr lang="en-US" sz="1000" dirty="0"/>
           </a:p>
@@ -5896,13 +5390,13 @@
       </p:sp>
       <p:sp>
         <p:nvSpPr>
-          <p:cNvPr id="20" name="Text 15"/>
-          <p:cNvSpPr/>
-          <p:nvPr/>
-        </p:nvSpPr>
-        <p:spPr>
-          <a:xfrm>
-            <a:off x="5394960" y="1645920"/>
+          <p:cNvPr id="10" name="Text 7"/>
+          <p:cNvSpPr/>
+          <p:nvPr/>
+        </p:nvSpPr>
+        <p:spPr>
+          <a:xfrm>
+            <a:off x="1920240" y="1645920"/>
             <a:ext cx="274320" cy="365760"/>
           </a:xfrm>
           <a:prstGeom prst="rect">
@@ -5915,7 +5409,7 @@
           <a:bodyPr wrap="square" lIns="0" tIns="0" rIns="0" bIns="0" rtlCol="0" anchor="ctr"/>
           <a:lstStyle/>
           <a:p>
-            <a:pPr algn="ctr" indent="0" marL="0">
+            <a:pPr marL="0" indent="0" algn="ctr">
               <a:buNone/>
             </a:pPr>
             <a:r>
@@ -5935,13 +5429,13 @@
       </p:sp>
       <p:sp>
         <p:nvSpPr>
-          <p:cNvPr id="21" name="Shape 16"/>
-          <p:cNvSpPr/>
-          <p:nvPr/>
-        </p:nvSpPr>
-        <p:spPr>
-          <a:xfrm>
-            <a:off x="5669280" y="1051560"/>
+          <p:cNvPr id="11" name="Shape 8"/>
+          <p:cNvSpPr/>
+          <p:nvPr/>
+        </p:nvSpPr>
+        <p:spPr>
+          <a:xfrm>
+            <a:off x="2194560" y="1051560"/>
             <a:ext cx="1463040" cy="1828800"/>
           </a:xfrm>
           <a:prstGeom prst="rect">
@@ -5952,17 +5446,24 @@
           </a:solidFill>
           <a:ln/>
           <a:effectLst>
-            <a:outerShdw sx="100000" sy="100000" kx="0" ky="0" algn="bl" rotWithShape="0" blurRad="50800" dist="25400" dir="8100000">
+            <a:outerShdw blurRad="50800" dist="25400" dir="8100000" algn="bl" rotWithShape="0">
               <a:srgbClr val="000000">
                 <a:alpha val="6000"/>
               </a:srgbClr>
             </a:outerShdw>
           </a:effectLst>
         </p:spPr>
+        <p:txBody>
+          <a:bodyPr/>
+          <a:lstStyle/>
+          <a:p>
+            <a:endParaRPr lang="en-US"/>
+          </a:p>
+        </p:txBody>
       </p:sp>
       <p:pic>
         <p:nvPicPr>
-          <p:cNvPr id="22" name="Image 3" descr="preencoded.png">    </p:cNvPr>
+          <p:cNvPr id="12" name="Image 1" descr="preencoded.png"/>
           <p:cNvPicPr>
             <a:picLocks noChangeAspect="1"/>
           </p:cNvPicPr>
@@ -5976,7 +5477,7 @@
         </p:blipFill>
         <p:spPr>
           <a:xfrm>
-            <a:off x="6172200" y="1188720"/>
+            <a:off x="2697480" y="1188720"/>
             <a:ext cx="365760" cy="365760"/>
           </a:xfrm>
           <a:prstGeom prst="rect">
@@ -5986,13 +5487,13 @@
       </p:pic>
       <p:sp>
         <p:nvSpPr>
-          <p:cNvPr id="23" name="Text 17"/>
-          <p:cNvSpPr/>
-          <p:nvPr/>
-        </p:nvSpPr>
-        <p:spPr>
-          <a:xfrm>
-            <a:off x="5760720" y="1645920"/>
+          <p:cNvPr id="13" name="Text 9"/>
+          <p:cNvSpPr/>
+          <p:nvPr/>
+        </p:nvSpPr>
+        <p:spPr>
+          <a:xfrm>
+            <a:off x="2286000" y="1645920"/>
             <a:ext cx="1280160" cy="274320"/>
           </a:xfrm>
           <a:prstGeom prst="rect">
@@ -6005,7 +5506,7 @@
           <a:bodyPr wrap="square" lIns="0" tIns="0" rIns="0" bIns="0" rtlCol="0" anchor="ctr"/>
           <a:lstStyle/>
           <a:p>
-            <a:pPr algn="ctr" indent="0" marL="0">
+            <a:pPr marL="0" indent="0" algn="ctr">
               <a:buNone/>
             </a:pPr>
             <a:r>
@@ -6017,7 +5518,7 @@
                 <a:ea typeface="Open Sans" pitchFamily="34" charset="-122"/>
                 <a:cs typeface="Open Sans" pitchFamily="34" charset="-120"/>
               </a:rPr>
-              <a:t>Commit</a:t>
+              <a:t>Edit</a:t>
             </a:r>
             <a:endParaRPr lang="en-US" sz="1400" dirty="0"/>
           </a:p>
@@ -6025,13 +5526,13 @@
       </p:sp>
       <p:sp>
         <p:nvSpPr>
-          <p:cNvPr id="24" name="Text 18"/>
-          <p:cNvSpPr/>
-          <p:nvPr/>
-        </p:nvSpPr>
-        <p:spPr>
-          <a:xfrm>
-            <a:off x="5760720" y="1965960"/>
+          <p:cNvPr id="14" name="Text 10"/>
+          <p:cNvSpPr/>
+          <p:nvPr/>
+        </p:nvSpPr>
+        <p:spPr>
+          <a:xfrm>
+            <a:off x="2286000" y="1965960"/>
             <a:ext cx="1280160" cy="640080"/>
           </a:xfrm>
           <a:prstGeom prst="rect">
@@ -6044,7 +5545,7 @@
           <a:bodyPr wrap="square" lIns="0" tIns="0" rIns="0" bIns="0" rtlCol="0" anchor="t"/>
           <a:lstStyle/>
           <a:p>
-            <a:pPr algn="ctr" indent="0" marL="0">
+            <a:pPr marL="0" indent="0" algn="ctr">
               <a:lnSpc>
                 <a:spcPct val="130000"/>
               </a:lnSpc>
@@ -6059,12 +5560,12 @@
                 <a:ea typeface="Open Sans" pitchFamily="34" charset="-122"/>
                 <a:cs typeface="Open Sans" pitchFamily="34" charset="-120"/>
               </a:rPr>
-              <a:t>git add + commit</a:t>
+              <a:t>Revise in your</a:t>
             </a:r>
             <a:endParaRPr lang="en-US" sz="1000" dirty="0"/>
           </a:p>
           <a:p>
-            <a:pPr algn="ctr" indent="0" marL="0">
+            <a:pPr marL="0" indent="0" algn="ctr">
               <a:lnSpc>
                 <a:spcPct val="130000"/>
               </a:lnSpc>
@@ -6079,7 +5580,7 @@
                 <a:ea typeface="Open Sans" pitchFamily="34" charset="-122"/>
                 <a:cs typeface="Open Sans" pitchFamily="34" charset="-120"/>
               </a:rPr>
-              <a:t>with clear message</a:t>
+              <a:t>text editor</a:t>
             </a:r>
             <a:endParaRPr lang="en-US" sz="1000" dirty="0"/>
           </a:p>
@@ -6087,13 +5588,13 @@
       </p:sp>
       <p:sp>
         <p:nvSpPr>
-          <p:cNvPr id="25" name="Text 19"/>
-          <p:cNvSpPr/>
-          <p:nvPr/>
-        </p:nvSpPr>
-        <p:spPr>
-          <a:xfrm>
-            <a:off x="7132320" y="1645920"/>
+          <p:cNvPr id="15" name="Text 11"/>
+          <p:cNvSpPr/>
+          <p:nvPr/>
+        </p:nvSpPr>
+        <p:spPr>
+          <a:xfrm>
+            <a:off x="3657600" y="1645920"/>
             <a:ext cx="274320" cy="365760"/>
           </a:xfrm>
           <a:prstGeom prst="rect">
@@ -6106,7 +5607,7 @@
           <a:bodyPr wrap="square" lIns="0" tIns="0" rIns="0" bIns="0" rtlCol="0" anchor="ctr"/>
           <a:lstStyle/>
           <a:p>
-            <a:pPr algn="ctr" indent="0" marL="0">
+            <a:pPr marL="0" indent="0" algn="ctr">
               <a:buNone/>
             </a:pPr>
             <a:r>
@@ -6126,13 +5627,13 @@
       </p:sp>
       <p:sp>
         <p:nvSpPr>
-          <p:cNvPr id="26" name="Shape 20"/>
-          <p:cNvSpPr/>
-          <p:nvPr/>
-        </p:nvSpPr>
-        <p:spPr>
-          <a:xfrm>
-            <a:off x="7406640" y="1051560"/>
+          <p:cNvPr id="16" name="Shape 12"/>
+          <p:cNvSpPr/>
+          <p:nvPr/>
+        </p:nvSpPr>
+        <p:spPr>
+          <a:xfrm>
+            <a:off x="3931920" y="1051560"/>
             <a:ext cx="1463040" cy="1828800"/>
           </a:xfrm>
           <a:prstGeom prst="rect">
@@ -6143,17 +5644,24 @@
           </a:solidFill>
           <a:ln/>
           <a:effectLst>
-            <a:outerShdw sx="100000" sy="100000" kx="0" ky="0" algn="bl" rotWithShape="0" blurRad="50800" dist="25400" dir="8100000">
+            <a:outerShdw blurRad="50800" dist="25400" dir="8100000" algn="bl" rotWithShape="0">
               <a:srgbClr val="000000">
                 <a:alpha val="6000"/>
               </a:srgbClr>
             </a:outerShdw>
           </a:effectLst>
         </p:spPr>
+        <p:txBody>
+          <a:bodyPr/>
+          <a:lstStyle/>
+          <a:p>
+            <a:endParaRPr lang="en-US"/>
+          </a:p>
+        </p:txBody>
       </p:sp>
       <p:pic>
         <p:nvPicPr>
-          <p:cNvPr id="27" name="Image 4" descr="preencoded.png">    </p:cNvPr>
+          <p:cNvPr id="17" name="Image 2" descr="preencoded.png"/>
           <p:cNvPicPr>
             <a:picLocks noChangeAspect="1"/>
           </p:cNvPicPr>
@@ -6167,7 +5675,7 @@
         </p:blipFill>
         <p:spPr>
           <a:xfrm>
-            <a:off x="7909560" y="1188720"/>
+            <a:off x="4434840" y="1188720"/>
             <a:ext cx="365760" cy="365760"/>
           </a:xfrm>
           <a:prstGeom prst="rect">
@@ -6177,13 +5685,13 @@
       </p:pic>
       <p:sp>
         <p:nvSpPr>
-          <p:cNvPr id="28" name="Text 21"/>
-          <p:cNvSpPr/>
-          <p:nvPr/>
-        </p:nvSpPr>
-        <p:spPr>
-          <a:xfrm>
-            <a:off x="7498080" y="1645920"/>
+          <p:cNvPr id="18" name="Text 13"/>
+          <p:cNvSpPr/>
+          <p:nvPr/>
+        </p:nvSpPr>
+        <p:spPr>
+          <a:xfrm>
+            <a:off x="4023360" y="1645920"/>
             <a:ext cx="1280160" cy="274320"/>
           </a:xfrm>
           <a:prstGeom prst="rect">
@@ -6196,7 +5704,7 @@
           <a:bodyPr wrap="square" lIns="0" tIns="0" rIns="0" bIns="0" rtlCol="0" anchor="ctr"/>
           <a:lstStyle/>
           <a:p>
-            <a:pPr algn="ctr" indent="0" marL="0">
+            <a:pPr marL="0" indent="0" algn="ctr">
               <a:buNone/>
             </a:pPr>
             <a:r>
@@ -6208,7 +5716,7 @@
                 <a:ea typeface="Open Sans" pitchFamily="34" charset="-122"/>
                 <a:cs typeface="Open Sans" pitchFamily="34" charset="-120"/>
               </a:rPr>
-              <a:t>Push</a:t>
+              <a:t>Save</a:t>
             </a:r>
             <a:endParaRPr lang="en-US" sz="1400" dirty="0"/>
           </a:p>
@@ -6216,13 +5724,13 @@
       </p:sp>
       <p:sp>
         <p:nvSpPr>
-          <p:cNvPr id="29" name="Text 22"/>
-          <p:cNvSpPr/>
-          <p:nvPr/>
-        </p:nvSpPr>
-        <p:spPr>
-          <a:xfrm>
-            <a:off x="7498080" y="1965960"/>
+          <p:cNvPr id="19" name="Text 14"/>
+          <p:cNvSpPr/>
+          <p:nvPr/>
+        </p:nvSpPr>
+        <p:spPr>
+          <a:xfrm>
+            <a:off x="4023360" y="1965960"/>
             <a:ext cx="1280160" cy="640080"/>
           </a:xfrm>
           <a:prstGeom prst="rect">
@@ -6235,7 +5743,7 @@
           <a:bodyPr wrap="square" lIns="0" tIns="0" rIns="0" bIns="0" rtlCol="0" anchor="t"/>
           <a:lstStyle/>
           <a:p>
-            <a:pPr algn="ctr" indent="0" marL="0">
+            <a:pPr marL="0" indent="0" algn="ctr">
               <a:lnSpc>
                 <a:spcPct val="130000"/>
               </a:lnSpc>
@@ -6250,12 +5758,12 @@
                 <a:ea typeface="Open Sans" pitchFamily="34" charset="-122"/>
                 <a:cs typeface="Open Sans" pitchFamily="34" charset="-120"/>
               </a:rPr>
-              <a:t>git push to upload</a:t>
+              <a:t>Save the .md or</a:t>
             </a:r>
             <a:endParaRPr lang="en-US" sz="1000" dirty="0"/>
           </a:p>
           <a:p>
-            <a:pPr algn="ctr" indent="0" marL="0">
+            <a:pPr marL="0" indent="0" algn="ctr">
               <a:lnSpc>
                 <a:spcPct val="130000"/>
               </a:lnSpc>
@@ -6270,7 +5778,7 @@
                 <a:ea typeface="Open Sans" pitchFamily="34" charset="-122"/>
                 <a:cs typeface="Open Sans" pitchFamily="34" charset="-120"/>
               </a:rPr>
-              <a:t>to GitHub</a:t>
+              <a:t>.xlsx file locally</a:t>
             </a:r>
             <a:endParaRPr lang="en-US" sz="1000" dirty="0"/>
           </a:p>
@@ -6278,14 +5786,53 @@
       </p:sp>
       <p:sp>
         <p:nvSpPr>
-          <p:cNvPr id="30" name="Shape 23"/>
-          <p:cNvSpPr/>
-          <p:nvPr/>
-        </p:nvSpPr>
-        <p:spPr>
-          <a:xfrm>
-            <a:off x="731520" y="3200400"/>
-            <a:ext cx="7680960" cy="1234440"/>
+          <p:cNvPr id="20" name="Text 15"/>
+          <p:cNvSpPr/>
+          <p:nvPr/>
+        </p:nvSpPr>
+        <p:spPr>
+          <a:xfrm>
+            <a:off x="5394960" y="1645920"/>
+            <a:ext cx="274320" cy="365760"/>
+          </a:xfrm>
+          <a:prstGeom prst="rect">
+            <a:avLst/>
+          </a:prstGeom>
+          <a:noFill/>
+          <a:ln/>
+        </p:spPr>
+        <p:txBody>
+          <a:bodyPr wrap="square" lIns="0" tIns="0" rIns="0" bIns="0" rtlCol="0" anchor="ctr"/>
+          <a:lstStyle/>
+          <a:p>
+            <a:pPr marL="0" indent="0" algn="ctr">
+              <a:buNone/>
+            </a:pPr>
+            <a:r>
+              <a:rPr lang="en-US" sz="1800" b="1" dirty="0">
+                <a:solidFill>
+                  <a:srgbClr val="B8975C"/>
+                </a:solidFill>
+                <a:latin typeface="Open Sans" pitchFamily="34" charset="0"/>
+                <a:ea typeface="Open Sans" pitchFamily="34" charset="-122"/>
+                <a:cs typeface="Open Sans" pitchFamily="34" charset="-120"/>
+              </a:rPr>
+              <a:t>→</a:t>
+            </a:r>
+            <a:endParaRPr lang="en-US" sz="1800" dirty="0"/>
+          </a:p>
+        </p:txBody>
+      </p:sp>
+      <p:sp>
+        <p:nvSpPr>
+          <p:cNvPr id="21" name="Shape 16"/>
+          <p:cNvSpPr/>
+          <p:nvPr/>
+        </p:nvSpPr>
+        <p:spPr>
+          <a:xfrm>
+            <a:off x="5669280" y="1051560"/>
+            <a:ext cx="1463040" cy="1828800"/>
           </a:xfrm>
           <a:prstGeom prst="rect">
             <a:avLst/>
@@ -6295,37 +5842,24 @@
           </a:solidFill>
           <a:ln/>
           <a:effectLst>
-            <a:outerShdw sx="100000" sy="100000" kx="0" ky="0" algn="bl" rotWithShape="0" blurRad="50800" dist="25400" dir="8100000">
+            <a:outerShdw blurRad="50800" dist="25400" dir="8100000" algn="bl" rotWithShape="0">
               <a:srgbClr val="000000">
                 <a:alpha val="6000"/>
               </a:srgbClr>
             </a:outerShdw>
           </a:effectLst>
         </p:spPr>
-      </p:sp>
-      <p:sp>
-        <p:nvSpPr>
-          <p:cNvPr id="31" name="Shape 24"/>
-          <p:cNvSpPr/>
-          <p:nvPr/>
-        </p:nvSpPr>
-        <p:spPr>
-          <a:xfrm>
-            <a:off x="731520" y="3200400"/>
-            <a:ext cx="54864" cy="1234440"/>
-          </a:xfrm>
-          <a:prstGeom prst="rect">
-            <a:avLst/>
-          </a:prstGeom>
-          <a:solidFill>
-            <a:srgbClr val="B8975C"/>
-          </a:solidFill>
-          <a:ln/>
-        </p:spPr>
+        <p:txBody>
+          <a:bodyPr/>
+          <a:lstStyle/>
+          <a:p>
+            <a:endParaRPr lang="en-US"/>
+          </a:p>
+        </p:txBody>
       </p:sp>
       <p:pic>
         <p:nvPicPr>
-          <p:cNvPr id="32" name="Image 5" descr="preencoded.png">    </p:cNvPr>
+          <p:cNvPr id="22" name="Image 3" descr="preencoded.png"/>
           <p:cNvPicPr>
             <a:picLocks noChangeAspect="1"/>
           </p:cNvPicPr>
@@ -6339,6 +5873,390 @@
         </p:blipFill>
         <p:spPr>
           <a:xfrm>
+            <a:off x="6172200" y="1188720"/>
+            <a:ext cx="365760" cy="365760"/>
+          </a:xfrm>
+          <a:prstGeom prst="rect">
+            <a:avLst/>
+          </a:prstGeom>
+        </p:spPr>
+      </p:pic>
+      <p:sp>
+        <p:nvSpPr>
+          <p:cNvPr id="23" name="Text 17"/>
+          <p:cNvSpPr/>
+          <p:nvPr/>
+        </p:nvSpPr>
+        <p:spPr>
+          <a:xfrm>
+            <a:off x="5760720" y="1645920"/>
+            <a:ext cx="1280160" cy="274320"/>
+          </a:xfrm>
+          <a:prstGeom prst="rect">
+            <a:avLst/>
+          </a:prstGeom>
+          <a:noFill/>
+          <a:ln/>
+        </p:spPr>
+        <p:txBody>
+          <a:bodyPr wrap="square" lIns="0" tIns="0" rIns="0" bIns="0" rtlCol="0" anchor="ctr"/>
+          <a:lstStyle/>
+          <a:p>
+            <a:pPr marL="0" indent="0" algn="ctr">
+              <a:buNone/>
+            </a:pPr>
+            <a:r>
+              <a:rPr lang="en-US" sz="1400" b="1" dirty="0">
+                <a:solidFill>
+                  <a:srgbClr val="1E2530"/>
+                </a:solidFill>
+                <a:latin typeface="Open Sans" pitchFamily="34" charset="0"/>
+                <a:ea typeface="Open Sans" pitchFamily="34" charset="-122"/>
+                <a:cs typeface="Open Sans" pitchFamily="34" charset="-120"/>
+              </a:rPr>
+              <a:t>Commit</a:t>
+            </a:r>
+            <a:endParaRPr lang="en-US" sz="1400" dirty="0"/>
+          </a:p>
+        </p:txBody>
+      </p:sp>
+      <p:sp>
+        <p:nvSpPr>
+          <p:cNvPr id="24" name="Text 18"/>
+          <p:cNvSpPr/>
+          <p:nvPr/>
+        </p:nvSpPr>
+        <p:spPr>
+          <a:xfrm>
+            <a:off x="5760720" y="1965960"/>
+            <a:ext cx="1280160" cy="640080"/>
+          </a:xfrm>
+          <a:prstGeom prst="rect">
+            <a:avLst/>
+          </a:prstGeom>
+          <a:noFill/>
+          <a:ln/>
+        </p:spPr>
+        <p:txBody>
+          <a:bodyPr wrap="square" lIns="0" tIns="0" rIns="0" bIns="0" rtlCol="0" anchor="t"/>
+          <a:lstStyle/>
+          <a:p>
+            <a:pPr marL="0" indent="0" algn="ctr">
+              <a:lnSpc>
+                <a:spcPct val="130000"/>
+              </a:lnSpc>
+              <a:buNone/>
+            </a:pPr>
+            <a:r>
+              <a:rPr lang="en-US" sz="1000" dirty="0">
+                <a:solidFill>
+                  <a:srgbClr val="5A6B7A"/>
+                </a:solidFill>
+                <a:latin typeface="Open Sans" pitchFamily="34" charset="0"/>
+                <a:ea typeface="Open Sans" pitchFamily="34" charset="-122"/>
+                <a:cs typeface="Open Sans" pitchFamily="34" charset="-120"/>
+              </a:rPr>
+              <a:t>git add + commit</a:t>
+            </a:r>
+            <a:endParaRPr lang="en-US" sz="1000" dirty="0"/>
+          </a:p>
+          <a:p>
+            <a:pPr marL="0" indent="0" algn="ctr">
+              <a:lnSpc>
+                <a:spcPct val="130000"/>
+              </a:lnSpc>
+              <a:buNone/>
+            </a:pPr>
+            <a:r>
+              <a:rPr lang="en-US" sz="1000" dirty="0">
+                <a:solidFill>
+                  <a:srgbClr val="5A6B7A"/>
+                </a:solidFill>
+                <a:latin typeface="Open Sans" pitchFamily="34" charset="0"/>
+                <a:ea typeface="Open Sans" pitchFamily="34" charset="-122"/>
+                <a:cs typeface="Open Sans" pitchFamily="34" charset="-120"/>
+              </a:rPr>
+              <a:t>with clear message</a:t>
+            </a:r>
+            <a:endParaRPr lang="en-US" sz="1000" dirty="0"/>
+          </a:p>
+        </p:txBody>
+      </p:sp>
+      <p:sp>
+        <p:nvSpPr>
+          <p:cNvPr id="25" name="Text 19"/>
+          <p:cNvSpPr/>
+          <p:nvPr/>
+        </p:nvSpPr>
+        <p:spPr>
+          <a:xfrm>
+            <a:off x="7132320" y="1645920"/>
+            <a:ext cx="274320" cy="365760"/>
+          </a:xfrm>
+          <a:prstGeom prst="rect">
+            <a:avLst/>
+          </a:prstGeom>
+          <a:noFill/>
+          <a:ln/>
+        </p:spPr>
+        <p:txBody>
+          <a:bodyPr wrap="square" lIns="0" tIns="0" rIns="0" bIns="0" rtlCol="0" anchor="ctr"/>
+          <a:lstStyle/>
+          <a:p>
+            <a:pPr marL="0" indent="0" algn="ctr">
+              <a:buNone/>
+            </a:pPr>
+            <a:r>
+              <a:rPr lang="en-US" sz="1800" b="1" dirty="0">
+                <a:solidFill>
+                  <a:srgbClr val="B8975C"/>
+                </a:solidFill>
+                <a:latin typeface="Open Sans" pitchFamily="34" charset="0"/>
+                <a:ea typeface="Open Sans" pitchFamily="34" charset="-122"/>
+                <a:cs typeface="Open Sans" pitchFamily="34" charset="-120"/>
+              </a:rPr>
+              <a:t>→</a:t>
+            </a:r>
+            <a:endParaRPr lang="en-US" sz="1800" dirty="0"/>
+          </a:p>
+        </p:txBody>
+      </p:sp>
+      <p:sp>
+        <p:nvSpPr>
+          <p:cNvPr id="26" name="Shape 20"/>
+          <p:cNvSpPr/>
+          <p:nvPr/>
+        </p:nvSpPr>
+        <p:spPr>
+          <a:xfrm>
+            <a:off x="7406640" y="1051560"/>
+            <a:ext cx="1463040" cy="1828800"/>
+          </a:xfrm>
+          <a:prstGeom prst="rect">
+            <a:avLst/>
+          </a:prstGeom>
+          <a:solidFill>
+            <a:srgbClr val="FFFFFF"/>
+          </a:solidFill>
+          <a:ln/>
+          <a:effectLst>
+            <a:outerShdw blurRad="50800" dist="25400" dir="8100000" algn="bl" rotWithShape="0">
+              <a:srgbClr val="000000">
+                <a:alpha val="6000"/>
+              </a:srgbClr>
+            </a:outerShdw>
+          </a:effectLst>
+        </p:spPr>
+        <p:txBody>
+          <a:bodyPr/>
+          <a:lstStyle/>
+          <a:p>
+            <a:endParaRPr lang="en-US"/>
+          </a:p>
+        </p:txBody>
+      </p:sp>
+      <p:pic>
+        <p:nvPicPr>
+          <p:cNvPr id="27" name="Image 4" descr="preencoded.png"/>
+          <p:cNvPicPr>
+            <a:picLocks noChangeAspect="1"/>
+          </p:cNvPicPr>
+          <p:nvPr/>
+        </p:nvPicPr>
+        <p:blipFill>
+          <a:blip r:embed="rId7"/>
+          <a:stretch>
+            <a:fillRect/>
+          </a:stretch>
+        </p:blipFill>
+        <p:spPr>
+          <a:xfrm>
+            <a:off x="7909560" y="1188720"/>
+            <a:ext cx="365760" cy="365760"/>
+          </a:xfrm>
+          <a:prstGeom prst="rect">
+            <a:avLst/>
+          </a:prstGeom>
+        </p:spPr>
+      </p:pic>
+      <p:sp>
+        <p:nvSpPr>
+          <p:cNvPr id="28" name="Text 21"/>
+          <p:cNvSpPr/>
+          <p:nvPr/>
+        </p:nvSpPr>
+        <p:spPr>
+          <a:xfrm>
+            <a:off x="7498080" y="1645920"/>
+            <a:ext cx="1280160" cy="274320"/>
+          </a:xfrm>
+          <a:prstGeom prst="rect">
+            <a:avLst/>
+          </a:prstGeom>
+          <a:noFill/>
+          <a:ln/>
+        </p:spPr>
+        <p:txBody>
+          <a:bodyPr wrap="square" lIns="0" tIns="0" rIns="0" bIns="0" rtlCol="0" anchor="ctr"/>
+          <a:lstStyle/>
+          <a:p>
+            <a:pPr marL="0" indent="0" algn="ctr">
+              <a:buNone/>
+            </a:pPr>
+            <a:r>
+              <a:rPr lang="en-US" sz="1400" b="1" dirty="0">
+                <a:solidFill>
+                  <a:srgbClr val="1E2530"/>
+                </a:solidFill>
+                <a:latin typeface="Open Sans" pitchFamily="34" charset="0"/>
+                <a:ea typeface="Open Sans" pitchFamily="34" charset="-122"/>
+                <a:cs typeface="Open Sans" pitchFamily="34" charset="-120"/>
+              </a:rPr>
+              <a:t>Push</a:t>
+            </a:r>
+            <a:endParaRPr lang="en-US" sz="1400" dirty="0"/>
+          </a:p>
+        </p:txBody>
+      </p:sp>
+      <p:sp>
+        <p:nvSpPr>
+          <p:cNvPr id="29" name="Text 22"/>
+          <p:cNvSpPr/>
+          <p:nvPr/>
+        </p:nvSpPr>
+        <p:spPr>
+          <a:xfrm>
+            <a:off x="7498080" y="1965960"/>
+            <a:ext cx="1280160" cy="640080"/>
+          </a:xfrm>
+          <a:prstGeom prst="rect">
+            <a:avLst/>
+          </a:prstGeom>
+          <a:noFill/>
+          <a:ln/>
+        </p:spPr>
+        <p:txBody>
+          <a:bodyPr wrap="square" lIns="0" tIns="0" rIns="0" bIns="0" rtlCol="0" anchor="t"/>
+          <a:lstStyle/>
+          <a:p>
+            <a:pPr marL="0" indent="0" algn="ctr">
+              <a:lnSpc>
+                <a:spcPct val="130000"/>
+              </a:lnSpc>
+              <a:buNone/>
+            </a:pPr>
+            <a:r>
+              <a:rPr lang="en-US" sz="1000" dirty="0">
+                <a:solidFill>
+                  <a:srgbClr val="5A6B7A"/>
+                </a:solidFill>
+                <a:latin typeface="Open Sans" pitchFamily="34" charset="0"/>
+                <a:ea typeface="Open Sans" pitchFamily="34" charset="-122"/>
+                <a:cs typeface="Open Sans" pitchFamily="34" charset="-120"/>
+              </a:rPr>
+              <a:t>git push to upload</a:t>
+            </a:r>
+            <a:endParaRPr lang="en-US" sz="1000" dirty="0"/>
+          </a:p>
+          <a:p>
+            <a:pPr marL="0" indent="0" algn="ctr">
+              <a:lnSpc>
+                <a:spcPct val="130000"/>
+              </a:lnSpc>
+              <a:buNone/>
+            </a:pPr>
+            <a:r>
+              <a:rPr lang="en-US" sz="1000" dirty="0">
+                <a:solidFill>
+                  <a:srgbClr val="5A6B7A"/>
+                </a:solidFill>
+                <a:latin typeface="Open Sans" pitchFamily="34" charset="0"/>
+                <a:ea typeface="Open Sans" pitchFamily="34" charset="-122"/>
+                <a:cs typeface="Open Sans" pitchFamily="34" charset="-120"/>
+              </a:rPr>
+              <a:t>to GitHub</a:t>
+            </a:r>
+            <a:endParaRPr lang="en-US" sz="1000" dirty="0"/>
+          </a:p>
+        </p:txBody>
+      </p:sp>
+      <p:sp>
+        <p:nvSpPr>
+          <p:cNvPr id="30" name="Shape 23"/>
+          <p:cNvSpPr/>
+          <p:nvPr/>
+        </p:nvSpPr>
+        <p:spPr>
+          <a:xfrm>
+            <a:off x="731520" y="3200400"/>
+            <a:ext cx="7680960" cy="1234440"/>
+          </a:xfrm>
+          <a:prstGeom prst="rect">
+            <a:avLst/>
+          </a:prstGeom>
+          <a:solidFill>
+            <a:srgbClr val="FFFFFF"/>
+          </a:solidFill>
+          <a:ln/>
+          <a:effectLst>
+            <a:outerShdw blurRad="50800" dist="25400" dir="8100000" algn="bl" rotWithShape="0">
+              <a:srgbClr val="000000">
+                <a:alpha val="6000"/>
+              </a:srgbClr>
+            </a:outerShdw>
+          </a:effectLst>
+        </p:spPr>
+        <p:txBody>
+          <a:bodyPr/>
+          <a:lstStyle/>
+          <a:p>
+            <a:endParaRPr lang="en-US"/>
+          </a:p>
+        </p:txBody>
+      </p:sp>
+      <p:sp>
+        <p:nvSpPr>
+          <p:cNvPr id="31" name="Shape 24"/>
+          <p:cNvSpPr/>
+          <p:nvPr/>
+        </p:nvSpPr>
+        <p:spPr>
+          <a:xfrm>
+            <a:off x="731520" y="3200400"/>
+            <a:ext cx="54864" cy="1234440"/>
+          </a:xfrm>
+          <a:prstGeom prst="rect">
+            <a:avLst/>
+          </a:prstGeom>
+          <a:solidFill>
+            <a:srgbClr val="B8975C"/>
+          </a:solidFill>
+          <a:ln/>
+        </p:spPr>
+        <p:txBody>
+          <a:bodyPr/>
+          <a:lstStyle/>
+          <a:p>
+            <a:endParaRPr lang="en-US"/>
+          </a:p>
+        </p:txBody>
+      </p:sp>
+      <p:pic>
+        <p:nvPicPr>
+          <p:cNvPr id="32" name="Image 5" descr="preencoded.png"/>
+          <p:cNvPicPr>
+            <a:picLocks noChangeAspect="1"/>
+          </p:cNvPicPr>
+          <p:nvPr/>
+        </p:nvPicPr>
+        <p:blipFill>
+          <a:blip r:embed="rId8"/>
+          <a:stretch>
+            <a:fillRect/>
+          </a:stretch>
+        </p:blipFill>
+        <p:spPr>
+          <a:xfrm>
             <a:off x="960120" y="3291840"/>
             <a:ext cx="320040" cy="320040"/>
           </a:xfrm>
@@ -6368,7 +6286,7 @@
           <a:bodyPr wrap="square" lIns="0" tIns="0" rIns="0" bIns="0" rtlCol="0" anchor="ctr"/>
           <a:lstStyle/>
           <a:p>
-            <a:pPr indent="0" marL="0">
+            <a:pPr marL="0" indent="0">
               <a:buNone/>
             </a:pPr>
             <a:r>
@@ -6407,7 +6325,7 @@
           <a:bodyPr wrap="square" lIns="0" tIns="0" rIns="0" bIns="0" rtlCol="0" anchor="t"/>
           <a:lstStyle/>
           <a:p>
-            <a:pPr indent="0" marL="0">
+            <a:pPr marL="0" indent="0">
               <a:lnSpc>
                 <a:spcPct val="140000"/>
               </a:lnSpc>
@@ -6421,134 +6339,92 @@
               </a:rPr>
               <a:t>Every meaningful AI interaction should be logged in </a:t>
             </a:r>
-            <a:pPr indent="0" marL="0">
+            <a:r>
+              <a:rPr lang="en-US" sz="1100" b="1" dirty="0">
+                <a:solidFill>
+                  <a:srgbClr val="B8975C"/>
+                </a:solidFill>
+                <a:latin typeface="Consolas" pitchFamily="34" charset="0"/>
+                <a:ea typeface="Consolas" pitchFamily="34" charset="-122"/>
+                <a:cs typeface="Consolas" pitchFamily="34" charset="-120"/>
+              </a:rPr>
+              <a:t>deliverables/prompt-log.md</a:t>
+            </a:r>
+            <a:endParaRPr lang="en-US" sz="1100" dirty="0"/>
+          </a:p>
+          <a:p>
+            <a:pPr marL="0" indent="0">
               <a:lnSpc>
                 <a:spcPct val="140000"/>
               </a:lnSpc>
               <a:buNone/>
             </a:pPr>
-            <a:r>
-              <a:rPr lang="en-US" sz="1100" b="1" dirty="0">
-                <a:solidFill>
-                  <a:srgbClr val="B8975C"/>
-                </a:solidFill>
-                <a:latin typeface="Consolas" pitchFamily="34" charset="0"/>
-                <a:ea typeface="Consolas" pitchFamily="34" charset="-122"/>
-                <a:cs typeface="Consolas" pitchFamily="34" charset="-120"/>
-              </a:rPr>
-              <a:t>deliverables/prompt-log.md</a:t>
-            </a:r>
-            <a:pPr indent="0" marL="0">
+            <a:endParaRPr lang="en-US" sz="1100" dirty="0"/>
+          </a:p>
+          <a:p>
+            <a:pPr marL="0" indent="0">
               <a:lnSpc>
                 <a:spcPct val="140000"/>
               </a:lnSpc>
               <a:buNone/>
             </a:pPr>
+            <a:r>
+              <a:rPr lang="en-US" sz="1100" dirty="0">
+                <a:solidFill>
+                  <a:srgbClr val="5A6B7A"/>
+                </a:solidFill>
+              </a:rPr>
+              <a:t>For each entry, record: </a:t>
+            </a:r>
             <a:endParaRPr lang="en-US" sz="1100" dirty="0"/>
           </a:p>
           <a:p>
-            <a:pPr indent="0" marL="0">
+            <a:pPr marL="0" indent="0">
               <a:lnSpc>
                 <a:spcPct val="140000"/>
               </a:lnSpc>
               <a:buNone/>
             </a:pPr>
-            <a:endParaRPr lang="en-US" sz="1100" dirty="0"/>
-          </a:p>
-          <a:p>
-            <a:pPr indent="0" marL="0">
-              <a:lnSpc>
-                <a:spcPct val="140000"/>
-              </a:lnSpc>
-              <a:buNone/>
-            </a:pPr>
+            <a:r>
+              <a:rPr lang="en-US" sz="1100" b="1" dirty="0">
+                <a:solidFill>
+                  <a:srgbClr val="1E2530"/>
+                </a:solidFill>
+              </a:rPr>
+              <a:t>the prompt you used</a:t>
+            </a:r>
             <a:r>
               <a:rPr lang="en-US" sz="1100" dirty="0">
                 <a:solidFill>
                   <a:srgbClr val="5A6B7A"/>
                 </a:solidFill>
               </a:rPr>
-              <a:t>For each entry, record: </a:t>
-            </a:r>
-            <a:endParaRPr lang="en-US" sz="1100" dirty="0"/>
-          </a:p>
-          <a:p>
-            <a:pPr indent="0" marL="0">
-              <a:lnSpc>
-                <a:spcPct val="140000"/>
-              </a:lnSpc>
-              <a:buNone/>
-            </a:pPr>
+              <a:t>, </a:t>
+            </a:r>
             <a:r>
               <a:rPr lang="en-US" sz="1100" b="1" dirty="0">
                 <a:solidFill>
                   <a:srgbClr val="1E2530"/>
                 </a:solidFill>
               </a:rPr>
-              <a:t>the prompt you used</a:t>
-            </a:r>
-            <a:pPr indent="0" marL="0">
-              <a:lnSpc>
-                <a:spcPct val="140000"/>
-              </a:lnSpc>
-              <a:buNone/>
-            </a:pPr>
+              <a:t>the key output</a:t>
+            </a:r>
             <a:r>
               <a:rPr lang="en-US" sz="1100" dirty="0">
                 <a:solidFill>
                   <a:srgbClr val="5A6B7A"/>
                 </a:solidFill>
               </a:rPr>
-              <a:t>, </a:t>
-            </a:r>
-            <a:pPr indent="0" marL="0">
-              <a:lnSpc>
-                <a:spcPct val="140000"/>
-              </a:lnSpc>
-              <a:buNone/>
-            </a:pPr>
+              <a:t>, and </a:t>
+            </a:r>
             <a:r>
               <a:rPr lang="en-US" sz="1100" b="1" dirty="0">
                 <a:solidFill>
                   <a:srgbClr val="1E2530"/>
                 </a:solidFill>
               </a:rPr>
-              <a:t>the key output</a:t>
-            </a:r>
-            <a:pPr indent="0" marL="0">
-              <a:lnSpc>
-                <a:spcPct val="140000"/>
-              </a:lnSpc>
-              <a:buNone/>
-            </a:pPr>
-            <a:r>
-              <a:rPr lang="en-US" sz="1100" dirty="0">
-                <a:solidFill>
-                  <a:srgbClr val="5A6B7A"/>
-                </a:solidFill>
-              </a:rPr>
-              <a:t>, and </a:t>
-            </a:r>
-            <a:pPr indent="0" marL="0">
-              <a:lnSpc>
-                <a:spcPct val="140000"/>
-              </a:lnSpc>
-              <a:buNone/>
-            </a:pPr>
-            <a:r>
-              <a:rPr lang="en-US" sz="1100" b="1" dirty="0">
-                <a:solidFill>
-                  <a:srgbClr val="1E2530"/>
-                </a:solidFill>
-              </a:rPr>
               <a:t>whether you used/modified/rejected it</a:t>
             </a:r>
-            <a:pPr indent="0" marL="0">
-              <a:lnSpc>
-                <a:spcPct val="140000"/>
-              </a:lnSpc>
-              <a:buNone/>
-            </a:pPr>
             <a:r>
               <a:rPr lang="en-US" sz="1100" dirty="0">
                 <a:solidFill>
@@ -6577,6 +6453,7 @@
         <a:solidFill>
           <a:srgbClr val="1E2530"/>
         </a:solidFill>
+        <a:effectLst/>
       </p:bgPr>
     </p:bg>
     <p:spTree>
@@ -6612,6 +6489,13 @@
           </a:solidFill>
           <a:ln/>
         </p:spPr>
+        <p:txBody>
+          <a:bodyPr/>
+          <a:lstStyle/>
+          <a:p>
+            <a:endParaRPr lang="en-US"/>
+          </a:p>
+        </p:txBody>
       </p:sp>
       <p:sp>
         <p:nvSpPr>
@@ -6634,7 +6518,7 @@
           <a:bodyPr wrap="square" lIns="0" tIns="0" rIns="0" bIns="0" rtlCol="0" anchor="ctr"/>
           <a:lstStyle/>
           <a:p>
-            <a:pPr indent="0" marL="0">
+            <a:pPr marL="0" indent="0">
               <a:buNone/>
             </a:pPr>
             <a:r>
@@ -6673,7 +6557,7 @@
           <a:bodyPr wrap="square" lIns="0" tIns="0" rIns="0" bIns="0" rtlCol="0" anchor="ctr"/>
           <a:lstStyle/>
           <a:p>
-            <a:pPr indent="0" marL="0">
+            <a:pPr marL="0" indent="0">
               <a:buNone/>
             </a:pPr>
             <a:r>
@@ -6712,7 +6596,7 @@
           <a:bodyPr wrap="square" lIns="0" tIns="0" rIns="0" bIns="0" rtlCol="0" anchor="ctr"/>
           <a:lstStyle/>
           <a:p>
-            <a:pPr indent="0" marL="0">
+            <a:pPr marL="0" indent="0">
               <a:buNone/>
             </a:pPr>
             <a:r>
@@ -6751,7 +6635,7 @@
           <a:bodyPr wrap="square" lIns="0" tIns="0" rIns="0" bIns="0" rtlCol="0" anchor="ctr"/>
           <a:lstStyle/>
           <a:p>
-            <a:pPr indent="0" marL="0">
+            <a:pPr marL="0" indent="0">
               <a:buNone/>
             </a:pPr>
             <a:r>
@@ -6790,7 +6674,7 @@
           <a:bodyPr wrap="square" lIns="0" tIns="0" rIns="0" bIns="0" rtlCol="0" anchor="ctr"/>
           <a:lstStyle/>
           <a:p>
-            <a:pPr indent="0" marL="0">
+            <a:pPr marL="0" indent="0">
               <a:buNone/>
             </a:pPr>
             <a:r>
@@ -6829,7 +6713,7 @@
           <a:bodyPr wrap="square" lIns="0" tIns="0" rIns="0" bIns="0" rtlCol="0" anchor="ctr"/>
           <a:lstStyle/>
           <a:p>
-            <a:pPr indent="0" marL="0">
+            <a:pPr marL="0" indent="0">
               <a:buNone/>
             </a:pPr>
             <a:r>
@@ -6868,7 +6752,7 @@
           <a:bodyPr wrap="square" lIns="0" tIns="0" rIns="0" bIns="0" rtlCol="0" anchor="ctr"/>
           <a:lstStyle/>
           <a:p>
-            <a:pPr indent="0" marL="0">
+            <a:pPr marL="0" indent="0">
               <a:buNone/>
             </a:pPr>
             <a:r>
@@ -6907,7 +6791,7 @@
           <a:bodyPr wrap="square" lIns="0" tIns="0" rIns="0" bIns="0" rtlCol="0" anchor="ctr"/>
           <a:lstStyle/>
           <a:p>
-            <a:pPr indent="0" marL="0">
+            <a:pPr marL="0" indent="0">
               <a:buNone/>
             </a:pPr>
             <a:r>
@@ -6946,7 +6830,7 @@
           <a:bodyPr wrap="square" lIns="0" tIns="0" rIns="0" bIns="0" rtlCol="0" anchor="ctr"/>
           <a:lstStyle/>
           <a:p>
-            <a:pPr indent="0" marL="0">
+            <a:pPr marL="0" indent="0">
               <a:buNone/>
             </a:pPr>
             <a:r>
@@ -6985,7 +6869,7 @@
           <a:bodyPr wrap="square" lIns="0" tIns="0" rIns="0" bIns="0" rtlCol="0" anchor="ctr"/>
           <a:lstStyle/>
           <a:p>
-            <a:pPr indent="0" marL="0">
+            <a:pPr marL="0" indent="0">
               <a:buNone/>
             </a:pPr>
             <a:r>
@@ -7024,7 +6908,7 @@
           <a:bodyPr wrap="square" lIns="0" tIns="0" rIns="0" bIns="0" rtlCol="0" anchor="ctr"/>
           <a:lstStyle/>
           <a:p>
-            <a:pPr indent="0" marL="0">
+            <a:pPr marL="0" indent="0">
               <a:buNone/>
             </a:pPr>
             <a:r>
@@ -7063,7 +6947,7 @@
           <a:bodyPr wrap="square" lIns="0" tIns="0" rIns="0" bIns="0" rtlCol="0" anchor="ctr"/>
           <a:lstStyle/>
           <a:p>
-            <a:pPr indent="0" marL="0">
+            <a:pPr marL="0" indent="0">
               <a:buNone/>
             </a:pPr>
             <a:r>
@@ -7102,7 +6986,7 @@
           <a:bodyPr wrap="square" lIns="0" tIns="0" rIns="0" bIns="0" rtlCol="0" anchor="ctr"/>
           <a:lstStyle/>
           <a:p>
-            <a:pPr indent="0" marL="0">
+            <a:pPr marL="0" indent="0">
               <a:buNone/>
             </a:pPr>
             <a:r>
@@ -7141,7 +7025,7 @@
           <a:bodyPr wrap="square" lIns="0" tIns="0" rIns="0" bIns="0" rtlCol="0" anchor="ctr"/>
           <a:lstStyle/>
           <a:p>
-            <a:pPr indent="0" marL="0">
+            <a:pPr marL="0" indent="0">
               <a:buNone/>
             </a:pPr>
             <a:r>
@@ -7180,7 +7064,7 @@
           <a:bodyPr wrap="square" lIns="0" tIns="0" rIns="0" bIns="0" rtlCol="0" anchor="ctr"/>
           <a:lstStyle/>
           <a:p>
-            <a:pPr indent="0" marL="0">
+            <a:pPr marL="0" indent="0">
               <a:buNone/>
             </a:pPr>
             <a:r>
@@ -7219,7 +7103,7 @@
           <a:bodyPr wrap="square" lIns="0" tIns="0" rIns="0" bIns="0" rtlCol="0" anchor="ctr"/>
           <a:lstStyle/>
           <a:p>
-            <a:pPr indent="0" marL="0">
+            <a:pPr marL="0" indent="0">
               <a:buNone/>
             </a:pPr>
             <a:r>
@@ -7256,6 +7140,13 @@
           </a:solidFill>
           <a:ln/>
         </p:spPr>
+        <p:txBody>
+          <a:bodyPr/>
+          <a:lstStyle/>
+          <a:p>
+            <a:endParaRPr lang="en-US"/>
+          </a:p>
+        </p:txBody>
       </p:sp>
       <p:sp>
         <p:nvSpPr>
@@ -7278,7 +7169,7 @@
           <a:bodyPr wrap="square" lIns="0" tIns="0" rIns="0" bIns="0" rtlCol="0" anchor="ctr"/>
           <a:lstStyle/>
           <a:p>
-            <a:pPr indent="0" marL="0">
+            <a:pPr marL="0" indent="0">
               <a:buNone/>
             </a:pPr>
             <a:r>
@@ -7317,7 +7208,7 @@
           <a:bodyPr wrap="square" lIns="0" tIns="0" rIns="0" bIns="0" rtlCol="0" anchor="ctr"/>
           <a:lstStyle/>
           <a:p>
-            <a:pPr indent="0" marL="0">
+            <a:pPr marL="0" indent="0">
               <a:buNone/>
             </a:pPr>
             <a:r>
@@ -7356,7 +7247,7 @@
           <a:bodyPr wrap="square" lIns="0" tIns="0" rIns="0" bIns="0" rtlCol="0" anchor="ctr"/>
           <a:lstStyle/>
           <a:p>
-            <a:pPr indent="0" marL="0">
+            <a:pPr marL="0" indent="0">
               <a:buNone/>
             </a:pPr>
             <a:r>
@@ -7395,7 +7286,7 @@
           <a:bodyPr wrap="square" lIns="0" tIns="0" rIns="0" bIns="0" rtlCol="0" anchor="ctr"/>
           <a:lstStyle/>
           <a:p>
-            <a:pPr indent="0" marL="0">
+            <a:pPr marL="0" indent="0">
               <a:buNone/>
             </a:pPr>
             <a:r>
@@ -7434,7 +7325,7 @@
           <a:bodyPr wrap="square" lIns="0" tIns="0" rIns="0" bIns="0" rtlCol="0" anchor="ctr"/>
           <a:lstStyle/>
           <a:p>
-            <a:pPr indent="0" marL="0">
+            <a:pPr marL="0" indent="0">
               <a:buNone/>
             </a:pPr>
             <a:r>
@@ -7473,7 +7364,7 @@
           <a:bodyPr wrap="square" lIns="0" tIns="0" rIns="0" bIns="0" rtlCol="0" anchor="ctr"/>
           <a:lstStyle/>
           <a:p>
-            <a:pPr indent="0" marL="0">
+            <a:pPr marL="0" indent="0">
               <a:buNone/>
             </a:pPr>
             <a:r>
@@ -7512,7 +7403,7 @@
           <a:bodyPr wrap="square" lIns="0" tIns="0" rIns="0" bIns="0" rtlCol="0" anchor="ctr"/>
           <a:lstStyle/>
           <a:p>
-            <a:pPr indent="0" marL="0">
+            <a:pPr marL="0" indent="0">
               <a:buNone/>
             </a:pPr>
             <a:r>
@@ -7551,7 +7442,7 @@
           <a:bodyPr wrap="square" lIns="0" tIns="0" rIns="0" bIns="0" rtlCol="0" anchor="ctr"/>
           <a:lstStyle/>
           <a:p>
-            <a:pPr indent="0" marL="0">
+            <a:pPr marL="0" indent="0">
               <a:buNone/>
             </a:pPr>
             <a:r>
@@ -7590,7 +7481,7 @@
           <a:bodyPr wrap="square" lIns="0" tIns="0" rIns="0" bIns="0" rtlCol="0" anchor="ctr"/>
           <a:lstStyle/>
           <a:p>
-            <a:pPr indent="0" marL="0">
+            <a:pPr marL="0" indent="0">
               <a:buNone/>
             </a:pPr>
             <a:r>
@@ -7629,7 +7520,7 @@
           <a:bodyPr wrap="square" lIns="0" tIns="0" rIns="0" bIns="0" rtlCol="0" anchor="ctr"/>
           <a:lstStyle/>
           <a:p>
-            <a:pPr indent="0" marL="0">
+            <a:pPr marL="0" indent="0">
               <a:buNone/>
             </a:pPr>
             <a:r>
@@ -7668,7 +7559,7 @@
           <a:bodyPr wrap="square" lIns="0" tIns="0" rIns="0" bIns="0" rtlCol="0" anchor="ctr"/>
           <a:lstStyle/>
           <a:p>
-            <a:pPr indent="0" marL="0">
+            <a:pPr marL="0" indent="0">
               <a:buNone/>
             </a:pPr>
             <a:r>
@@ -7707,7 +7598,7 @@
           <a:bodyPr wrap="square" lIns="0" tIns="0" rIns="0" bIns="0" rtlCol="0" anchor="ctr"/>
           <a:lstStyle/>
           <a:p>
-            <a:pPr indent="0" marL="0">
+            <a:pPr marL="0" indent="0">
               <a:buNone/>
             </a:pPr>
             <a:r>
@@ -7746,7 +7637,7 @@
           <a:bodyPr wrap="square" lIns="0" tIns="0" rIns="0" bIns="0" rtlCol="0" anchor="ctr"/>
           <a:lstStyle/>
           <a:p>
-            <a:pPr indent="0" marL="0">
+            <a:pPr marL="0" indent="0">
               <a:buNone/>
             </a:pPr>
             <a:r>
@@ -7785,7 +7676,7 @@
           <a:bodyPr wrap="square" lIns="0" tIns="0" rIns="0" bIns="0" rtlCol="0" anchor="ctr"/>
           <a:lstStyle/>
           <a:p>
-            <a:pPr indent="0" marL="0">
+            <a:pPr marL="0" indent="0">
               <a:buNone/>
             </a:pPr>
             <a:r>
@@ -7824,7 +7715,7 @@
           <a:bodyPr wrap="square" lIns="0" tIns="0" rIns="0" bIns="0" rtlCol="0" anchor="ctr"/>
           <a:lstStyle/>
           <a:p>
-            <a:pPr indent="0" marL="0">
+            <a:pPr marL="0" indent="0">
               <a:buNone/>
             </a:pPr>
             <a:r>
@@ -7861,6 +7752,13 @@
           </a:solidFill>
           <a:ln/>
         </p:spPr>
+        <p:txBody>
+          <a:bodyPr/>
+          <a:lstStyle/>
+          <a:p>
+            <a:endParaRPr lang="en-US"/>
+          </a:p>
+        </p:txBody>
       </p:sp>
       <p:sp>
         <p:nvSpPr>
@@ -7883,7 +7781,7 @@
           <a:bodyPr wrap="square" rtlCol="0" anchor="ctr"/>
           <a:lstStyle/>
           <a:p>
-            <a:pPr algn="ctr" indent="0" marL="0">
+            <a:pPr marL="0" indent="0" algn="ctr">
               <a:buNone/>
             </a:pPr>
             <a:r>
@@ -7895,7 +7793,7 @@
                 <a:ea typeface="Open Sans" pitchFamily="34" charset="-122"/>
                 <a:cs typeface="Open Sans" pitchFamily="34" charset="-120"/>
               </a:rPr>
-              <a:t>BUS-314  |  Shidler College of Business  |  University of Hawaiʻi at Mānoa  |  adamstau@hawaii.edu</a:t>
+              <a:t>Stauffer  |  Shidler College of Business  |  University of Hawaiʻi at Mānoa  |  adamstau@hawaii.edu</a:t>
             </a:r>
             <a:endParaRPr lang="en-US" sz="1000" dirty="0"/>
           </a:p>
@@ -7917,6 +7815,7 @@
         <a:solidFill>
           <a:srgbClr val="FAF9F7"/>
         </a:solidFill>
+        <a:effectLst/>
       </p:bgPr>
     </p:bg>
     <p:spTree>
@@ -7952,6 +7851,13 @@
           </a:solidFill>
           <a:ln/>
         </p:spPr>
+        <p:txBody>
+          <a:bodyPr/>
+          <a:lstStyle/>
+          <a:p>
+            <a:endParaRPr lang="en-US"/>
+          </a:p>
+        </p:txBody>
       </p:sp>
       <p:sp>
         <p:nvSpPr>
@@ -7972,6 +7878,13 @@
           </a:solidFill>
           <a:ln/>
         </p:spPr>
+        <p:txBody>
+          <a:bodyPr/>
+          <a:lstStyle/>
+          <a:p>
+            <a:endParaRPr lang="en-US"/>
+          </a:p>
+        </p:txBody>
       </p:sp>
       <p:sp>
         <p:nvSpPr>
@@ -7994,7 +7907,7 @@
           <a:bodyPr wrap="square" rtlCol="0" anchor="ctr"/>
           <a:lstStyle/>
           <a:p>
-            <a:pPr algn="ctr" indent="0" marL="0">
+            <a:pPr marL="0" indent="0" algn="ctr">
               <a:buNone/>
             </a:pPr>
             <a:r>
@@ -8006,7 +7919,7 @@
                 <a:ea typeface="Open Sans" pitchFamily="34" charset="-122"/>
                 <a:cs typeface="Open Sans" pitchFamily="34" charset="-120"/>
               </a:rPr>
-              <a:t>BUS-314  |  Appendix: GitHub &amp; AI Setup Guide  |  Shidler College of Business</a:t>
+              <a:t>Stauffer  |  Appendix: GitHub &amp; AI Setup Guide  |  Shidler College of Business</a:t>
             </a:r>
             <a:endParaRPr lang="en-US" sz="900" dirty="0"/>
           </a:p>
@@ -8033,7 +7946,7 @@
           <a:bodyPr wrap="square" lIns="0" tIns="0" rIns="0" bIns="0" rtlCol="0" anchor="ctr"/>
           <a:lstStyle/>
           <a:p>
-            <a:pPr indent="0" marL="0">
+            <a:pPr marL="0" indent="0">
               <a:buNone/>
             </a:pPr>
             <a:r>
@@ -8072,7 +7985,7 @@
           <a:bodyPr wrap="square" lIns="0" tIns="0" rIns="0" bIns="0" rtlCol="0" anchor="ctr"/>
           <a:lstStyle/>
           <a:p>
-            <a:pPr indent="0" marL="0">
+            <a:pPr marL="0" indent="0">
               <a:lnSpc>
                 <a:spcPct val="130000"/>
               </a:lnSpc>
@@ -8112,281 +8025,24 @@
           </a:solidFill>
           <a:ln/>
           <a:effectLst>
-            <a:outerShdw sx="100000" sy="100000" kx="0" ky="0" algn="bl" rotWithShape="0" blurRad="76200" dist="25400" dir="8100000">
+            <a:outerShdw blurRad="76200" dist="25400" dir="8100000" algn="bl" rotWithShape="0">
               <a:srgbClr val="000000">
                 <a:alpha val="8000"/>
               </a:srgbClr>
             </a:outerShdw>
           </a:effectLst>
         </p:spPr>
+        <p:txBody>
+          <a:bodyPr/>
+          <a:lstStyle/>
+          <a:p>
+            <a:endParaRPr lang="en-US"/>
+          </a:p>
+        </p:txBody>
       </p:sp>
       <p:pic>
         <p:nvPicPr>
-          <p:cNvPr id="8" name="Image 0" descr="preencoded.png">    </p:cNvPr>
-          <p:cNvPicPr>
-            <a:picLocks noChangeAspect="1"/>
-          </p:cNvPicPr>
-          <p:nvPr/>
-        </p:nvPicPr>
-        <p:blipFill>
-          <a:blip r:embed="rId1"/>
-          <a:stretch>
-            <a:fillRect/>
-          </a:stretch>
-        </p:blipFill>
-        <p:spPr>
-          <a:xfrm>
-            <a:off x="1554480" y="1920240"/>
-            <a:ext cx="457200" cy="457200"/>
-          </a:xfrm>
-          <a:prstGeom prst="rect">
-            <a:avLst/>
-          </a:prstGeom>
-        </p:spPr>
-      </p:pic>
-      <p:sp>
-        <p:nvSpPr>
-          <p:cNvPr id="9" name="Text 6"/>
-          <p:cNvSpPr/>
-          <p:nvPr/>
-        </p:nvSpPr>
-        <p:spPr>
-          <a:xfrm>
-            <a:off x="868680" y="2514600"/>
-            <a:ext cx="2103120" cy="320040"/>
-          </a:xfrm>
-          <a:prstGeom prst="rect">
-            <a:avLst/>
-          </a:prstGeom>
-          <a:noFill/>
-          <a:ln/>
-        </p:spPr>
-        <p:txBody>
-          <a:bodyPr wrap="square" lIns="0" tIns="0" rIns="0" bIns="0" rtlCol="0" anchor="ctr"/>
-          <a:lstStyle/>
-          <a:p>
-            <a:pPr algn="ctr" indent="0" marL="0">
-              <a:buNone/>
-            </a:pPr>
-            <a:r>
-              <a:rPr lang="en-US" sz="1400" b="1" dirty="0">
-                <a:solidFill>
-                  <a:srgbClr val="1E2530"/>
-                </a:solidFill>
-                <a:latin typeface="Open Sans" pitchFamily="34" charset="0"/>
-                <a:ea typeface="Open Sans" pitchFamily="34" charset="-122"/>
-                <a:cs typeface="Open Sans" pitchFamily="34" charset="-120"/>
-              </a:rPr>
-              <a:t>Version History</a:t>
-            </a:r>
-            <a:endParaRPr lang="en-US" sz="1400" dirty="0"/>
-          </a:p>
-        </p:txBody>
-      </p:sp>
-      <p:sp>
-        <p:nvSpPr>
-          <p:cNvPr id="10" name="Text 7"/>
-          <p:cNvSpPr/>
-          <p:nvPr/>
-        </p:nvSpPr>
-        <p:spPr>
-          <a:xfrm>
-            <a:off x="868680" y="2880360"/>
-            <a:ext cx="2103120" cy="1188720"/>
-          </a:xfrm>
-          <a:prstGeom prst="rect">
-            <a:avLst/>
-          </a:prstGeom>
-          <a:noFill/>
-          <a:ln/>
-        </p:spPr>
-        <p:txBody>
-          <a:bodyPr wrap="square" lIns="0" tIns="0" rIns="0" bIns="0" rtlCol="0" anchor="t"/>
-          <a:lstStyle/>
-          <a:p>
-            <a:pPr algn="ctr" indent="0" marL="0">
-              <a:lnSpc>
-                <a:spcPct val="140000"/>
-              </a:lnSpc>
-              <a:buNone/>
-            </a:pPr>
-            <a:r>
-              <a:rPr lang="en-US" sz="1100" dirty="0">
-                <a:solidFill>
-                  <a:srgbClr val="5A6B7A"/>
-                </a:solidFill>
-                <a:latin typeface="Open Sans" pitchFamily="34" charset="0"/>
-                <a:ea typeface="Open Sans" pitchFamily="34" charset="-122"/>
-                <a:cs typeface="Open Sans" pitchFamily="34" charset="-120"/>
-              </a:rPr>
-              <a:t>Every save (commit) is permanent. You can always go back to a previous version if something breaks.</a:t>
-            </a:r>
-            <a:endParaRPr lang="en-US" sz="1100" dirty="0"/>
-          </a:p>
-        </p:txBody>
-      </p:sp>
-      <p:sp>
-        <p:nvSpPr>
-          <p:cNvPr id="11" name="Shape 8"/>
-          <p:cNvSpPr/>
-          <p:nvPr/>
-        </p:nvSpPr>
-        <p:spPr>
-          <a:xfrm>
-            <a:off x="3383280" y="1691640"/>
-            <a:ext cx="2377440" cy="2606040"/>
-          </a:xfrm>
-          <a:prstGeom prst="rect">
-            <a:avLst/>
-          </a:prstGeom>
-          <a:solidFill>
-            <a:srgbClr val="FFFFFF"/>
-          </a:solidFill>
-          <a:ln/>
-          <a:effectLst>
-            <a:outerShdw sx="100000" sy="100000" kx="0" ky="0" algn="bl" rotWithShape="0" blurRad="76200" dist="25400" dir="8100000">
-              <a:srgbClr val="000000">
-                <a:alpha val="8000"/>
-              </a:srgbClr>
-            </a:outerShdw>
-          </a:effectLst>
-        </p:spPr>
-      </p:sp>
-      <p:pic>
-        <p:nvPicPr>
-          <p:cNvPr id="12" name="Image 1" descr="preencoded.png">    </p:cNvPr>
-          <p:cNvPicPr>
-            <a:picLocks noChangeAspect="1"/>
-          </p:cNvPicPr>
-          <p:nvPr/>
-        </p:nvPicPr>
-        <p:blipFill>
-          <a:blip r:embed="rId2"/>
-          <a:stretch>
-            <a:fillRect/>
-          </a:stretch>
-        </p:blipFill>
-        <p:spPr>
-          <a:xfrm>
-            <a:off x="4206240" y="1920240"/>
-            <a:ext cx="457200" cy="457200"/>
-          </a:xfrm>
-          <a:prstGeom prst="rect">
-            <a:avLst/>
-          </a:prstGeom>
-        </p:spPr>
-      </p:pic>
-      <p:sp>
-        <p:nvSpPr>
-          <p:cNvPr id="13" name="Text 9"/>
-          <p:cNvSpPr/>
-          <p:nvPr/>
-        </p:nvSpPr>
-        <p:spPr>
-          <a:xfrm>
-            <a:off x="3520440" y="2514600"/>
-            <a:ext cx="2103120" cy="320040"/>
-          </a:xfrm>
-          <a:prstGeom prst="rect">
-            <a:avLst/>
-          </a:prstGeom>
-          <a:noFill/>
-          <a:ln/>
-        </p:spPr>
-        <p:txBody>
-          <a:bodyPr wrap="square" lIns="0" tIns="0" rIns="0" bIns="0" rtlCol="0" anchor="ctr"/>
-          <a:lstStyle/>
-          <a:p>
-            <a:pPr algn="ctr" indent="0" marL="0">
-              <a:buNone/>
-            </a:pPr>
-            <a:r>
-              <a:rPr lang="en-US" sz="1400" b="1" dirty="0">
-                <a:solidFill>
-                  <a:srgbClr val="1E2530"/>
-                </a:solidFill>
-                <a:latin typeface="Open Sans" pitchFamily="34" charset="0"/>
-                <a:ea typeface="Open Sans" pitchFamily="34" charset="-122"/>
-                <a:cs typeface="Open Sans" pitchFamily="34" charset="-120"/>
-              </a:rPr>
-              <a:t>Portfolio Artifact</a:t>
-            </a:r>
-            <a:endParaRPr lang="en-US" sz="1400" dirty="0"/>
-          </a:p>
-        </p:txBody>
-      </p:sp>
-      <p:sp>
-        <p:nvSpPr>
-          <p:cNvPr id="14" name="Text 10"/>
-          <p:cNvSpPr/>
-          <p:nvPr/>
-        </p:nvSpPr>
-        <p:spPr>
-          <a:xfrm>
-            <a:off x="3520440" y="2880360"/>
-            <a:ext cx="2103120" cy="1188720"/>
-          </a:xfrm>
-          <a:prstGeom prst="rect">
-            <a:avLst/>
-          </a:prstGeom>
-          <a:noFill/>
-          <a:ln/>
-        </p:spPr>
-        <p:txBody>
-          <a:bodyPr wrap="square" lIns="0" tIns="0" rIns="0" bIns="0" rtlCol="0" anchor="t"/>
-          <a:lstStyle/>
-          <a:p>
-            <a:pPr algn="ctr" indent="0" marL="0">
-              <a:lnSpc>
-                <a:spcPct val="140000"/>
-              </a:lnSpc>
-              <a:buNone/>
-            </a:pPr>
-            <a:r>
-              <a:rPr lang="en-US" sz="1100" dirty="0">
-                <a:solidFill>
-                  <a:srgbClr val="5A6B7A"/>
-                </a:solidFill>
-                <a:latin typeface="Open Sans" pitchFamily="34" charset="0"/>
-                <a:ea typeface="Open Sans" pitchFamily="34" charset="-122"/>
-                <a:cs typeface="Open Sans" pitchFamily="34" charset="-120"/>
-              </a:rPr>
-              <a:t>Your GitHub profile becomes a professional portfolio. Employers and grad schools check GitHub.</a:t>
-            </a:r>
-            <a:endParaRPr lang="en-US" sz="1100" dirty="0"/>
-          </a:p>
-        </p:txBody>
-      </p:sp>
-      <p:sp>
-        <p:nvSpPr>
-          <p:cNvPr id="15" name="Shape 11"/>
-          <p:cNvSpPr/>
-          <p:nvPr/>
-        </p:nvSpPr>
-        <p:spPr>
-          <a:xfrm>
-            <a:off x="6035040" y="1691640"/>
-            <a:ext cx="2377440" cy="2606040"/>
-          </a:xfrm>
-          <a:prstGeom prst="rect">
-            <a:avLst/>
-          </a:prstGeom>
-          <a:solidFill>
-            <a:srgbClr val="FFFFFF"/>
-          </a:solidFill>
-          <a:ln/>
-          <a:effectLst>
-            <a:outerShdw sx="100000" sy="100000" kx="0" ky="0" algn="bl" rotWithShape="0" blurRad="76200" dist="25400" dir="8100000">
-              <a:srgbClr val="000000">
-                <a:alpha val="8000"/>
-              </a:srgbClr>
-            </a:outerShdw>
-          </a:effectLst>
-        </p:spPr>
-      </p:sp>
-      <p:pic>
-        <p:nvPicPr>
-          <p:cNvPr id="16" name="Image 2" descr="preencoded.png">    </p:cNvPr>
+          <p:cNvPr id="8" name="Image 0" descr="preencoded.png"/>
           <p:cNvPicPr>
             <a:picLocks noChangeAspect="1"/>
           </p:cNvPicPr>
@@ -8400,6 +8056,284 @@
         </p:blipFill>
         <p:spPr>
           <a:xfrm>
+            <a:off x="1554480" y="1920240"/>
+            <a:ext cx="457200" cy="457200"/>
+          </a:xfrm>
+          <a:prstGeom prst="rect">
+            <a:avLst/>
+          </a:prstGeom>
+        </p:spPr>
+      </p:pic>
+      <p:sp>
+        <p:nvSpPr>
+          <p:cNvPr id="9" name="Text 6"/>
+          <p:cNvSpPr/>
+          <p:nvPr/>
+        </p:nvSpPr>
+        <p:spPr>
+          <a:xfrm>
+            <a:off x="868680" y="2514600"/>
+            <a:ext cx="2103120" cy="320040"/>
+          </a:xfrm>
+          <a:prstGeom prst="rect">
+            <a:avLst/>
+          </a:prstGeom>
+          <a:noFill/>
+          <a:ln/>
+        </p:spPr>
+        <p:txBody>
+          <a:bodyPr wrap="square" lIns="0" tIns="0" rIns="0" bIns="0" rtlCol="0" anchor="ctr"/>
+          <a:lstStyle/>
+          <a:p>
+            <a:pPr marL="0" indent="0" algn="ctr">
+              <a:buNone/>
+            </a:pPr>
+            <a:r>
+              <a:rPr lang="en-US" sz="1400" b="1" dirty="0">
+                <a:solidFill>
+                  <a:srgbClr val="1E2530"/>
+                </a:solidFill>
+                <a:latin typeface="Open Sans" pitchFamily="34" charset="0"/>
+                <a:ea typeface="Open Sans" pitchFamily="34" charset="-122"/>
+                <a:cs typeface="Open Sans" pitchFamily="34" charset="-120"/>
+              </a:rPr>
+              <a:t>Version History</a:t>
+            </a:r>
+            <a:endParaRPr lang="en-US" sz="1400" dirty="0"/>
+          </a:p>
+        </p:txBody>
+      </p:sp>
+      <p:sp>
+        <p:nvSpPr>
+          <p:cNvPr id="10" name="Text 7"/>
+          <p:cNvSpPr/>
+          <p:nvPr/>
+        </p:nvSpPr>
+        <p:spPr>
+          <a:xfrm>
+            <a:off x="868680" y="2880360"/>
+            <a:ext cx="2103120" cy="1188720"/>
+          </a:xfrm>
+          <a:prstGeom prst="rect">
+            <a:avLst/>
+          </a:prstGeom>
+          <a:noFill/>
+          <a:ln/>
+        </p:spPr>
+        <p:txBody>
+          <a:bodyPr wrap="square" lIns="0" tIns="0" rIns="0" bIns="0" rtlCol="0" anchor="t"/>
+          <a:lstStyle/>
+          <a:p>
+            <a:pPr marL="0" indent="0" algn="ctr">
+              <a:lnSpc>
+                <a:spcPct val="140000"/>
+              </a:lnSpc>
+              <a:buNone/>
+            </a:pPr>
+            <a:r>
+              <a:rPr lang="en-US" sz="1100" dirty="0">
+                <a:solidFill>
+                  <a:srgbClr val="5A6B7A"/>
+                </a:solidFill>
+                <a:latin typeface="Open Sans" pitchFamily="34" charset="0"/>
+                <a:ea typeface="Open Sans" pitchFamily="34" charset="-122"/>
+                <a:cs typeface="Open Sans" pitchFamily="34" charset="-120"/>
+              </a:rPr>
+              <a:t>Every save (commit) is permanent. You can always go back to a previous version if something breaks.</a:t>
+            </a:r>
+            <a:endParaRPr lang="en-US" sz="1100" dirty="0"/>
+          </a:p>
+        </p:txBody>
+      </p:sp>
+      <p:sp>
+        <p:nvSpPr>
+          <p:cNvPr id="11" name="Shape 8"/>
+          <p:cNvSpPr/>
+          <p:nvPr/>
+        </p:nvSpPr>
+        <p:spPr>
+          <a:xfrm>
+            <a:off x="3383280" y="1691640"/>
+            <a:ext cx="2377440" cy="2606040"/>
+          </a:xfrm>
+          <a:prstGeom prst="rect">
+            <a:avLst/>
+          </a:prstGeom>
+          <a:solidFill>
+            <a:srgbClr val="FFFFFF"/>
+          </a:solidFill>
+          <a:ln/>
+          <a:effectLst>
+            <a:outerShdw blurRad="76200" dist="25400" dir="8100000" algn="bl" rotWithShape="0">
+              <a:srgbClr val="000000">
+                <a:alpha val="8000"/>
+              </a:srgbClr>
+            </a:outerShdw>
+          </a:effectLst>
+        </p:spPr>
+        <p:txBody>
+          <a:bodyPr/>
+          <a:lstStyle/>
+          <a:p>
+            <a:endParaRPr lang="en-US"/>
+          </a:p>
+        </p:txBody>
+      </p:sp>
+      <p:pic>
+        <p:nvPicPr>
+          <p:cNvPr id="12" name="Image 1" descr="preencoded.png"/>
+          <p:cNvPicPr>
+            <a:picLocks noChangeAspect="1"/>
+          </p:cNvPicPr>
+          <p:nvPr/>
+        </p:nvPicPr>
+        <p:blipFill>
+          <a:blip r:embed="rId4"/>
+          <a:stretch>
+            <a:fillRect/>
+          </a:stretch>
+        </p:blipFill>
+        <p:spPr>
+          <a:xfrm>
+            <a:off x="4206240" y="1920240"/>
+            <a:ext cx="457200" cy="457200"/>
+          </a:xfrm>
+          <a:prstGeom prst="rect">
+            <a:avLst/>
+          </a:prstGeom>
+        </p:spPr>
+      </p:pic>
+      <p:sp>
+        <p:nvSpPr>
+          <p:cNvPr id="13" name="Text 9"/>
+          <p:cNvSpPr/>
+          <p:nvPr/>
+        </p:nvSpPr>
+        <p:spPr>
+          <a:xfrm>
+            <a:off x="3520440" y="2514600"/>
+            <a:ext cx="2103120" cy="320040"/>
+          </a:xfrm>
+          <a:prstGeom prst="rect">
+            <a:avLst/>
+          </a:prstGeom>
+          <a:noFill/>
+          <a:ln/>
+        </p:spPr>
+        <p:txBody>
+          <a:bodyPr wrap="square" lIns="0" tIns="0" rIns="0" bIns="0" rtlCol="0" anchor="ctr"/>
+          <a:lstStyle/>
+          <a:p>
+            <a:pPr marL="0" indent="0" algn="ctr">
+              <a:buNone/>
+            </a:pPr>
+            <a:r>
+              <a:rPr lang="en-US" sz="1400" b="1" dirty="0">
+                <a:solidFill>
+                  <a:srgbClr val="1E2530"/>
+                </a:solidFill>
+                <a:latin typeface="Open Sans" pitchFamily="34" charset="0"/>
+                <a:ea typeface="Open Sans" pitchFamily="34" charset="-122"/>
+                <a:cs typeface="Open Sans" pitchFamily="34" charset="-120"/>
+              </a:rPr>
+              <a:t>Portfolio Artifact</a:t>
+            </a:r>
+            <a:endParaRPr lang="en-US" sz="1400" dirty="0"/>
+          </a:p>
+        </p:txBody>
+      </p:sp>
+      <p:sp>
+        <p:nvSpPr>
+          <p:cNvPr id="14" name="Text 10"/>
+          <p:cNvSpPr/>
+          <p:nvPr/>
+        </p:nvSpPr>
+        <p:spPr>
+          <a:xfrm>
+            <a:off x="3520440" y="2880360"/>
+            <a:ext cx="2103120" cy="1188720"/>
+          </a:xfrm>
+          <a:prstGeom prst="rect">
+            <a:avLst/>
+          </a:prstGeom>
+          <a:noFill/>
+          <a:ln/>
+        </p:spPr>
+        <p:txBody>
+          <a:bodyPr wrap="square" lIns="0" tIns="0" rIns="0" bIns="0" rtlCol="0" anchor="t"/>
+          <a:lstStyle/>
+          <a:p>
+            <a:pPr marL="0" indent="0" algn="ctr">
+              <a:lnSpc>
+                <a:spcPct val="140000"/>
+              </a:lnSpc>
+              <a:buNone/>
+            </a:pPr>
+            <a:r>
+              <a:rPr lang="en-US" sz="1100" dirty="0">
+                <a:solidFill>
+                  <a:srgbClr val="5A6B7A"/>
+                </a:solidFill>
+                <a:latin typeface="Open Sans" pitchFamily="34" charset="0"/>
+                <a:ea typeface="Open Sans" pitchFamily="34" charset="-122"/>
+                <a:cs typeface="Open Sans" pitchFamily="34" charset="-120"/>
+              </a:rPr>
+              <a:t>Your GitHub profile becomes a professional portfolio. Employers and grad schools check GitHub.</a:t>
+            </a:r>
+            <a:endParaRPr lang="en-US" sz="1100" dirty="0"/>
+          </a:p>
+        </p:txBody>
+      </p:sp>
+      <p:sp>
+        <p:nvSpPr>
+          <p:cNvPr id="15" name="Shape 11"/>
+          <p:cNvSpPr/>
+          <p:nvPr/>
+        </p:nvSpPr>
+        <p:spPr>
+          <a:xfrm>
+            <a:off x="6035040" y="1691640"/>
+            <a:ext cx="2377440" cy="2606040"/>
+          </a:xfrm>
+          <a:prstGeom prst="rect">
+            <a:avLst/>
+          </a:prstGeom>
+          <a:solidFill>
+            <a:srgbClr val="FFFFFF"/>
+          </a:solidFill>
+          <a:ln/>
+          <a:effectLst>
+            <a:outerShdw blurRad="76200" dist="25400" dir="8100000" algn="bl" rotWithShape="0">
+              <a:srgbClr val="000000">
+                <a:alpha val="8000"/>
+              </a:srgbClr>
+            </a:outerShdw>
+          </a:effectLst>
+        </p:spPr>
+        <p:txBody>
+          <a:bodyPr/>
+          <a:lstStyle/>
+          <a:p>
+            <a:endParaRPr lang="en-US"/>
+          </a:p>
+        </p:txBody>
+      </p:sp>
+      <p:pic>
+        <p:nvPicPr>
+          <p:cNvPr id="16" name="Image 2" descr="preencoded.png"/>
+          <p:cNvPicPr>
+            <a:picLocks noChangeAspect="1"/>
+          </p:cNvPicPr>
+          <p:nvPr/>
+        </p:nvPicPr>
+        <p:blipFill>
+          <a:blip r:embed="rId5"/>
+          <a:stretch>
+            <a:fillRect/>
+          </a:stretch>
+        </p:blipFill>
+        <p:spPr>
+          <a:xfrm>
             <a:off x="6858000" y="1920240"/>
             <a:ext cx="457200" cy="457200"/>
           </a:xfrm>
@@ -8429,7 +8363,7 @@
           <a:bodyPr wrap="square" lIns="0" tIns="0" rIns="0" bIns="0" rtlCol="0" anchor="ctr"/>
           <a:lstStyle/>
           <a:p>
-            <a:pPr algn="ctr" indent="0" marL="0">
+            <a:pPr marL="0" indent="0" algn="ctr">
               <a:buNone/>
             </a:pPr>
             <a:r>
@@ -8468,7 +8402,7 @@
           <a:bodyPr wrap="square" lIns="0" tIns="0" rIns="0" bIns="0" rtlCol="0" anchor="t"/>
           <a:lstStyle/>
           <a:p>
-            <a:pPr algn="ctr" indent="0" marL="0">
+            <a:pPr marL="0" indent="0" algn="ctr">
               <a:lnSpc>
                 <a:spcPct val="140000"/>
               </a:lnSpc>
@@ -8505,6 +8439,7 @@
         <a:solidFill>
           <a:srgbClr val="FAF9F7"/>
         </a:solidFill>
+        <a:effectLst/>
       </p:bgPr>
     </p:bg>
     <p:spTree>
@@ -8540,6 +8475,13 @@
           </a:solidFill>
           <a:ln/>
         </p:spPr>
+        <p:txBody>
+          <a:bodyPr/>
+          <a:lstStyle/>
+          <a:p>
+            <a:endParaRPr lang="en-US"/>
+          </a:p>
+        </p:txBody>
       </p:sp>
       <p:sp>
         <p:nvSpPr>
@@ -8560,6 +8502,13 @@
           </a:solidFill>
           <a:ln/>
         </p:spPr>
+        <p:txBody>
+          <a:bodyPr/>
+          <a:lstStyle/>
+          <a:p>
+            <a:endParaRPr lang="en-US"/>
+          </a:p>
+        </p:txBody>
       </p:sp>
       <p:sp>
         <p:nvSpPr>
@@ -8582,7 +8531,7 @@
           <a:bodyPr wrap="square" rtlCol="0" anchor="ctr"/>
           <a:lstStyle/>
           <a:p>
-            <a:pPr algn="ctr" indent="0" marL="0">
+            <a:pPr marL="0" indent="0" algn="ctr">
               <a:buNone/>
             </a:pPr>
             <a:r>
@@ -8594,7 +8543,7 @@
                 <a:ea typeface="Open Sans" pitchFamily="34" charset="-122"/>
                 <a:cs typeface="Open Sans" pitchFamily="34" charset="-120"/>
               </a:rPr>
-              <a:t>BUS-314  |  Appendix: GitHub &amp; AI Setup Guide  |  Shidler College of Business</a:t>
+              <a:t>Stauffer  |  Appendix: GitHub &amp; AI Setup Guide  |  Shidler College of Business</a:t>
             </a:r>
             <a:endParaRPr lang="en-US" sz="900" dirty="0"/>
           </a:p>
@@ -8612,15 +8561,20 @@
             <a:ext cx="1179576" cy="274320"/>
           </a:xfrm>
           <a:prstGeom prst="rect">
-            <a:avLst>
-              <a:gd name="adj" fmla="val 6667"/>
-            </a:avLst>
+            <a:avLst/>
           </a:prstGeom>
           <a:solidFill>
             <a:srgbClr val="36454F"/>
           </a:solidFill>
           <a:ln/>
         </p:spPr>
+        <p:txBody>
+          <a:bodyPr/>
+          <a:lstStyle/>
+          <a:p>
+            <a:endParaRPr lang="en-US"/>
+          </a:p>
+        </p:txBody>
       </p:sp>
       <p:sp>
         <p:nvSpPr>
@@ -8643,11 +8597,11 @@
           <a:bodyPr wrap="square" lIns="0" tIns="0" rIns="0" bIns="0" rtlCol="0" anchor="ctr"/>
           <a:lstStyle/>
           <a:p>
-            <a:pPr algn="ctr" indent="0" marL="0">
-              <a:buNone/>
-            </a:pPr>
-            <a:r>
-              <a:rPr lang="en-US" sz="900" b="1" spc="300" kern="0" dirty="0">
+            <a:pPr marL="0" indent="0" algn="ctr">
+              <a:buNone/>
+            </a:pPr>
+            <a:r>
+              <a:rPr lang="en-US" sz="900" b="1" kern="0" spc="300" dirty="0">
                 <a:solidFill>
                   <a:srgbClr val="B8975C"/>
                 </a:solidFill>
@@ -8682,7 +8636,7 @@
           <a:bodyPr wrap="square" lIns="0" tIns="0" rIns="0" bIns="0" rtlCol="0" anchor="ctr"/>
           <a:lstStyle/>
           <a:p>
-            <a:pPr indent="0" marL="0">
+            <a:pPr marL="0" indent="0">
               <a:buNone/>
             </a:pPr>
             <a:r>
@@ -8711,7 +8665,7 @@
             <a:off x="731520" y="1280160"/>
             <a:ext cx="365760" cy="365760"/>
           </a:xfrm>
-          <a:prstGeom prst="oval">
+          <a:prstGeom prst="line">
             <a:avLst/>
           </a:prstGeom>
           <a:solidFill>
@@ -8719,6 +8673,13 @@
           </a:solidFill>
           <a:ln/>
         </p:spPr>
+        <p:txBody>
+          <a:bodyPr/>
+          <a:lstStyle/>
+          <a:p>
+            <a:endParaRPr lang="en-US"/>
+          </a:p>
+        </p:txBody>
       </p:sp>
       <p:sp>
         <p:nvSpPr>
@@ -8741,7 +8702,7 @@
           <a:bodyPr wrap="square" lIns="0" tIns="0" rIns="0" bIns="0" rtlCol="0" anchor="ctr"/>
           <a:lstStyle/>
           <a:p>
-            <a:pPr algn="ctr" indent="0" marL="0">
+            <a:pPr marL="0" indent="0" algn="ctr">
               <a:buNone/>
             </a:pPr>
             <a:r>
@@ -8780,7 +8741,7 @@
           <a:bodyPr wrap="square" lIns="0" tIns="0" rIns="0" bIns="0" rtlCol="0" anchor="ctr"/>
           <a:lstStyle/>
           <a:p>
-            <a:pPr indent="0" marL="0">
+            <a:pPr marL="0" indent="0">
               <a:buNone/>
             </a:pPr>
             <a:r>
@@ -8809,7 +8770,7 @@
             <a:off x="731520" y="1828800"/>
             <a:ext cx="365760" cy="365760"/>
           </a:xfrm>
-          <a:prstGeom prst="oval">
+          <a:prstGeom prst="line">
             <a:avLst/>
           </a:prstGeom>
           <a:solidFill>
@@ -8817,6 +8778,13 @@
           </a:solidFill>
           <a:ln/>
         </p:spPr>
+        <p:txBody>
+          <a:bodyPr/>
+          <a:lstStyle/>
+          <a:p>
+            <a:endParaRPr lang="en-US"/>
+          </a:p>
+        </p:txBody>
       </p:sp>
       <p:sp>
         <p:nvSpPr>
@@ -8839,7 +8807,7 @@
           <a:bodyPr wrap="square" lIns="0" tIns="0" rIns="0" bIns="0" rtlCol="0" anchor="ctr"/>
           <a:lstStyle/>
           <a:p>
-            <a:pPr algn="ctr" indent="0" marL="0">
+            <a:pPr marL="0" indent="0" algn="ctr">
               <a:buNone/>
             </a:pPr>
             <a:r>
@@ -8878,7 +8846,7 @@
           <a:bodyPr wrap="square" lIns="0" tIns="0" rIns="0" bIns="0" rtlCol="0" anchor="ctr"/>
           <a:lstStyle/>
           <a:p>
-            <a:pPr indent="0" marL="0">
+            <a:pPr marL="0" indent="0">
               <a:buNone/>
             </a:pPr>
             <a:r>
@@ -8907,7 +8875,7 @@
             <a:off x="731520" y="2377440"/>
             <a:ext cx="365760" cy="365760"/>
           </a:xfrm>
-          <a:prstGeom prst="oval">
+          <a:prstGeom prst="line">
             <a:avLst/>
           </a:prstGeom>
           <a:solidFill>
@@ -8915,6 +8883,13 @@
           </a:solidFill>
           <a:ln/>
         </p:spPr>
+        <p:txBody>
+          <a:bodyPr/>
+          <a:lstStyle/>
+          <a:p>
+            <a:endParaRPr lang="en-US"/>
+          </a:p>
+        </p:txBody>
       </p:sp>
       <p:sp>
         <p:nvSpPr>
@@ -8937,7 +8912,7 @@
           <a:bodyPr wrap="square" lIns="0" tIns="0" rIns="0" bIns="0" rtlCol="0" anchor="ctr"/>
           <a:lstStyle/>
           <a:p>
-            <a:pPr algn="ctr" indent="0" marL="0">
+            <a:pPr marL="0" indent="0" algn="ctr">
               <a:buNone/>
             </a:pPr>
             <a:r>
@@ -8976,7 +8951,7 @@
           <a:bodyPr wrap="square" lIns="0" tIns="0" rIns="0" bIns="0" rtlCol="0" anchor="ctr"/>
           <a:lstStyle/>
           <a:p>
-            <a:pPr indent="0" marL="0">
+            <a:pPr marL="0" indent="0">
               <a:buNone/>
             </a:pPr>
             <a:r>
@@ -9005,7 +8980,7 @@
             <a:off x="731520" y="2926080"/>
             <a:ext cx="365760" cy="365760"/>
           </a:xfrm>
-          <a:prstGeom prst="oval">
+          <a:prstGeom prst="line">
             <a:avLst/>
           </a:prstGeom>
           <a:solidFill>
@@ -9013,6 +8988,13 @@
           </a:solidFill>
           <a:ln/>
         </p:spPr>
+        <p:txBody>
+          <a:bodyPr/>
+          <a:lstStyle/>
+          <a:p>
+            <a:endParaRPr lang="en-US"/>
+          </a:p>
+        </p:txBody>
       </p:sp>
       <p:sp>
         <p:nvSpPr>
@@ -9035,7 +9017,7 @@
           <a:bodyPr wrap="square" lIns="0" tIns="0" rIns="0" bIns="0" rtlCol="0" anchor="ctr"/>
           <a:lstStyle/>
           <a:p>
-            <a:pPr algn="ctr" indent="0" marL="0">
+            <a:pPr marL="0" indent="0" algn="ctr">
               <a:buNone/>
             </a:pPr>
             <a:r>
@@ -9074,7 +9056,7 @@
           <a:bodyPr wrap="square" lIns="0" tIns="0" rIns="0" bIns="0" rtlCol="0" anchor="ctr"/>
           <a:lstStyle/>
           <a:p>
-            <a:pPr indent="0" marL="0">
+            <a:pPr marL="0" indent="0">
               <a:buNone/>
             </a:pPr>
             <a:r>
@@ -9103,7 +9085,7 @@
             <a:off x="731520" y="3474720"/>
             <a:ext cx="365760" cy="365760"/>
           </a:xfrm>
-          <a:prstGeom prst="oval">
+          <a:prstGeom prst="line">
             <a:avLst/>
           </a:prstGeom>
           <a:solidFill>
@@ -9111,6 +9093,13 @@
           </a:solidFill>
           <a:ln/>
         </p:spPr>
+        <p:txBody>
+          <a:bodyPr/>
+          <a:lstStyle/>
+          <a:p>
+            <a:endParaRPr lang="en-US"/>
+          </a:p>
+        </p:txBody>
       </p:sp>
       <p:sp>
         <p:nvSpPr>
@@ -9133,7 +9122,7 @@
           <a:bodyPr wrap="square" lIns="0" tIns="0" rIns="0" bIns="0" rtlCol="0" anchor="ctr"/>
           <a:lstStyle/>
           <a:p>
-            <a:pPr algn="ctr" indent="0" marL="0">
+            <a:pPr marL="0" indent="0" algn="ctr">
               <a:buNone/>
             </a:pPr>
             <a:r>
@@ -9172,7 +9161,7 @@
           <a:bodyPr wrap="square" lIns="0" tIns="0" rIns="0" bIns="0" rtlCol="0" anchor="ctr"/>
           <a:lstStyle/>
           <a:p>
-            <a:pPr indent="0" marL="0">
+            <a:pPr marL="0" indent="0">
               <a:buNone/>
             </a:pPr>
             <a:r>
@@ -9209,24 +9198,31 @@
           </a:solidFill>
           <a:ln/>
           <a:effectLst>
-            <a:outerShdw sx="100000" sy="100000" kx="0" ky="0" algn="bl" rotWithShape="0" blurRad="76200" dist="25400" dir="8100000">
+            <a:outerShdw blurRad="76200" dist="25400" dir="8100000" algn="bl" rotWithShape="0">
               <a:srgbClr val="000000">
                 <a:alpha val="8000"/>
               </a:srgbClr>
             </a:outerShdw>
           </a:effectLst>
         </p:spPr>
+        <p:txBody>
+          <a:bodyPr/>
+          <a:lstStyle/>
+          <a:p>
+            <a:endParaRPr lang="en-US"/>
+          </a:p>
+        </p:txBody>
       </p:sp>
       <p:pic>
         <p:nvPicPr>
-          <p:cNvPr id="24" name="Image 0" descr="preencoded.png">    </p:cNvPr>
+          <p:cNvPr id="24" name="Image 0" descr="preencoded.png"/>
           <p:cNvPicPr>
             <a:picLocks noChangeAspect="1"/>
           </p:cNvPicPr>
           <p:nvPr/>
         </p:nvPicPr>
         <p:blipFill>
-          <a:blip r:embed="rId1"/>
+          <a:blip r:embed="rId3"/>
           <a:stretch>
             <a:fillRect/>
           </a:stretch>
@@ -9262,7 +9258,7 @@
           <a:bodyPr wrap="square" lIns="0" tIns="0" rIns="0" bIns="0" rtlCol="0" anchor="ctr"/>
           <a:lstStyle/>
           <a:p>
-            <a:pPr indent="0" marL="0">
+            <a:pPr marL="0" indent="0">
               <a:buNone/>
             </a:pPr>
             <a:r>
@@ -9301,7 +9297,7 @@
           <a:bodyPr wrap="square" lIns="0" tIns="0" rIns="0" bIns="0" rtlCol="0" anchor="t"/>
           <a:lstStyle/>
           <a:p>
-            <a:pPr indent="0" marL="0">
+            <a:pPr marL="0" indent="0">
               <a:buNone/>
             </a:pPr>
             <a:r>
@@ -9315,7 +9311,7 @@
             <a:endParaRPr lang="en-US" sz="1100" dirty="0"/>
           </a:p>
           <a:p>
-            <a:pPr indent="0" marL="0">
+            <a:pPr marL="0" indent="0">
               <a:buNone/>
             </a:pPr>
             <a:r>
@@ -9330,7 +9326,7 @@
             <a:endParaRPr lang="en-US" sz="1100" dirty="0"/>
           </a:p>
           <a:p>
-            <a:pPr indent="0" marL="0">
+            <a:pPr marL="0" indent="0">
               <a:buNone/>
             </a:pPr>
             <a:r>
@@ -9344,7 +9340,7 @@
             <a:endParaRPr lang="en-US" sz="1100" dirty="0"/>
           </a:p>
           <a:p>
-            <a:pPr indent="0" marL="0">
+            <a:pPr marL="0" indent="0">
               <a:buNone/>
             </a:pPr>
             <a:r>
@@ -9359,7 +9355,7 @@
             <a:endParaRPr lang="en-US" sz="1100" dirty="0"/>
           </a:p>
           <a:p>
-            <a:pPr indent="0" marL="0">
+            <a:pPr marL="0" indent="0">
               <a:buNone/>
             </a:pPr>
             <a:r>
@@ -9373,7 +9369,7 @@
             <a:endParaRPr lang="en-US" sz="1100" dirty="0"/>
           </a:p>
           <a:p>
-            <a:pPr indent="0" marL="0">
+            <a:pPr marL="0" indent="0">
               <a:buNone/>
             </a:pPr>
             <a:r>
@@ -9404,6 +9400,7 @@
         <a:solidFill>
           <a:srgbClr val="FAF9F7"/>
         </a:solidFill>
+        <a:effectLst/>
       </p:bgPr>
     </p:bg>
     <p:spTree>
@@ -9439,6 +9436,13 @@
           </a:solidFill>
           <a:ln/>
         </p:spPr>
+        <p:txBody>
+          <a:bodyPr/>
+          <a:lstStyle/>
+          <a:p>
+            <a:endParaRPr lang="en-US"/>
+          </a:p>
+        </p:txBody>
       </p:sp>
       <p:sp>
         <p:nvSpPr>
@@ -9459,6 +9463,13 @@
           </a:solidFill>
           <a:ln/>
         </p:spPr>
+        <p:txBody>
+          <a:bodyPr/>
+          <a:lstStyle/>
+          <a:p>
+            <a:endParaRPr lang="en-US"/>
+          </a:p>
+        </p:txBody>
       </p:sp>
       <p:sp>
         <p:nvSpPr>
@@ -9481,7 +9492,7 @@
           <a:bodyPr wrap="square" rtlCol="0" anchor="ctr"/>
           <a:lstStyle/>
           <a:p>
-            <a:pPr algn="ctr" indent="0" marL="0">
+            <a:pPr marL="0" indent="0" algn="ctr">
               <a:buNone/>
             </a:pPr>
             <a:r>
@@ -9493,7 +9504,7 @@
                 <a:ea typeface="Open Sans" pitchFamily="34" charset="-122"/>
                 <a:cs typeface="Open Sans" pitchFamily="34" charset="-120"/>
               </a:rPr>
-              <a:t>BUS-314  |  Appendix: GitHub &amp; AI Setup Guide  |  Shidler College of Business</a:t>
+              <a:t>Stauffer  |  Appendix: GitHub &amp; AI Setup Guide  |  Shidler College of Business</a:t>
             </a:r>
             <a:endParaRPr lang="en-US" sz="900" dirty="0"/>
           </a:p>
@@ -9511,15 +9522,20 @@
             <a:ext cx="1179576" cy="274320"/>
           </a:xfrm>
           <a:prstGeom prst="rect">
-            <a:avLst>
-              <a:gd name="adj" fmla="val 6667"/>
-            </a:avLst>
+            <a:avLst/>
           </a:prstGeom>
           <a:solidFill>
             <a:srgbClr val="36454F"/>
           </a:solidFill>
           <a:ln/>
         </p:spPr>
+        <p:txBody>
+          <a:bodyPr/>
+          <a:lstStyle/>
+          <a:p>
+            <a:endParaRPr lang="en-US"/>
+          </a:p>
+        </p:txBody>
       </p:sp>
       <p:sp>
         <p:nvSpPr>
@@ -9542,11 +9558,11 @@
           <a:bodyPr wrap="square" lIns="0" tIns="0" rIns="0" bIns="0" rtlCol="0" anchor="ctr"/>
           <a:lstStyle/>
           <a:p>
-            <a:pPr algn="ctr" indent="0" marL="0">
-              <a:buNone/>
-            </a:pPr>
-            <a:r>
-              <a:rPr lang="en-US" sz="900" b="1" spc="300" kern="0" dirty="0">
+            <a:pPr marL="0" indent="0" algn="ctr">
+              <a:buNone/>
+            </a:pPr>
+            <a:r>
+              <a:rPr lang="en-US" sz="900" b="1" kern="0" spc="300" dirty="0">
                 <a:solidFill>
                   <a:srgbClr val="B8975C"/>
                 </a:solidFill>
@@ -9581,7 +9597,7 @@
           <a:bodyPr wrap="square" lIns="0" tIns="0" rIns="0" bIns="0" rtlCol="0" anchor="ctr"/>
           <a:lstStyle/>
           <a:p>
-            <a:pPr indent="0" marL="0">
+            <a:pPr marL="0" indent="0">
               <a:buNone/>
             </a:pPr>
             <a:r>
@@ -9620,7 +9636,7 @@
           <a:bodyPr wrap="square" lIns="0" tIns="0" rIns="0" bIns="0" rtlCol="0" anchor="ctr"/>
           <a:lstStyle/>
           <a:p>
-            <a:pPr indent="0" marL="0">
+            <a:pPr marL="0" indent="0">
               <a:buNone/>
             </a:pPr>
             <a:r>
@@ -9657,13 +9673,20 @@
           </a:solidFill>
           <a:ln/>
           <a:effectLst>
-            <a:outerShdw sx="100000" sy="100000" kx="0" ky="0" algn="bl" rotWithShape="0" blurRad="50800" dist="25400" dir="8100000">
+            <a:outerShdw blurRad="50800" dist="25400" dir="8100000" algn="bl" rotWithShape="0">
               <a:srgbClr val="000000">
                 <a:alpha val="6000"/>
               </a:srgbClr>
             </a:outerShdw>
           </a:effectLst>
         </p:spPr>
+        <p:txBody>
+          <a:bodyPr/>
+          <a:lstStyle/>
+          <a:p>
+            <a:endParaRPr lang="en-US"/>
+          </a:p>
+        </p:txBody>
       </p:sp>
       <p:sp>
         <p:nvSpPr>
@@ -9686,7 +9709,7 @@
           <a:bodyPr wrap="square" lIns="0" tIns="0" rIns="0" bIns="0" rtlCol="0" anchor="ctr"/>
           <a:lstStyle/>
           <a:p>
-            <a:pPr indent="0" marL="0">
+            <a:pPr marL="0" indent="0">
               <a:buNone/>
             </a:pPr>
             <a:r>
@@ -9883,13 +9906,20 @@
           </a:solidFill>
           <a:ln/>
           <a:effectLst>
-            <a:outerShdw sx="100000" sy="100000" kx="0" ky="0" algn="bl" rotWithShape="0" blurRad="50800" dist="25400" dir="8100000">
+            <a:outerShdw blurRad="50800" dist="25400" dir="8100000" algn="bl" rotWithShape="0">
               <a:srgbClr val="000000">
                 <a:alpha val="6000"/>
               </a:srgbClr>
             </a:outerShdw>
           </a:effectLst>
         </p:spPr>
+        <p:txBody>
+          <a:bodyPr/>
+          <a:lstStyle/>
+          <a:p>
+            <a:endParaRPr lang="en-US"/>
+          </a:p>
+        </p:txBody>
       </p:sp>
       <p:sp>
         <p:nvSpPr>
@@ -9912,7 +9942,7 @@
           <a:bodyPr wrap="square" lIns="0" tIns="0" rIns="0" bIns="0" rtlCol="0" anchor="ctr"/>
           <a:lstStyle/>
           <a:p>
-            <a:pPr indent="0" marL="0">
+            <a:pPr marL="0" indent="0">
               <a:buNone/>
             </a:pPr>
             <a:r>
@@ -10102,26 +10132,31 @@
             <a:ext cx="7680960" cy="822960"/>
           </a:xfrm>
           <a:prstGeom prst="rect">
-            <a:avLst>
-              <a:gd name="adj" fmla="val 4444"/>
-            </a:avLst>
+            <a:avLst/>
           </a:prstGeom>
           <a:solidFill>
             <a:srgbClr val="36454F"/>
           </a:solidFill>
           <a:ln/>
         </p:spPr>
+        <p:txBody>
+          <a:bodyPr/>
+          <a:lstStyle/>
+          <a:p>
+            <a:endParaRPr lang="en-US"/>
+          </a:p>
+        </p:txBody>
       </p:sp>
       <p:pic>
         <p:nvPicPr>
-          <p:cNvPr id="22" name="Image 0" descr="preencoded.png">    </p:cNvPr>
+          <p:cNvPr id="22" name="Image 0" descr="preencoded.png"/>
           <p:cNvPicPr>
             <a:picLocks noChangeAspect="1"/>
           </p:cNvPicPr>
           <p:nvPr/>
         </p:nvPicPr>
         <p:blipFill>
-          <a:blip r:embed="rId1"/>
+          <a:blip r:embed="rId3"/>
           <a:stretch>
             <a:fillRect/>
           </a:stretch>
@@ -10157,7 +10192,7 @@
           <a:bodyPr wrap="square" lIns="0" tIns="0" rIns="0" bIns="0" rtlCol="0" anchor="ctr"/>
           <a:lstStyle/>
           <a:p>
-            <a:pPr indent="0" marL="0">
+            <a:pPr marL="0" indent="0">
               <a:buNone/>
             </a:pPr>
             <a:r>
@@ -10196,7 +10231,7 @@
           <a:bodyPr wrap="square" lIns="0" tIns="0" rIns="0" bIns="0" rtlCol="0" anchor="ctr"/>
           <a:lstStyle/>
           <a:p>
-            <a:pPr indent="0" marL="0">
+            <a:pPr marL="0" indent="0">
               <a:lnSpc>
                 <a:spcPct val="130000"/>
               </a:lnSpc>
@@ -10216,7 +10251,7 @@
             <a:endParaRPr lang="en-US" sz="1100" dirty="0"/>
           </a:p>
           <a:p>
-            <a:pPr indent="0" marL="0">
+            <a:pPr marL="0" indent="0">
               <a:lnSpc>
                 <a:spcPct val="130000"/>
               </a:lnSpc>
@@ -10253,6 +10288,7 @@
         <a:solidFill>
           <a:srgbClr val="FAF9F7"/>
         </a:solidFill>
+        <a:effectLst/>
       </p:bgPr>
     </p:bg>
     <p:spTree>
@@ -10288,6 +10324,13 @@
           </a:solidFill>
           <a:ln/>
         </p:spPr>
+        <p:txBody>
+          <a:bodyPr/>
+          <a:lstStyle/>
+          <a:p>
+            <a:endParaRPr lang="en-US"/>
+          </a:p>
+        </p:txBody>
       </p:sp>
       <p:sp>
         <p:nvSpPr>
@@ -10308,6 +10351,13 @@
           </a:solidFill>
           <a:ln/>
         </p:spPr>
+        <p:txBody>
+          <a:bodyPr/>
+          <a:lstStyle/>
+          <a:p>
+            <a:endParaRPr lang="en-US"/>
+          </a:p>
+        </p:txBody>
       </p:sp>
       <p:sp>
         <p:nvSpPr>
@@ -10330,7 +10380,7 @@
           <a:bodyPr wrap="square" rtlCol="0" anchor="ctr"/>
           <a:lstStyle/>
           <a:p>
-            <a:pPr algn="ctr" indent="0" marL="0">
+            <a:pPr marL="0" indent="0" algn="ctr">
               <a:buNone/>
             </a:pPr>
             <a:r>
@@ -10342,7 +10392,7 @@
                 <a:ea typeface="Open Sans" pitchFamily="34" charset="-122"/>
                 <a:cs typeface="Open Sans" pitchFamily="34" charset="-120"/>
               </a:rPr>
-              <a:t>BUS-314  |  Appendix: GitHub &amp; AI Setup Guide  |  Shidler College of Business</a:t>
+              <a:t>Stauffer  |  Appendix: GitHub &amp; AI Setup Guide  |  Shidler College of Business</a:t>
             </a:r>
             <a:endParaRPr lang="en-US" sz="900" dirty="0"/>
           </a:p>
@@ -10360,15 +10410,20 @@
             <a:ext cx="1179576" cy="274320"/>
           </a:xfrm>
           <a:prstGeom prst="rect">
-            <a:avLst>
-              <a:gd name="adj" fmla="val 6667"/>
-            </a:avLst>
+            <a:avLst/>
           </a:prstGeom>
           <a:solidFill>
             <a:srgbClr val="36454F"/>
           </a:solidFill>
           <a:ln/>
         </p:spPr>
+        <p:txBody>
+          <a:bodyPr/>
+          <a:lstStyle/>
+          <a:p>
+            <a:endParaRPr lang="en-US"/>
+          </a:p>
+        </p:txBody>
       </p:sp>
       <p:sp>
         <p:nvSpPr>
@@ -10391,11 +10446,11 @@
           <a:bodyPr wrap="square" lIns="0" tIns="0" rIns="0" bIns="0" rtlCol="0" anchor="ctr"/>
           <a:lstStyle/>
           <a:p>
-            <a:pPr algn="ctr" indent="0" marL="0">
-              <a:buNone/>
-            </a:pPr>
-            <a:r>
-              <a:rPr lang="en-US" sz="900" b="1" spc="300" kern="0" dirty="0">
+            <a:pPr marL="0" indent="0" algn="ctr">
+              <a:buNone/>
+            </a:pPr>
+            <a:r>
+              <a:rPr lang="en-US" sz="900" b="1" kern="0" spc="300" dirty="0">
                 <a:solidFill>
                   <a:srgbClr val="B8975C"/>
                 </a:solidFill>
@@ -10430,7 +10485,7 @@
           <a:bodyPr wrap="square" lIns="0" tIns="0" rIns="0" bIns="0" rtlCol="0" anchor="ctr"/>
           <a:lstStyle/>
           <a:p>
-            <a:pPr indent="0" marL="0">
+            <a:pPr marL="0" indent="0">
               <a:buNone/>
             </a:pPr>
             <a:r>
@@ -10469,7 +10524,7 @@
           <a:bodyPr wrap="square" lIns="0" tIns="0" rIns="0" bIns="0" rtlCol="0" anchor="ctr"/>
           <a:lstStyle/>
           <a:p>
-            <a:pPr indent="0" marL="0">
+            <a:pPr marL="0" indent="0">
               <a:buNone/>
             </a:pPr>
             <a:r>
@@ -10498,7 +10553,7 @@
             <a:off x="731520" y="1645920"/>
             <a:ext cx="320040" cy="320040"/>
           </a:xfrm>
-          <a:prstGeom prst="oval">
+          <a:prstGeom prst="line">
             <a:avLst/>
           </a:prstGeom>
           <a:solidFill>
@@ -10506,6 +10561,13 @@
           </a:solidFill>
           <a:ln/>
         </p:spPr>
+        <p:txBody>
+          <a:bodyPr/>
+          <a:lstStyle/>
+          <a:p>
+            <a:endParaRPr lang="en-US"/>
+          </a:p>
+        </p:txBody>
       </p:sp>
       <p:sp>
         <p:nvSpPr>
@@ -10528,7 +10590,7 @@
           <a:bodyPr wrap="square" lIns="0" tIns="0" rIns="0" bIns="0" rtlCol="0" anchor="ctr"/>
           <a:lstStyle/>
           <a:p>
-            <a:pPr algn="ctr" indent="0" marL="0">
+            <a:pPr marL="0" indent="0" algn="ctr">
               <a:buNone/>
             </a:pPr>
             <a:r>
@@ -10567,7 +10629,7 @@
           <a:bodyPr wrap="square" lIns="0" tIns="0" rIns="0" bIns="0" rtlCol="0" anchor="ctr"/>
           <a:lstStyle/>
           <a:p>
-            <a:pPr indent="0" marL="0">
+            <a:pPr marL="0" indent="0">
               <a:buNone/>
             </a:pPr>
             <a:r>
@@ -10606,7 +10668,7 @@
           <a:bodyPr wrap="square" lIns="0" tIns="0" rIns="0" bIns="0" rtlCol="0" anchor="ctr"/>
           <a:lstStyle/>
           <a:p>
-            <a:pPr indent="0" marL="0">
+            <a:pPr marL="0" indent="0">
               <a:buNone/>
             </a:pPr>
             <a:r>
@@ -10635,7 +10697,7 @@
             <a:off x="731520" y="2331720"/>
             <a:ext cx="320040" cy="320040"/>
           </a:xfrm>
-          <a:prstGeom prst="oval">
+          <a:prstGeom prst="line">
             <a:avLst/>
           </a:prstGeom>
           <a:solidFill>
@@ -10643,6 +10705,13 @@
           </a:solidFill>
           <a:ln/>
         </p:spPr>
+        <p:txBody>
+          <a:bodyPr/>
+          <a:lstStyle/>
+          <a:p>
+            <a:endParaRPr lang="en-US"/>
+          </a:p>
+        </p:txBody>
       </p:sp>
       <p:sp>
         <p:nvSpPr>
@@ -10665,7 +10734,7 @@
           <a:bodyPr wrap="square" lIns="0" tIns="0" rIns="0" bIns="0" rtlCol="0" anchor="ctr"/>
           <a:lstStyle/>
           <a:p>
-            <a:pPr algn="ctr" indent="0" marL="0">
+            <a:pPr marL="0" indent="0" algn="ctr">
               <a:buNone/>
             </a:pPr>
             <a:r>
@@ -10704,7 +10773,7 @@
           <a:bodyPr wrap="square" lIns="0" tIns="0" rIns="0" bIns="0" rtlCol="0" anchor="ctr"/>
           <a:lstStyle/>
           <a:p>
-            <a:pPr indent="0" marL="0">
+            <a:pPr marL="0" indent="0">
               <a:buNone/>
             </a:pPr>
             <a:r>
@@ -10743,7 +10812,7 @@
           <a:bodyPr wrap="square" lIns="0" tIns="0" rIns="0" bIns="0" rtlCol="0" anchor="ctr"/>
           <a:lstStyle/>
           <a:p>
-            <a:pPr indent="0" marL="0">
+            <a:pPr marL="0" indent="0">
               <a:buNone/>
             </a:pPr>
             <a:r>
@@ -10772,7 +10841,7 @@
             <a:off x="731520" y="3017520"/>
             <a:ext cx="320040" cy="320040"/>
           </a:xfrm>
-          <a:prstGeom prst="oval">
+          <a:prstGeom prst="line">
             <a:avLst/>
           </a:prstGeom>
           <a:solidFill>
@@ -10780,6 +10849,13 @@
           </a:solidFill>
           <a:ln/>
         </p:spPr>
+        <p:txBody>
+          <a:bodyPr/>
+          <a:lstStyle/>
+          <a:p>
+            <a:endParaRPr lang="en-US"/>
+          </a:p>
+        </p:txBody>
       </p:sp>
       <p:sp>
         <p:nvSpPr>
@@ -10802,7 +10878,7 @@
           <a:bodyPr wrap="square" lIns="0" tIns="0" rIns="0" bIns="0" rtlCol="0" anchor="ctr"/>
           <a:lstStyle/>
           <a:p>
-            <a:pPr algn="ctr" indent="0" marL="0">
+            <a:pPr marL="0" indent="0" algn="ctr">
               <a:buNone/>
             </a:pPr>
             <a:r>
@@ -10841,7 +10917,7 @@
           <a:bodyPr wrap="square" lIns="0" tIns="0" rIns="0" bIns="0" rtlCol="0" anchor="ctr"/>
           <a:lstStyle/>
           <a:p>
-            <a:pPr indent="0" marL="0">
+            <a:pPr marL="0" indent="0">
               <a:buNone/>
             </a:pPr>
             <a:r>
@@ -10882,7 +10958,7 @@
           <a:bodyPr wrap="square" lIns="0" tIns="101600" rIns="101600" bIns="0" rtlCol="0" anchor="ctr"/>
           <a:lstStyle/>
           <a:p>
-            <a:pPr indent="0" marL="0">
+            <a:pPr marL="0" indent="0">
               <a:buNone/>
             </a:pPr>
             <a:r>
@@ -10911,7 +10987,7 @@
             <a:off x="731520" y="3703320"/>
             <a:ext cx="320040" cy="320040"/>
           </a:xfrm>
-          <a:prstGeom prst="oval">
+          <a:prstGeom prst="line">
             <a:avLst/>
           </a:prstGeom>
           <a:solidFill>
@@ -10919,6 +10995,13 @@
           </a:solidFill>
           <a:ln/>
         </p:spPr>
+        <p:txBody>
+          <a:bodyPr/>
+          <a:lstStyle/>
+          <a:p>
+            <a:endParaRPr lang="en-US"/>
+          </a:p>
+        </p:txBody>
       </p:sp>
       <p:sp>
         <p:nvSpPr>
@@ -10941,7 +11024,7 @@
           <a:bodyPr wrap="square" lIns="0" tIns="0" rIns="0" bIns="0" rtlCol="0" anchor="ctr"/>
           <a:lstStyle/>
           <a:p>
-            <a:pPr algn="ctr" indent="0" marL="0">
+            <a:pPr marL="0" indent="0" algn="ctr">
               <a:buNone/>
             </a:pPr>
             <a:r>
@@ -10980,7 +11063,7 @@
           <a:bodyPr wrap="square" lIns="0" tIns="0" rIns="0" bIns="0" rtlCol="0" anchor="ctr"/>
           <a:lstStyle/>
           <a:p>
-            <a:pPr indent="0" marL="0">
+            <a:pPr marL="0" indent="0">
               <a:buNone/>
             </a:pPr>
             <a:r>
@@ -11019,7 +11102,7 @@
           <a:bodyPr wrap="square" lIns="0" tIns="0" rIns="0" bIns="0" rtlCol="0" anchor="ctr"/>
           <a:lstStyle/>
           <a:p>
-            <a:pPr indent="0" marL="0">
+            <a:pPr marL="0" indent="0">
               <a:buNone/>
             </a:pPr>
             <a:r>
@@ -11049,26 +11132,31 @@
             <a:ext cx="7680960" cy="411480"/>
           </a:xfrm>
           <a:prstGeom prst="rect">
-            <a:avLst>
-              <a:gd name="adj" fmla="val 8889"/>
-            </a:avLst>
+            <a:avLst/>
           </a:prstGeom>
           <a:solidFill>
             <a:srgbClr val="EBF5EE"/>
           </a:solidFill>
           <a:ln/>
         </p:spPr>
+        <p:txBody>
+          <a:bodyPr/>
+          <a:lstStyle/>
+          <a:p>
+            <a:endParaRPr lang="en-US"/>
+          </a:p>
+        </p:txBody>
       </p:sp>
       <p:pic>
         <p:nvPicPr>
-          <p:cNvPr id="26" name="Image 0" descr="preencoded.png">    </p:cNvPr>
+          <p:cNvPr id="26" name="Image 0" descr="preencoded.png"/>
           <p:cNvPicPr>
             <a:picLocks noChangeAspect="1"/>
           </p:cNvPicPr>
           <p:nvPr/>
         </p:nvPicPr>
         <p:blipFill>
-          <a:blip r:embed="rId1"/>
+          <a:blip r:embed="rId3"/>
           <a:stretch>
             <a:fillRect/>
           </a:stretch>
@@ -11104,7 +11192,7 @@
           <a:bodyPr wrap="square" lIns="0" tIns="0" rIns="0" bIns="0" rtlCol="0" anchor="ctr"/>
           <a:lstStyle/>
           <a:p>
-            <a:pPr indent="0" marL="0">
+            <a:pPr marL="0" indent="0">
               <a:buNone/>
             </a:pPr>
             <a:r>
@@ -11138,6 +11226,7 @@
         <a:solidFill>
           <a:srgbClr val="FAF9F7"/>
         </a:solidFill>
+        <a:effectLst/>
       </p:bgPr>
     </p:bg>
     <p:spTree>
@@ -11173,6 +11262,13 @@
           </a:solidFill>
           <a:ln/>
         </p:spPr>
+        <p:txBody>
+          <a:bodyPr/>
+          <a:lstStyle/>
+          <a:p>
+            <a:endParaRPr lang="en-US"/>
+          </a:p>
+        </p:txBody>
       </p:sp>
       <p:sp>
         <p:nvSpPr>
@@ -11193,6 +11289,13 @@
           </a:solidFill>
           <a:ln/>
         </p:spPr>
+        <p:txBody>
+          <a:bodyPr/>
+          <a:lstStyle/>
+          <a:p>
+            <a:endParaRPr lang="en-US"/>
+          </a:p>
+        </p:txBody>
       </p:sp>
       <p:sp>
         <p:nvSpPr>
@@ -11215,7 +11318,7 @@
           <a:bodyPr wrap="square" rtlCol="0" anchor="ctr"/>
           <a:lstStyle/>
           <a:p>
-            <a:pPr algn="ctr" indent="0" marL="0">
+            <a:pPr marL="0" indent="0" algn="ctr">
               <a:buNone/>
             </a:pPr>
             <a:r>
@@ -11227,7 +11330,7 @@
                 <a:ea typeface="Open Sans" pitchFamily="34" charset="-122"/>
                 <a:cs typeface="Open Sans" pitchFamily="34" charset="-120"/>
               </a:rPr>
-              <a:t>BUS-314  |  Appendix: GitHub &amp; AI Setup Guide  |  Shidler College of Business</a:t>
+              <a:t>Stauffer  |  Appendix: GitHub &amp; AI Setup Guide  |  Shidler College of Business</a:t>
             </a:r>
             <a:endParaRPr lang="en-US" sz="900" dirty="0"/>
           </a:p>
@@ -11245,15 +11348,20 @@
             <a:ext cx="1179576" cy="274320"/>
           </a:xfrm>
           <a:prstGeom prst="rect">
-            <a:avLst>
-              <a:gd name="adj" fmla="val 6667"/>
-            </a:avLst>
+            <a:avLst/>
           </a:prstGeom>
           <a:solidFill>
             <a:srgbClr val="36454F"/>
           </a:solidFill>
           <a:ln/>
         </p:spPr>
+        <p:txBody>
+          <a:bodyPr/>
+          <a:lstStyle/>
+          <a:p>
+            <a:endParaRPr lang="en-US"/>
+          </a:p>
+        </p:txBody>
       </p:sp>
       <p:sp>
         <p:nvSpPr>
@@ -11276,11 +11384,11 @@
           <a:bodyPr wrap="square" lIns="0" tIns="0" rIns="0" bIns="0" rtlCol="0" anchor="ctr"/>
           <a:lstStyle/>
           <a:p>
-            <a:pPr algn="ctr" indent="0" marL="0">
-              <a:buNone/>
-            </a:pPr>
-            <a:r>
-              <a:rPr lang="en-US" sz="900" b="1" spc="300" kern="0" dirty="0">
+            <a:pPr marL="0" indent="0" algn="ctr">
+              <a:buNone/>
+            </a:pPr>
+            <a:r>
+              <a:rPr lang="en-US" sz="900" b="1" kern="0" spc="300" dirty="0">
                 <a:solidFill>
                   <a:srgbClr val="B8975C"/>
                 </a:solidFill>
@@ -11315,7 +11423,7 @@
           <a:bodyPr wrap="square" lIns="0" tIns="0" rIns="0" bIns="0" rtlCol="0" anchor="ctr"/>
           <a:lstStyle/>
           <a:p>
-            <a:pPr indent="0" marL="0">
+            <a:pPr marL="0" indent="0">
               <a:buNone/>
             </a:pPr>
             <a:r>
@@ -11354,7 +11462,7 @@
           <a:bodyPr wrap="square" lIns="0" tIns="0" rIns="0" bIns="0" rtlCol="0" anchor="ctr"/>
           <a:lstStyle/>
           <a:p>
-            <a:pPr indent="0" marL="0">
+            <a:pPr marL="0" indent="0">
               <a:buNone/>
             </a:pPr>
             <a:r>
@@ -11391,13 +11499,20 @@
           </a:solidFill>
           <a:ln/>
           <a:effectLst>
-            <a:outerShdw sx="100000" sy="100000" kx="0" ky="0" algn="bl" rotWithShape="0" blurRad="50800" dist="25400" dir="8100000">
+            <a:outerShdw blurRad="50800" dist="25400" dir="8100000" algn="bl" rotWithShape="0">
               <a:srgbClr val="000000">
                 <a:alpha val="6000"/>
               </a:srgbClr>
             </a:outerShdw>
           </a:effectLst>
         </p:spPr>
+        <p:txBody>
+          <a:bodyPr/>
+          <a:lstStyle/>
+          <a:p>
+            <a:endParaRPr lang="en-US"/>
+          </a:p>
+        </p:txBody>
       </p:sp>
       <p:sp>
         <p:nvSpPr>
@@ -11410,7 +11525,7 @@
             <a:off x="1691640" y="1691640"/>
             <a:ext cx="365760" cy="365760"/>
           </a:xfrm>
-          <a:prstGeom prst="oval">
+          <a:prstGeom prst="line">
             <a:avLst/>
           </a:prstGeom>
           <a:solidFill>
@@ -11418,6 +11533,13 @@
           </a:solidFill>
           <a:ln/>
         </p:spPr>
+        <p:txBody>
+          <a:bodyPr/>
+          <a:lstStyle/>
+          <a:p>
+            <a:endParaRPr lang="en-US"/>
+          </a:p>
+        </p:txBody>
       </p:sp>
       <p:sp>
         <p:nvSpPr>
@@ -11440,7 +11562,7 @@
           <a:bodyPr wrap="square" lIns="0" tIns="0" rIns="0" bIns="0" rtlCol="0" anchor="ctr"/>
           <a:lstStyle/>
           <a:p>
-            <a:pPr algn="ctr" indent="0" marL="0">
+            <a:pPr marL="0" indent="0" algn="ctr">
               <a:buNone/>
             </a:pPr>
             <a:r>
@@ -11479,7 +11601,7 @@
           <a:bodyPr wrap="square" lIns="0" tIns="0" rIns="0" bIns="0" rtlCol="0" anchor="ctr"/>
           <a:lstStyle/>
           <a:p>
-            <a:pPr algn="ctr" indent="0" marL="0">
+            <a:pPr marL="0" indent="0" algn="ctr">
               <a:buNone/>
             </a:pPr>
             <a:r>
@@ -11509,9 +11631,7 @@
             <a:ext cx="2194560" cy="365760"/>
           </a:xfrm>
           <a:prstGeom prst="rect">
-            <a:avLst>
-              <a:gd name="adj" fmla="val 7500"/>
-            </a:avLst>
+            <a:avLst/>
           </a:prstGeom>
           <a:solidFill>
             <a:srgbClr val="36454F"/>
@@ -11522,7 +11642,7 @@
           <a:bodyPr wrap="square" lIns="0" tIns="0" rIns="0" bIns="0" rtlCol="0" anchor="ctr"/>
           <a:lstStyle/>
           <a:p>
-            <a:pPr algn="ctr" indent="0" marL="0">
+            <a:pPr marL="0" indent="0" algn="ctr">
               <a:buNone/>
             </a:pPr>
             <a:r>
@@ -11561,7 +11681,7 @@
           <a:bodyPr wrap="square" lIns="0" tIns="0" rIns="0" bIns="0" rtlCol="0" anchor="t"/>
           <a:lstStyle/>
           <a:p>
-            <a:pPr indent="0" marL="0">
+            <a:pPr marL="0" indent="0">
               <a:lnSpc>
                 <a:spcPct val="140000"/>
               </a:lnSpc>
@@ -11601,13 +11721,20 @@
           </a:solidFill>
           <a:ln/>
           <a:effectLst>
-            <a:outerShdw sx="100000" sy="100000" kx="0" ky="0" algn="bl" rotWithShape="0" blurRad="50800" dist="25400" dir="8100000">
+            <a:outerShdw blurRad="50800" dist="25400" dir="8100000" algn="bl" rotWithShape="0">
               <a:srgbClr val="000000">
                 <a:alpha val="6000"/>
               </a:srgbClr>
             </a:outerShdw>
           </a:effectLst>
         </p:spPr>
+        <p:txBody>
+          <a:bodyPr/>
+          <a:lstStyle/>
+          <a:p>
+            <a:endParaRPr lang="en-US"/>
+          </a:p>
+        </p:txBody>
       </p:sp>
       <p:sp>
         <p:nvSpPr>
@@ -11620,7 +11747,7 @@
             <a:off x="4434840" y="1691640"/>
             <a:ext cx="365760" cy="365760"/>
           </a:xfrm>
-          <a:prstGeom prst="oval">
+          <a:prstGeom prst="line">
             <a:avLst/>
           </a:prstGeom>
           <a:solidFill>
@@ -11628,6 +11755,13 @@
           </a:solidFill>
           <a:ln/>
         </p:spPr>
+        <p:txBody>
+          <a:bodyPr/>
+          <a:lstStyle/>
+          <a:p>
+            <a:endParaRPr lang="en-US"/>
+          </a:p>
+        </p:txBody>
       </p:sp>
       <p:sp>
         <p:nvSpPr>
@@ -11650,7 +11784,7 @@
           <a:bodyPr wrap="square" lIns="0" tIns="0" rIns="0" bIns="0" rtlCol="0" anchor="ctr"/>
           <a:lstStyle/>
           <a:p>
-            <a:pPr algn="ctr" indent="0" marL="0">
+            <a:pPr marL="0" indent="0" algn="ctr">
               <a:buNone/>
             </a:pPr>
             <a:r>
@@ -11689,7 +11823,7 @@
           <a:bodyPr wrap="square" lIns="0" tIns="0" rIns="0" bIns="0" rtlCol="0" anchor="ctr"/>
           <a:lstStyle/>
           <a:p>
-            <a:pPr algn="ctr" indent="0" marL="0">
+            <a:pPr marL="0" indent="0" algn="ctr">
               <a:buNone/>
             </a:pPr>
             <a:r>
@@ -11719,9 +11853,7 @@
             <a:ext cx="2194560" cy="365760"/>
           </a:xfrm>
           <a:prstGeom prst="rect">
-            <a:avLst>
-              <a:gd name="adj" fmla="val 7500"/>
-            </a:avLst>
+            <a:avLst/>
           </a:prstGeom>
           <a:solidFill>
             <a:srgbClr val="36454F"/>
@@ -11732,7 +11864,7 @@
           <a:bodyPr wrap="square" lIns="0" tIns="0" rIns="0" bIns="0" rtlCol="0" anchor="ctr"/>
           <a:lstStyle/>
           <a:p>
-            <a:pPr algn="ctr" indent="0" marL="0">
+            <a:pPr marL="0" indent="0" algn="ctr">
               <a:buNone/>
             </a:pPr>
             <a:r>
@@ -11771,7 +11903,7 @@
           <a:bodyPr wrap="square" lIns="0" tIns="0" rIns="0" bIns="0" rtlCol="0" anchor="t"/>
           <a:lstStyle/>
           <a:p>
-            <a:pPr indent="0" marL="0">
+            <a:pPr marL="0" indent="0">
               <a:lnSpc>
                 <a:spcPct val="140000"/>
               </a:lnSpc>
@@ -11811,13 +11943,20 @@
           </a:solidFill>
           <a:ln/>
           <a:effectLst>
-            <a:outerShdw sx="100000" sy="100000" kx="0" ky="0" algn="bl" rotWithShape="0" blurRad="50800" dist="25400" dir="8100000">
+            <a:outerShdw blurRad="50800" dist="25400" dir="8100000" algn="bl" rotWithShape="0">
               <a:srgbClr val="000000">
                 <a:alpha val="6000"/>
               </a:srgbClr>
             </a:outerShdw>
           </a:effectLst>
         </p:spPr>
+        <p:txBody>
+          <a:bodyPr/>
+          <a:lstStyle/>
+          <a:p>
+            <a:endParaRPr lang="en-US"/>
+          </a:p>
+        </p:txBody>
       </p:sp>
       <p:sp>
         <p:nvSpPr>
@@ -11830,7 +11969,7 @@
             <a:off x="7178040" y="1691640"/>
             <a:ext cx="365760" cy="365760"/>
           </a:xfrm>
-          <a:prstGeom prst="oval">
+          <a:prstGeom prst="line">
             <a:avLst/>
           </a:prstGeom>
           <a:solidFill>
@@ -11838,6 +11977,13 @@
           </a:solidFill>
           <a:ln/>
         </p:spPr>
+        <p:txBody>
+          <a:bodyPr/>
+          <a:lstStyle/>
+          <a:p>
+            <a:endParaRPr lang="en-US"/>
+          </a:p>
+        </p:txBody>
       </p:sp>
       <p:sp>
         <p:nvSpPr>
@@ -11860,7 +12006,7 @@
           <a:bodyPr wrap="square" lIns="0" tIns="0" rIns="0" bIns="0" rtlCol="0" anchor="ctr"/>
           <a:lstStyle/>
           <a:p>
-            <a:pPr algn="ctr" indent="0" marL="0">
+            <a:pPr marL="0" indent="0" algn="ctr">
               <a:buNone/>
             </a:pPr>
             <a:r>
@@ -11899,7 +12045,7 @@
           <a:bodyPr wrap="square" lIns="0" tIns="0" rIns="0" bIns="0" rtlCol="0" anchor="ctr"/>
           <a:lstStyle/>
           <a:p>
-            <a:pPr algn="ctr" indent="0" marL="0">
+            <a:pPr marL="0" indent="0" algn="ctr">
               <a:buNone/>
             </a:pPr>
             <a:r>
@@ -11929,9 +12075,7 @@
             <a:ext cx="2194560" cy="365760"/>
           </a:xfrm>
           <a:prstGeom prst="rect">
-            <a:avLst>
-              <a:gd name="adj" fmla="val 7500"/>
-            </a:avLst>
+            <a:avLst/>
           </a:prstGeom>
           <a:solidFill>
             <a:srgbClr val="36454F"/>
@@ -11942,7 +12086,7 @@
           <a:bodyPr wrap="square" lIns="0" tIns="0" rIns="0" bIns="0" rtlCol="0" anchor="ctr"/>
           <a:lstStyle/>
           <a:p>
-            <a:pPr algn="ctr" indent="0" marL="0">
+            <a:pPr marL="0" indent="0" algn="ctr">
               <a:buNone/>
             </a:pPr>
             <a:r>
@@ -11981,7 +12125,7 @@
           <a:bodyPr wrap="square" lIns="0" tIns="0" rIns="0" bIns="0" rtlCol="0" anchor="t"/>
           <a:lstStyle/>
           <a:p>
-            <a:pPr indent="0" marL="0">
+            <a:pPr marL="0" indent="0">
               <a:lnSpc>
                 <a:spcPct val="140000"/>
               </a:lnSpc>
@@ -12021,6 +12165,13 @@
           </a:solidFill>
           <a:ln/>
         </p:spPr>
+        <p:txBody>
+          <a:bodyPr/>
+          <a:lstStyle/>
+          <a:p>
+            <a:endParaRPr lang="en-US"/>
+          </a:p>
+        </p:txBody>
       </p:sp>
     </p:spTree>
   </p:cSld>
@@ -12038,6 +12189,7 @@
         <a:solidFill>
           <a:srgbClr val="FAF9F7"/>
         </a:solidFill>
+        <a:effectLst/>
       </p:bgPr>
     </p:bg>
     <p:spTree>
@@ -12073,6 +12225,13 @@
           </a:solidFill>
           <a:ln/>
         </p:spPr>
+        <p:txBody>
+          <a:bodyPr/>
+          <a:lstStyle/>
+          <a:p>
+            <a:endParaRPr lang="en-US"/>
+          </a:p>
+        </p:txBody>
       </p:sp>
       <p:sp>
         <p:nvSpPr>
@@ -12093,6 +12252,13 @@
           </a:solidFill>
           <a:ln/>
         </p:spPr>
+        <p:txBody>
+          <a:bodyPr/>
+          <a:lstStyle/>
+          <a:p>
+            <a:endParaRPr lang="en-US"/>
+          </a:p>
+        </p:txBody>
       </p:sp>
       <p:sp>
         <p:nvSpPr>
@@ -12115,7 +12281,7 @@
           <a:bodyPr wrap="square" rtlCol="0" anchor="ctr"/>
           <a:lstStyle/>
           <a:p>
-            <a:pPr algn="ctr" indent="0" marL="0">
+            <a:pPr marL="0" indent="0" algn="ctr">
               <a:buNone/>
             </a:pPr>
             <a:r>
@@ -12127,7 +12293,7 @@
                 <a:ea typeface="Open Sans" pitchFamily="34" charset="-122"/>
                 <a:cs typeface="Open Sans" pitchFamily="34" charset="-120"/>
               </a:rPr>
-              <a:t>BUS-314  |  Appendix: GitHub &amp; AI Setup Guide  |  Shidler College of Business</a:t>
+              <a:t>Stauffer  |  Appendix: GitHub &amp; AI Setup Guide  |  Shidler College of Business</a:t>
             </a:r>
             <a:endParaRPr lang="en-US" sz="900" dirty="0"/>
           </a:p>
@@ -12154,7 +12320,7 @@
           <a:bodyPr wrap="square" lIns="0" tIns="0" rIns="0" bIns="0" rtlCol="0" anchor="ctr"/>
           <a:lstStyle/>
           <a:p>
-            <a:pPr indent="0" marL="0">
+            <a:pPr marL="0" indent="0">
               <a:buNone/>
             </a:pPr>
             <a:r>
@@ -12193,7 +12359,7 @@
           <a:bodyPr wrap="square" lIns="0" tIns="0" rIns="0" bIns="0" rtlCol="0" anchor="ctr"/>
           <a:lstStyle/>
           <a:p>
-            <a:pPr indent="0" marL="0">
+            <a:pPr marL="0" indent="0">
               <a:lnSpc>
                 <a:spcPct val="130000"/>
               </a:lnSpc>
@@ -12233,13 +12399,20 @@
           </a:solidFill>
           <a:ln/>
           <a:effectLst>
-            <a:outerShdw sx="100000" sy="100000" kx="0" ky="0" algn="bl" rotWithShape="0" blurRad="50800" dist="25400" dir="8100000">
+            <a:outerShdw blurRad="50800" dist="25400" dir="8100000" algn="bl" rotWithShape="0">
               <a:srgbClr val="000000">
                 <a:alpha val="6000"/>
               </a:srgbClr>
             </a:outerShdw>
           </a:effectLst>
         </p:spPr>
+        <p:txBody>
+          <a:bodyPr/>
+          <a:lstStyle/>
+          <a:p>
+            <a:endParaRPr lang="en-US"/>
+          </a:p>
+        </p:txBody>
       </p:sp>
       <p:sp>
         <p:nvSpPr>
@@ -12262,7 +12435,7 @@
           <a:bodyPr wrap="square" lIns="0" tIns="0" rIns="0" bIns="0" rtlCol="0" anchor="ctr"/>
           <a:lstStyle/>
           <a:p>
-            <a:pPr indent="0" marL="0">
+            <a:pPr marL="0" indent="0">
               <a:buNone/>
             </a:pPr>
             <a:r>
@@ -12291,7 +12464,7 @@
             <a:off x="914400" y="2057400"/>
             <a:ext cx="274320" cy="274320"/>
           </a:xfrm>
-          <a:prstGeom prst="oval">
+          <a:prstGeom prst="line">
             <a:avLst/>
           </a:prstGeom>
           <a:solidFill>
@@ -12299,6 +12472,13 @@
           </a:solidFill>
           <a:ln/>
         </p:spPr>
+        <p:txBody>
+          <a:bodyPr/>
+          <a:lstStyle/>
+          <a:p>
+            <a:endParaRPr lang="en-US"/>
+          </a:p>
+        </p:txBody>
       </p:sp>
       <p:sp>
         <p:nvSpPr>
@@ -12321,7 +12501,7 @@
           <a:bodyPr wrap="square" lIns="0" tIns="0" rIns="0" bIns="0" rtlCol="0" anchor="ctr"/>
           <a:lstStyle/>
           <a:p>
-            <a:pPr algn="ctr" indent="0" marL="0">
+            <a:pPr marL="0" indent="0" algn="ctr">
               <a:buNone/>
             </a:pPr>
             <a:r>
@@ -12360,7 +12540,7 @@
           <a:bodyPr wrap="square" lIns="0" tIns="0" rIns="0" bIns="0" rtlCol="0" anchor="ctr"/>
           <a:lstStyle/>
           <a:p>
-            <a:pPr indent="0" marL="0">
+            <a:pPr marL="0" indent="0">
               <a:buNone/>
             </a:pPr>
             <a:r>
@@ -12389,7 +12569,7 @@
             <a:off x="914400" y="2560320"/>
             <a:ext cx="274320" cy="274320"/>
           </a:xfrm>
-          <a:prstGeom prst="oval">
+          <a:prstGeom prst="line">
             <a:avLst/>
           </a:prstGeom>
           <a:solidFill>
@@ -12397,6 +12577,13 @@
           </a:solidFill>
           <a:ln/>
         </p:spPr>
+        <p:txBody>
+          <a:bodyPr/>
+          <a:lstStyle/>
+          <a:p>
+            <a:endParaRPr lang="en-US"/>
+          </a:p>
+        </p:txBody>
       </p:sp>
       <p:sp>
         <p:nvSpPr>
@@ -12419,7 +12606,7 @@
           <a:bodyPr wrap="square" lIns="0" tIns="0" rIns="0" bIns="0" rtlCol="0" anchor="ctr"/>
           <a:lstStyle/>
           <a:p>
-            <a:pPr algn="ctr" indent="0" marL="0">
+            <a:pPr marL="0" indent="0" algn="ctr">
               <a:buNone/>
             </a:pPr>
             <a:r>
@@ -12458,7 +12645,7 @@
           <a:bodyPr wrap="square" lIns="0" tIns="0" rIns="0" bIns="0" rtlCol="0" anchor="ctr"/>
           <a:lstStyle/>
           <a:p>
-            <a:pPr indent="0" marL="0">
+            <a:pPr marL="0" indent="0">
               <a:buNone/>
             </a:pPr>
             <a:r>
@@ -12487,7 +12674,7 @@
             <a:off x="914400" y="3063240"/>
             <a:ext cx="274320" cy="274320"/>
           </a:xfrm>
-          <a:prstGeom prst="oval">
+          <a:prstGeom prst="line">
             <a:avLst/>
           </a:prstGeom>
           <a:solidFill>
@@ -12495,6 +12682,13 @@
           </a:solidFill>
           <a:ln/>
         </p:spPr>
+        <p:txBody>
+          <a:bodyPr/>
+          <a:lstStyle/>
+          <a:p>
+            <a:endParaRPr lang="en-US"/>
+          </a:p>
+        </p:txBody>
       </p:sp>
       <p:sp>
         <p:nvSpPr>
@@ -12517,7 +12711,7 @@
           <a:bodyPr wrap="square" lIns="0" tIns="0" rIns="0" bIns="0" rtlCol="0" anchor="ctr"/>
           <a:lstStyle/>
           <a:p>
-            <a:pPr algn="ctr" indent="0" marL="0">
+            <a:pPr marL="0" indent="0" algn="ctr">
               <a:buNone/>
             </a:pPr>
             <a:r>
@@ -12556,7 +12750,7 @@
           <a:bodyPr wrap="square" lIns="0" tIns="0" rIns="0" bIns="0" rtlCol="0" anchor="ctr"/>
           <a:lstStyle/>
           <a:p>
-            <a:pPr indent="0" marL="0">
+            <a:pPr marL="0" indent="0">
               <a:buNone/>
             </a:pPr>
             <a:r>
@@ -12585,7 +12779,7 @@
             <a:off x="914400" y="3566160"/>
             <a:ext cx="274320" cy="274320"/>
           </a:xfrm>
-          <a:prstGeom prst="oval">
+          <a:prstGeom prst="line">
             <a:avLst/>
           </a:prstGeom>
           <a:solidFill>
@@ -12593,6 +12787,13 @@
           </a:solidFill>
           <a:ln/>
         </p:spPr>
+        <p:txBody>
+          <a:bodyPr/>
+          <a:lstStyle/>
+          <a:p>
+            <a:endParaRPr lang="en-US"/>
+          </a:p>
+        </p:txBody>
       </p:sp>
       <p:sp>
         <p:nvSpPr>
@@ -12615,7 +12816,7 @@
           <a:bodyPr wrap="square" lIns="0" tIns="0" rIns="0" bIns="0" rtlCol="0" anchor="ctr"/>
           <a:lstStyle/>
           <a:p>
-            <a:pPr algn="ctr" indent="0" marL="0">
+            <a:pPr marL="0" indent="0" algn="ctr">
               <a:buNone/>
             </a:pPr>
             <a:r>
@@ -12654,7 +12855,7 @@
           <a:bodyPr wrap="square" lIns="0" tIns="0" rIns="0" bIns="0" rtlCol="0" anchor="ctr"/>
           <a:lstStyle/>
           <a:p>
-            <a:pPr indent="0" marL="0">
+            <a:pPr marL="0" indent="0">
               <a:buNone/>
             </a:pPr>
             <a:r>
@@ -12691,13 +12892,20 @@
           </a:solidFill>
           <a:ln/>
           <a:effectLst>
-            <a:outerShdw sx="100000" sy="100000" kx="0" ky="0" algn="bl" rotWithShape="0" blurRad="50800" dist="25400" dir="8100000">
+            <a:outerShdw blurRad="50800" dist="25400" dir="8100000" algn="bl" rotWithShape="0">
               <a:srgbClr val="000000">
                 <a:alpha val="6000"/>
               </a:srgbClr>
             </a:outerShdw>
           </a:effectLst>
         </p:spPr>
+        <p:txBody>
+          <a:bodyPr/>
+          <a:lstStyle/>
+          <a:p>
+            <a:endParaRPr lang="en-US"/>
+          </a:p>
+        </p:txBody>
       </p:sp>
       <p:sp>
         <p:nvSpPr>
@@ -12720,7 +12928,7 @@
           <a:bodyPr wrap="square" lIns="0" tIns="0" rIns="0" bIns="0" rtlCol="0" anchor="ctr"/>
           <a:lstStyle/>
           <a:p>
-            <a:pPr indent="0" marL="0">
+            <a:pPr marL="0" indent="0">
               <a:buNone/>
             </a:pPr>
             <a:r>
@@ -12749,7 +12957,7 @@
             <a:off x="5120640" y="2057400"/>
             <a:ext cx="274320" cy="274320"/>
           </a:xfrm>
-          <a:prstGeom prst="oval">
+          <a:prstGeom prst="line">
             <a:avLst/>
           </a:prstGeom>
           <a:solidFill>
@@ -12757,6 +12965,13 @@
           </a:solidFill>
           <a:ln/>
         </p:spPr>
+        <p:txBody>
+          <a:bodyPr/>
+          <a:lstStyle/>
+          <a:p>
+            <a:endParaRPr lang="en-US"/>
+          </a:p>
+        </p:txBody>
       </p:sp>
       <p:sp>
         <p:nvSpPr>
@@ -12779,7 +12994,7 @@
           <a:bodyPr wrap="square" lIns="0" tIns="0" rIns="0" bIns="0" rtlCol="0" anchor="ctr"/>
           <a:lstStyle/>
           <a:p>
-            <a:pPr algn="ctr" indent="0" marL="0">
+            <a:pPr marL="0" indent="0" algn="ctr">
               <a:buNone/>
             </a:pPr>
             <a:r>
@@ -12818,7 +13033,7 @@
           <a:bodyPr wrap="square" lIns="0" tIns="0" rIns="0" bIns="0" rtlCol="0" anchor="ctr"/>
           <a:lstStyle/>
           <a:p>
-            <a:pPr indent="0" marL="0">
+            <a:pPr marL="0" indent="0">
               <a:buNone/>
             </a:pPr>
             <a:r>
@@ -12829,9 +13044,6 @@
               </a:rPr>
               <a:t>Changes tab  </a:t>
             </a:r>
-            <a:pPr indent="0" marL="0">
-              <a:buNone/>
-            </a:pPr>
             <a:r>
               <a:rPr lang="en-US" sz="1100" dirty="0">
                 <a:solidFill>
@@ -12855,7 +13067,7 @@
             <a:off x="5120640" y="2560320"/>
             <a:ext cx="274320" cy="274320"/>
           </a:xfrm>
-          <a:prstGeom prst="oval">
+          <a:prstGeom prst="line">
             <a:avLst/>
           </a:prstGeom>
           <a:solidFill>
@@ -12863,6 +13075,13 @@
           </a:solidFill>
           <a:ln/>
         </p:spPr>
+        <p:txBody>
+          <a:bodyPr/>
+          <a:lstStyle/>
+          <a:p>
+            <a:endParaRPr lang="en-US"/>
+          </a:p>
+        </p:txBody>
       </p:sp>
       <p:sp>
         <p:nvSpPr>
@@ -12885,7 +13104,7 @@
           <a:bodyPr wrap="square" lIns="0" tIns="0" rIns="0" bIns="0" rtlCol="0" anchor="ctr"/>
           <a:lstStyle/>
           <a:p>
-            <a:pPr algn="ctr" indent="0" marL="0">
+            <a:pPr marL="0" indent="0" algn="ctr">
               <a:buNone/>
             </a:pPr>
             <a:r>
@@ -12924,7 +13143,7 @@
           <a:bodyPr wrap="square" lIns="0" tIns="0" rIns="0" bIns="0" rtlCol="0" anchor="ctr"/>
           <a:lstStyle/>
           <a:p>
-            <a:pPr indent="0" marL="0">
+            <a:pPr marL="0" indent="0">
               <a:buNone/>
             </a:pPr>
             <a:r>
@@ -12935,9 +13154,6 @@
               </a:rPr>
               <a:t>Summary box  </a:t>
             </a:r>
-            <a:pPr indent="0" marL="0">
-              <a:buNone/>
-            </a:pPr>
             <a:r>
               <a:rPr lang="en-US" sz="1100" dirty="0">
                 <a:solidFill>
@@ -12961,7 +13177,7 @@
             <a:off x="5120640" y="3063240"/>
             <a:ext cx="274320" cy="274320"/>
           </a:xfrm>
-          <a:prstGeom prst="oval">
+          <a:prstGeom prst="line">
             <a:avLst/>
           </a:prstGeom>
           <a:solidFill>
@@ -12969,6 +13185,13 @@
           </a:solidFill>
           <a:ln/>
         </p:spPr>
+        <p:txBody>
+          <a:bodyPr/>
+          <a:lstStyle/>
+          <a:p>
+            <a:endParaRPr lang="en-US"/>
+          </a:p>
+        </p:txBody>
       </p:sp>
       <p:sp>
         <p:nvSpPr>
@@ -12991,7 +13214,7 @@
           <a:bodyPr wrap="square" lIns="0" tIns="0" rIns="0" bIns="0" rtlCol="0" anchor="ctr"/>
           <a:lstStyle/>
           <a:p>
-            <a:pPr algn="ctr" indent="0" marL="0">
+            <a:pPr marL="0" indent="0" algn="ctr">
               <a:buNone/>
             </a:pPr>
             <a:r>
@@ -13030,7 +13253,7 @@
           <a:bodyPr wrap="square" lIns="0" tIns="0" rIns="0" bIns="0" rtlCol="0" anchor="ctr"/>
           <a:lstStyle/>
           <a:p>
-            <a:pPr indent="0" marL="0">
+            <a:pPr marL="0" indent="0">
               <a:buNone/>
             </a:pPr>
             <a:r>
@@ -13041,9 +13264,6 @@
               </a:rPr>
               <a:t>Commit button  </a:t>
             </a:r>
-            <a:pPr indent="0" marL="0">
-              <a:buNone/>
-            </a:pPr>
             <a:r>
               <a:rPr lang="en-US" sz="1100" dirty="0">
                 <a:solidFill>
@@ -13067,7 +13287,7 @@
             <a:off x="5120640" y="3566160"/>
             <a:ext cx="274320" cy="274320"/>
           </a:xfrm>
-          <a:prstGeom prst="oval">
+          <a:prstGeom prst="line">
             <a:avLst/>
           </a:prstGeom>
           <a:solidFill>
@@ -13075,6 +13295,13 @@
           </a:solidFill>
           <a:ln/>
         </p:spPr>
+        <p:txBody>
+          <a:bodyPr/>
+          <a:lstStyle/>
+          <a:p>
+            <a:endParaRPr lang="en-US"/>
+          </a:p>
+        </p:txBody>
       </p:sp>
       <p:sp>
         <p:nvSpPr>
@@ -13097,7 +13324,7 @@
           <a:bodyPr wrap="square" lIns="0" tIns="0" rIns="0" bIns="0" rtlCol="0" anchor="ctr"/>
           <a:lstStyle/>
           <a:p>
-            <a:pPr algn="ctr" indent="0" marL="0">
+            <a:pPr marL="0" indent="0" algn="ctr">
               <a:buNone/>
             </a:pPr>
             <a:r>
@@ -13136,7 +13363,7 @@
           <a:bodyPr wrap="square" lIns="0" tIns="0" rIns="0" bIns="0" rtlCol="0" anchor="ctr"/>
           <a:lstStyle/>
           <a:p>
-            <a:pPr indent="0" marL="0">
+            <a:pPr marL="0" indent="0">
               <a:buNone/>
             </a:pPr>
             <a:r>
@@ -13147,9 +13374,6 @@
               </a:rPr>
               <a:t>Push Origin  </a:t>
             </a:r>
-            <a:pPr indent="0" marL="0">
-              <a:buNone/>
-            </a:pPr>
             <a:r>
               <a:rPr lang="en-US" sz="1100" dirty="0">
                 <a:solidFill>
@@ -13178,6 +13402,7 @@
         <a:solidFill>
           <a:srgbClr val="FAF9F7"/>
         </a:solidFill>
+        <a:effectLst/>
       </p:bgPr>
     </p:bg>
     <p:spTree>
@@ -13213,6 +13438,13 @@
           </a:solidFill>
           <a:ln/>
         </p:spPr>
+        <p:txBody>
+          <a:bodyPr/>
+          <a:lstStyle/>
+          <a:p>
+            <a:endParaRPr lang="en-US"/>
+          </a:p>
+        </p:txBody>
       </p:sp>
       <p:sp>
         <p:nvSpPr>
@@ -13233,6 +13465,13 @@
           </a:solidFill>
           <a:ln/>
         </p:spPr>
+        <p:txBody>
+          <a:bodyPr/>
+          <a:lstStyle/>
+          <a:p>
+            <a:endParaRPr lang="en-US"/>
+          </a:p>
+        </p:txBody>
       </p:sp>
       <p:sp>
         <p:nvSpPr>
@@ -13255,7 +13494,7 @@
           <a:bodyPr wrap="square" rtlCol="0" anchor="ctr"/>
           <a:lstStyle/>
           <a:p>
-            <a:pPr algn="ctr" indent="0" marL="0">
+            <a:pPr marL="0" indent="0" algn="ctr">
               <a:buNone/>
             </a:pPr>
             <a:r>
@@ -13267,7 +13506,7 @@
                 <a:ea typeface="Open Sans" pitchFamily="34" charset="-122"/>
                 <a:cs typeface="Open Sans" pitchFamily="34" charset="-120"/>
               </a:rPr>
-              <a:t>BUS-314  |  Appendix: GitHub &amp; AI Setup Guide  |  Shidler College of Business</a:t>
+              <a:t>Stauffer  |  Appendix: GitHub &amp; AI Setup Guide  |  Shidler College of Business</a:t>
             </a:r>
             <a:endParaRPr lang="en-US" sz="900" dirty="0"/>
           </a:p>
@@ -13294,7 +13533,7 @@
           <a:bodyPr wrap="square" lIns="0" tIns="0" rIns="0" bIns="0" rtlCol="0" anchor="ctr"/>
           <a:lstStyle/>
           <a:p>
-            <a:pPr indent="0" marL="0">
+            <a:pPr marL="0" indent="0">
               <a:buNone/>
             </a:pPr>
             <a:r>
@@ -13333,7 +13572,7 @@
           <a:bodyPr wrap="square" lIns="0" tIns="0" rIns="0" bIns="0" rtlCol="0" anchor="ctr"/>
           <a:lstStyle/>
           <a:p>
-            <a:pPr indent="0" marL="0">
+            <a:pPr marL="0" indent="0">
               <a:buNone/>
             </a:pPr>
             <a:r>
@@ -13367,17 +13606,41 @@
         </p:nvGraphicFramePr>
         <p:xfrm>
           <a:off x="731520" y="1325880"/>
-          <a:ext cx="7680960" cy="914400"/>
+          <a:ext cx="7680960" cy="2194560"/>
         </p:xfrm>
         <a:graphic>
           <a:graphicData uri="http://schemas.openxmlformats.org/drawingml/2006/table">
             <a:tbl>
               <a:tblPr/>
               <a:tblGrid>
-                <a:gridCol w="731520"/>
-                <a:gridCol w="1645920"/>
-                <a:gridCol w="2743200"/>
-                <a:gridCol w="2560320"/>
+                <a:gridCol w="731520">
+                  <a:extLst>
+                    <a:ext uri="{9D8B030D-6E8A-4147-A177-3AD203B41FA5}">
+                      <a16:colId xmlns:a16="http://schemas.microsoft.com/office/drawing/2014/main" val="20000"/>
+                    </a:ext>
+                  </a:extLst>
+                </a:gridCol>
+                <a:gridCol w="1645920">
+                  <a:extLst>
+                    <a:ext uri="{9D8B030D-6E8A-4147-A177-3AD203B41FA5}">
+                      <a16:colId xmlns:a16="http://schemas.microsoft.com/office/drawing/2014/main" val="20001"/>
+                    </a:ext>
+                  </a:extLst>
+                </a:gridCol>
+                <a:gridCol w="2743200">
+                  <a:extLst>
+                    <a:ext uri="{9D8B030D-6E8A-4147-A177-3AD203B41FA5}">
+                      <a16:colId xmlns:a16="http://schemas.microsoft.com/office/drawing/2014/main" val="20002"/>
+                    </a:ext>
+                  </a:extLst>
+                </a:gridCol>
+                <a:gridCol w="2560320">
+                  <a:extLst>
+                    <a:ext uri="{9D8B030D-6E8A-4147-A177-3AD203B41FA5}">
+                      <a16:colId xmlns:a16="http://schemas.microsoft.com/office/drawing/2014/main" val="20003"/>
+                    </a:ext>
+                  </a:extLst>
+                </a:gridCol>
               </a:tblGrid>
               <a:tr h="365760">
                 <a:tc>
@@ -13385,7 +13648,7 @@
                     <a:bodyPr/>
                     <a:lstStyle/>
                     <a:p>
-                      <a:pPr algn="ctr" indent="0" marL="0">
+                      <a:pPr marL="0" indent="0" algn="ctr">
                         <a:buNone/>
                       </a:pPr>
                       <a:r>
@@ -13406,7 +13669,7 @@
                       </a:endParaRPr>
                     </a:p>
                   </a:txBody>
-                  <a:tcPr marL="91440" marR="91440" marT="45720" marB="45720">
+                  <a:tcPr>
                     <a:lnL w="6350" cap="flat" cmpd="sng" algn="ctr">
                       <a:solidFill>
                         <a:srgbClr val="C0C0C0"/>
@@ -13453,7 +13716,7 @@
                     <a:bodyPr/>
                     <a:lstStyle/>
                     <a:p>
-                      <a:pPr indent="0" marL="0">
+                      <a:pPr marL="0" indent="0">
                         <a:buNone/>
                       </a:pPr>
                       <a:r>
@@ -13474,7 +13737,7 @@
                       </a:endParaRPr>
                     </a:p>
                   </a:txBody>
-                  <a:tcPr marL="91440" marR="91440" marT="45720" marB="45720">
+                  <a:tcPr>
                     <a:lnL w="6350" cap="flat" cmpd="sng" algn="ctr">
                       <a:solidFill>
                         <a:srgbClr val="C0C0C0"/>
@@ -13521,7 +13784,7 @@
                     <a:bodyPr/>
                     <a:lstStyle/>
                     <a:p>
-                      <a:pPr indent="0" marL="0">
+                      <a:pPr marL="0" indent="0">
                         <a:buNone/>
                       </a:pPr>
                       <a:r>
@@ -13542,7 +13805,7 @@
                       </a:endParaRPr>
                     </a:p>
                   </a:txBody>
-                  <a:tcPr marL="91440" marR="91440" marT="45720" marB="45720">
+                  <a:tcPr>
                     <a:lnL w="6350" cap="flat" cmpd="sng" algn="ctr">
                       <a:solidFill>
                         <a:srgbClr val="C0C0C0"/>
@@ -13589,7 +13852,7 @@
                     <a:bodyPr/>
                     <a:lstStyle/>
                     <a:p>
-                      <a:pPr indent="0" marL="0">
+                      <a:pPr marL="0" indent="0">
                         <a:buNone/>
                       </a:pPr>
                       <a:r>
@@ -13610,7 +13873,7 @@
                       </a:endParaRPr>
                     </a:p>
                   </a:txBody>
-                  <a:tcPr marL="91440" marR="91440" marT="45720" marB="45720">
+                  <a:tcPr>
                     <a:lnL w="6350" cap="flat" cmpd="sng" algn="ctr">
                       <a:solidFill>
                         <a:srgbClr val="C0C0C0"/>
@@ -13652,6 +13915,11 @@
                     </a:solidFill>
                   </a:tcPr>
                 </a:tc>
+                <a:extLst>
+                  <a:ext uri="{0D108BD9-81ED-4DB2-BD59-A6C34878D82A}">
+                    <a16:rowId xmlns:a16="http://schemas.microsoft.com/office/drawing/2014/main" val="10000"/>
+                  </a:ext>
+                </a:extLst>
               </a:tr>
               <a:tr h="365760">
                 <a:tc>
@@ -13659,7 +13927,7 @@
                     <a:bodyPr/>
                     <a:lstStyle/>
                     <a:p>
-                      <a:pPr algn="ctr" indent="0" marL="0">
+                      <a:pPr marL="0" indent="0" algn="ctr">
                         <a:buNone/>
                       </a:pPr>
                       <a:r>
@@ -13680,7 +13948,7 @@
                       </a:endParaRPr>
                     </a:p>
                   </a:txBody>
-                  <a:tcPr marL="91440" marR="91440" marT="45720" marB="45720">
+                  <a:tcPr>
                     <a:lnL w="6350" cap="flat" cmpd="sng" algn="ctr">
                       <a:solidFill>
                         <a:srgbClr val="C0C0C0"/>
@@ -13724,7 +13992,7 @@
                     <a:bodyPr/>
                     <a:lstStyle/>
                     <a:p>
-                      <a:pPr indent="0" marL="0">
+                      <a:pPr marL="0" indent="0">
                         <a:buNone/>
                       </a:pPr>
                       <a:r>
@@ -13745,7 +14013,7 @@
                       </a:endParaRPr>
                     </a:p>
                   </a:txBody>
-                  <a:tcPr marL="91440" marR="91440" marT="45720" marB="45720">
+                  <a:tcPr>
                     <a:lnL w="6350" cap="flat" cmpd="sng" algn="ctr">
                       <a:solidFill>
                         <a:srgbClr val="C0C0C0"/>
@@ -13789,7 +14057,7 @@
                     <a:bodyPr/>
                     <a:lstStyle/>
                     <a:p>
-                      <a:pPr indent="0" marL="0">
+                      <a:pPr marL="0" indent="0">
                         <a:buNone/>
                       </a:pPr>
                       <a:r>
@@ -13810,7 +14078,7 @@
                       </a:endParaRPr>
                     </a:p>
                   </a:txBody>
-                  <a:tcPr marL="91440" marR="91440" marT="45720" marB="45720">
+                  <a:tcPr>
                     <a:lnL w="6350" cap="flat" cmpd="sng" algn="ctr">
                       <a:solidFill>
                         <a:srgbClr val="C0C0C0"/>
@@ -13854,7 +14122,7 @@
                     <a:bodyPr/>
                     <a:lstStyle/>
                     <a:p>
-                      <a:pPr indent="0" marL="0">
+                      <a:pPr marL="0" indent="0">
                         <a:buNone/>
                       </a:pPr>
                       <a:r>
@@ -13875,7 +14143,7 @@
                       </a:endParaRPr>
                     </a:p>
                   </a:txBody>
-                  <a:tcPr marL="91440" marR="91440" marT="45720" marB="45720">
+                  <a:tcPr>
                     <a:lnL w="6350" cap="flat" cmpd="sng" algn="ctr">
                       <a:solidFill>
                         <a:srgbClr val="C0C0C0"/>
@@ -13914,6 +14182,11 @@
                     </a:lnB>
                   </a:tcPr>
                 </a:tc>
+                <a:extLst>
+                  <a:ext uri="{0D108BD9-81ED-4DB2-BD59-A6C34878D82A}">
+                    <a16:rowId xmlns:a16="http://schemas.microsoft.com/office/drawing/2014/main" val="10001"/>
+                  </a:ext>
+                </a:extLst>
               </a:tr>
               <a:tr h="365760">
                 <a:tc>
@@ -13921,7 +14194,7 @@
                     <a:bodyPr/>
                     <a:lstStyle/>
                     <a:p>
-                      <a:pPr algn="ctr" indent="0" marL="0">
+                      <a:pPr marL="0" indent="0" algn="ctr">
                         <a:buNone/>
                       </a:pPr>
                       <a:r>
@@ -13942,7 +14215,7 @@
                       </a:endParaRPr>
                     </a:p>
                   </a:txBody>
-                  <a:tcPr marL="91440" marR="91440" marT="45720" marB="45720">
+                  <a:tcPr>
                     <a:lnL w="6350" cap="flat" cmpd="sng" algn="ctr">
                       <a:solidFill>
                         <a:srgbClr val="C0C0C0"/>
@@ -13989,7 +14262,7 @@
                     <a:bodyPr/>
                     <a:lstStyle/>
                     <a:p>
-                      <a:pPr indent="0" marL="0">
+                      <a:pPr marL="0" indent="0">
                         <a:buNone/>
                       </a:pPr>
                       <a:r>
@@ -14010,7 +14283,7 @@
                       </a:endParaRPr>
                     </a:p>
                   </a:txBody>
-                  <a:tcPr marL="91440" marR="91440" marT="45720" marB="45720">
+                  <a:tcPr>
                     <a:lnL w="6350" cap="flat" cmpd="sng" algn="ctr">
                       <a:solidFill>
                         <a:srgbClr val="C0C0C0"/>
@@ -14057,7 +14330,7 @@
                     <a:bodyPr/>
                     <a:lstStyle/>
                     <a:p>
-                      <a:pPr indent="0" marL="0">
+                      <a:pPr marL="0" indent="0">
                         <a:buNone/>
                       </a:pPr>
                       <a:r>
@@ -14078,7 +14351,7 @@
                       </a:endParaRPr>
                     </a:p>
                   </a:txBody>
-                  <a:tcPr marL="91440" marR="91440" marT="45720" marB="45720">
+                  <a:tcPr>
                     <a:lnL w="6350" cap="flat" cmpd="sng" algn="ctr">
                       <a:solidFill>
                         <a:srgbClr val="C0C0C0"/>
@@ -14125,7 +14398,7 @@
                     <a:bodyPr/>
                     <a:lstStyle/>
                     <a:p>
-                      <a:pPr indent="0" marL="0">
+                      <a:pPr marL="0" indent="0">
                         <a:buNone/>
                       </a:pPr>
                       <a:r>
@@ -14146,7 +14419,7 @@
                       </a:endParaRPr>
                     </a:p>
                   </a:txBody>
-                  <a:tcPr marL="91440" marR="91440" marT="45720" marB="45720">
+                  <a:tcPr>
                     <a:lnL w="6350" cap="flat" cmpd="sng" algn="ctr">
                       <a:solidFill>
                         <a:srgbClr val="C0C0C0"/>
@@ -14188,6 +14461,11 @@
                     </a:solidFill>
                   </a:tcPr>
                 </a:tc>
+                <a:extLst>
+                  <a:ext uri="{0D108BD9-81ED-4DB2-BD59-A6C34878D82A}">
+                    <a16:rowId xmlns:a16="http://schemas.microsoft.com/office/drawing/2014/main" val="10002"/>
+                  </a:ext>
+                </a:extLst>
               </a:tr>
               <a:tr h="365760">
                 <a:tc>
@@ -14195,7 +14473,7 @@
                     <a:bodyPr/>
                     <a:lstStyle/>
                     <a:p>
-                      <a:pPr algn="ctr" indent="0" marL="0">
+                      <a:pPr marL="0" indent="0" algn="ctr">
                         <a:buNone/>
                       </a:pPr>
                       <a:r>
@@ -14216,7 +14494,7 @@
                       </a:endParaRPr>
                     </a:p>
                   </a:txBody>
-                  <a:tcPr marL="91440" marR="91440" marT="45720" marB="45720">
+                  <a:tcPr>
                     <a:lnL w="6350" cap="flat" cmpd="sng" algn="ctr">
                       <a:solidFill>
                         <a:srgbClr val="C0C0C0"/>
@@ -14260,7 +14538,7 @@
                     <a:bodyPr/>
                     <a:lstStyle/>
                     <a:p>
-                      <a:pPr indent="0" marL="0">
+                      <a:pPr marL="0" indent="0">
                         <a:buNone/>
                       </a:pPr>
                       <a:r>
@@ -14281,7 +14559,7 @@
                       </a:endParaRPr>
                     </a:p>
                   </a:txBody>
-                  <a:tcPr marL="91440" marR="91440" marT="45720" marB="45720">
+                  <a:tcPr>
                     <a:lnL w="6350" cap="flat" cmpd="sng" algn="ctr">
                       <a:solidFill>
                         <a:srgbClr val="C0C0C0"/>
@@ -14325,7 +14603,7 @@
                     <a:bodyPr/>
                     <a:lstStyle/>
                     <a:p>
-                      <a:pPr indent="0" marL="0">
+                      <a:pPr marL="0" indent="0">
                         <a:buNone/>
                       </a:pPr>
                       <a:r>
@@ -14346,7 +14624,7 @@
                       </a:endParaRPr>
                     </a:p>
                   </a:txBody>
-                  <a:tcPr marL="91440" marR="91440" marT="45720" marB="45720">
+                  <a:tcPr>
                     <a:lnL w="6350" cap="flat" cmpd="sng" algn="ctr">
                       <a:solidFill>
                         <a:srgbClr val="C0C0C0"/>
@@ -14390,7 +14668,7 @@
                     <a:bodyPr/>
                     <a:lstStyle/>
                     <a:p>
-                      <a:pPr indent="0" marL="0">
+                      <a:pPr marL="0" indent="0">
                         <a:buNone/>
                       </a:pPr>
                       <a:r>
@@ -14411,7 +14689,7 @@
                       </a:endParaRPr>
                     </a:p>
                   </a:txBody>
-                  <a:tcPr marL="91440" marR="91440" marT="45720" marB="45720">
+                  <a:tcPr>
                     <a:lnL w="6350" cap="flat" cmpd="sng" algn="ctr">
                       <a:solidFill>
                         <a:srgbClr val="C0C0C0"/>
@@ -14450,6 +14728,11 @@
                     </a:lnB>
                   </a:tcPr>
                 </a:tc>
+                <a:extLst>
+                  <a:ext uri="{0D108BD9-81ED-4DB2-BD59-A6C34878D82A}">
+                    <a16:rowId xmlns:a16="http://schemas.microsoft.com/office/drawing/2014/main" val="10003"/>
+                  </a:ext>
+                </a:extLst>
               </a:tr>
               <a:tr h="365760">
                 <a:tc>
@@ -14457,7 +14740,7 @@
                     <a:bodyPr/>
                     <a:lstStyle/>
                     <a:p>
-                      <a:pPr algn="ctr" indent="0" marL="0">
+                      <a:pPr marL="0" indent="0" algn="ctr">
                         <a:buNone/>
                       </a:pPr>
                       <a:r>
@@ -14478,7 +14761,7 @@
                       </a:endParaRPr>
                     </a:p>
                   </a:txBody>
-                  <a:tcPr marL="91440" marR="91440" marT="45720" marB="45720">
+                  <a:tcPr>
                     <a:lnL w="6350" cap="flat" cmpd="sng" algn="ctr">
                       <a:solidFill>
                         <a:srgbClr val="C0C0C0"/>
@@ -14525,7 +14808,7 @@
                     <a:bodyPr/>
                     <a:lstStyle/>
                     <a:p>
-                      <a:pPr indent="0" marL="0">
+                      <a:pPr marL="0" indent="0">
                         <a:buNone/>
                       </a:pPr>
                       <a:r>
@@ -14546,7 +14829,7 @@
                       </a:endParaRPr>
                     </a:p>
                   </a:txBody>
-                  <a:tcPr marL="91440" marR="91440" marT="45720" marB="45720">
+                  <a:tcPr>
                     <a:lnL w="6350" cap="flat" cmpd="sng" algn="ctr">
                       <a:solidFill>
                         <a:srgbClr val="C0C0C0"/>
@@ -14593,7 +14876,7 @@
                     <a:bodyPr/>
                     <a:lstStyle/>
                     <a:p>
-                      <a:pPr indent="0" marL="0">
+                      <a:pPr marL="0" indent="0">
                         <a:buNone/>
                       </a:pPr>
                       <a:r>
@@ -14614,7 +14897,7 @@
                       </a:endParaRPr>
                     </a:p>
                   </a:txBody>
-                  <a:tcPr marL="91440" marR="91440" marT="45720" marB="45720">
+                  <a:tcPr>
                     <a:lnL w="6350" cap="flat" cmpd="sng" algn="ctr">
                       <a:solidFill>
                         <a:srgbClr val="C0C0C0"/>
@@ -14661,7 +14944,7 @@
                     <a:bodyPr/>
                     <a:lstStyle/>
                     <a:p>
-                      <a:pPr indent="0" marL="0">
+                      <a:pPr marL="0" indent="0">
                         <a:buNone/>
                       </a:pPr>
                       <a:r>
@@ -14682,7 +14965,7 @@
                       </a:endParaRPr>
                     </a:p>
                   </a:txBody>
-                  <a:tcPr marL="91440" marR="91440" marT="45720" marB="45720">
+                  <a:tcPr>
                     <a:lnL w="6350" cap="flat" cmpd="sng" algn="ctr">
                       <a:solidFill>
                         <a:srgbClr val="C0C0C0"/>
@@ -14724,6 +15007,11 @@
                     </a:solidFill>
                   </a:tcPr>
                 </a:tc>
+                <a:extLst>
+                  <a:ext uri="{0D108BD9-81ED-4DB2-BD59-A6C34878D82A}">
+                    <a16:rowId xmlns:a16="http://schemas.microsoft.com/office/drawing/2014/main" val="10004"/>
+                  </a:ext>
+                </a:extLst>
               </a:tr>
               <a:tr h="365760">
                 <a:tc>
@@ -14731,7 +15019,7 @@
                     <a:bodyPr/>
                     <a:lstStyle/>
                     <a:p>
-                      <a:pPr algn="ctr" indent="0" marL="0">
+                      <a:pPr marL="0" indent="0" algn="ctr">
                         <a:buNone/>
                       </a:pPr>
                       <a:r>
@@ -14752,7 +15040,7 @@
                       </a:endParaRPr>
                     </a:p>
                   </a:txBody>
-                  <a:tcPr marL="91440" marR="91440" marT="45720" marB="45720">
+                  <a:tcPr>
                     <a:lnL w="6350" cap="flat" cmpd="sng" algn="ctr">
                       <a:solidFill>
                         <a:srgbClr val="C0C0C0"/>
@@ -14796,7 +15084,7 @@
                     <a:bodyPr/>
                     <a:lstStyle/>
                     <a:p>
-                      <a:pPr indent="0" marL="0">
+                      <a:pPr marL="0" indent="0">
                         <a:buNone/>
                       </a:pPr>
                       <a:r>
@@ -14817,7 +15105,7 @@
                       </a:endParaRPr>
                     </a:p>
                   </a:txBody>
-                  <a:tcPr marL="91440" marR="91440" marT="45720" marB="45720">
+                  <a:tcPr>
                     <a:lnL w="6350" cap="flat" cmpd="sng" algn="ctr">
                       <a:solidFill>
                         <a:srgbClr val="C0C0C0"/>
@@ -14861,7 +15149,7 @@
                     <a:bodyPr/>
                     <a:lstStyle/>
                     <a:p>
-                      <a:pPr indent="0" marL="0">
+                      <a:pPr marL="0" indent="0">
                         <a:buNone/>
                       </a:pPr>
                       <a:r>
@@ -14882,7 +15170,7 @@
                       </a:endParaRPr>
                     </a:p>
                   </a:txBody>
-                  <a:tcPr marL="91440" marR="91440" marT="45720" marB="45720">
+                  <a:tcPr>
                     <a:lnL w="6350" cap="flat" cmpd="sng" algn="ctr">
                       <a:solidFill>
                         <a:srgbClr val="C0C0C0"/>
@@ -14926,7 +15214,7 @@
                     <a:bodyPr/>
                     <a:lstStyle/>
                     <a:p>
-                      <a:pPr indent="0" marL="0">
+                      <a:pPr marL="0" indent="0">
                         <a:buNone/>
                       </a:pPr>
                       <a:r>
@@ -14947,7 +15235,7 @@
                       </a:endParaRPr>
                     </a:p>
                   </a:txBody>
-                  <a:tcPr marL="91440" marR="91440" marT="45720" marB="45720">
+                  <a:tcPr>
                     <a:lnL w="6350" cap="flat" cmpd="sng" algn="ctr">
                       <a:solidFill>
                         <a:srgbClr val="C0C0C0"/>
@@ -14986,6 +15274,11 @@
                     </a:lnB>
                   </a:tcPr>
                 </a:tc>
+                <a:extLst>
+                  <a:ext uri="{0D108BD9-81ED-4DB2-BD59-A6C34878D82A}">
+                    <a16:rowId xmlns:a16="http://schemas.microsoft.com/office/drawing/2014/main" val="10005"/>
+                  </a:ext>
+                </a:extLst>
               </a:tr>
             </a:tbl>
           </a:graphicData>
@@ -15003,19 +15296,24 @@
             <a:ext cx="7680960" cy="731520"/>
           </a:xfrm>
           <a:prstGeom prst="rect">
-            <a:avLst>
-              <a:gd name="adj" fmla="val 5000"/>
-            </a:avLst>
+            <a:avLst/>
           </a:prstGeom>
           <a:solidFill>
             <a:srgbClr val="36454F"/>
           </a:solidFill>
           <a:ln/>
         </p:spPr>
-      </p:sp>
-      <p:sp>
-        <p:nvSpPr>
-          <p:cNvPr id="9" name="Text 6"/>
+        <p:txBody>
+          <a:bodyPr/>
+          <a:lstStyle/>
+          <a:p>
+            <a:endParaRPr lang="en-US"/>
+          </a:p>
+        </p:txBody>
+      </p:sp>
+      <p:sp>
+        <p:nvSpPr>
+          <p:cNvPr id="7" name="Text 6"/>
           <p:cNvSpPr/>
           <p:nvPr/>
         </p:nvSpPr>
@@ -15034,7 +15332,7 @@
           <a:bodyPr wrap="square" lIns="0" tIns="0" rIns="0" bIns="0" rtlCol="0" anchor="ctr"/>
           <a:lstStyle/>
           <a:p>
-            <a:pPr indent="0" marL="0">
+            <a:pPr marL="0" indent="0">
               <a:buNone/>
             </a:pPr>
             <a:r>
@@ -15073,7 +15371,7 @@
           <a:bodyPr wrap="square" lIns="0" tIns="0" rIns="0" bIns="0" rtlCol="0" anchor="ctr"/>
           <a:lstStyle/>
           <a:p>
-            <a:pPr indent="0" marL="0">
+            <a:pPr marL="0" indent="0">
               <a:lnSpc>
                 <a:spcPct val="130000"/>
               </a:lnSpc>
@@ -15093,7 +15391,7 @@
             <a:endParaRPr lang="en-US" sz="1000" dirty="0"/>
           </a:p>
           <a:p>
-            <a:pPr indent="0" marL="0">
+            <a:pPr marL="0" indent="0">
               <a:lnSpc>
                 <a:spcPct val="130000"/>
               </a:lnSpc>
@@ -15113,7 +15411,7 @@
             <a:endParaRPr lang="en-US" sz="1000" dirty="0"/>
           </a:p>
           <a:p>
-            <a:pPr indent="0" marL="0">
+            <a:pPr marL="0" indent="0">
               <a:lnSpc>
                 <a:spcPct val="130000"/>
               </a:lnSpc>
@@ -15150,6 +15448,7 @@
         <a:solidFill>
           <a:srgbClr val="FAF9F7"/>
         </a:solidFill>
+        <a:effectLst/>
       </p:bgPr>
     </p:bg>
     <p:spTree>
@@ -15185,6 +15484,13 @@
           </a:solidFill>
           <a:ln/>
         </p:spPr>
+        <p:txBody>
+          <a:bodyPr/>
+          <a:lstStyle/>
+          <a:p>
+            <a:endParaRPr lang="en-US"/>
+          </a:p>
+        </p:txBody>
       </p:sp>
       <p:sp>
         <p:nvSpPr>
@@ -15205,6 +15511,13 @@
           </a:solidFill>
           <a:ln/>
         </p:spPr>
+        <p:txBody>
+          <a:bodyPr/>
+          <a:lstStyle/>
+          <a:p>
+            <a:endParaRPr lang="en-US"/>
+          </a:p>
+        </p:txBody>
       </p:sp>
       <p:sp>
         <p:nvSpPr>
@@ -15227,7 +15540,7 @@
           <a:bodyPr wrap="square" rtlCol="0" anchor="ctr"/>
           <a:lstStyle/>
           <a:p>
-            <a:pPr algn="ctr" indent="0" marL="0">
+            <a:pPr marL="0" indent="0" algn="ctr">
               <a:buNone/>
             </a:pPr>
             <a:r>
@@ -15239,7 +15552,7 @@
                 <a:ea typeface="Open Sans" pitchFamily="34" charset="-122"/>
                 <a:cs typeface="Open Sans" pitchFamily="34" charset="-120"/>
               </a:rPr>
-              <a:t>BUS-314  |  Appendix: GitHub &amp; AI Setup Guide  |  Shidler College of Business</a:t>
+              <a:t>Stauffer  |  Appendix: GitHub &amp; AI Setup Guide  |  Shidler College of Business</a:t>
             </a:r>
             <a:endParaRPr lang="en-US" sz="900" dirty="0"/>
           </a:p>
@@ -15266,7 +15579,7 @@
           <a:bodyPr wrap="square" lIns="0" tIns="0" rIns="0" bIns="0" rtlCol="0" anchor="ctr"/>
           <a:lstStyle/>
           <a:p>
-            <a:pPr indent="0" marL="0">
+            <a:pPr marL="0" indent="0">
               <a:buNone/>
             </a:pPr>
             <a:r>
@@ -15303,6 +15616,13 @@
           </a:solidFill>
           <a:ln/>
         </p:spPr>
+        <p:txBody>
+          <a:bodyPr/>
+          <a:lstStyle/>
+          <a:p>
+            <a:endParaRPr lang="en-US"/>
+          </a:p>
+        </p:txBody>
       </p:sp>
       <p:sp>
         <p:nvSpPr>
@@ -15325,7 +15645,7 @@
           <a:bodyPr wrap="square" lIns="0" tIns="0" rIns="0" bIns="0" rtlCol="0" anchor="ctr"/>
           <a:lstStyle/>
           <a:p>
-            <a:pPr indent="0" marL="0">
+            <a:pPr marL="0" indent="0">
               <a:buNone/>
             </a:pPr>
             <a:r>
@@ -15364,7 +15684,7 @@
           <a:bodyPr wrap="square" lIns="0" tIns="0" rIns="0" bIns="0" rtlCol="0" anchor="ctr"/>
           <a:lstStyle/>
           <a:p>
-            <a:pPr indent="0" marL="0">
+            <a:pPr marL="0" indent="0">
               <a:buNone/>
             </a:pPr>
             <a:r>
@@ -15403,7 +15723,7 @@
           <a:bodyPr wrap="square" lIns="0" tIns="0" rIns="0" bIns="0" rtlCol="0" anchor="ctr"/>
           <a:lstStyle/>
           <a:p>
-            <a:pPr indent="0" marL="0">
+            <a:pPr marL="0" indent="0">
               <a:buNone/>
             </a:pPr>
             <a:r>
@@ -15442,7 +15762,7 @@
           <a:bodyPr wrap="square" lIns="0" tIns="0" rIns="0" bIns="0" rtlCol="0" anchor="ctr"/>
           <a:lstStyle/>
           <a:p>
-            <a:pPr indent="0" marL="0">
+            <a:pPr marL="0" indent="0">
               <a:buNone/>
             </a:pPr>
             <a:r>
@@ -15481,7 +15801,7 @@
           <a:bodyPr wrap="square" lIns="0" tIns="0" rIns="0" bIns="0" rtlCol="0" anchor="ctr"/>
           <a:lstStyle/>
           <a:p>
-            <a:pPr indent="0" marL="0">
+            <a:pPr marL="0" indent="0">
               <a:buNone/>
             </a:pPr>
             <a:r>
@@ -15520,7 +15840,7 @@
           <a:bodyPr wrap="square" lIns="0" tIns="0" rIns="0" bIns="0" rtlCol="0" anchor="ctr"/>
           <a:lstStyle/>
           <a:p>
-            <a:pPr indent="0" marL="0">
+            <a:pPr marL="0" indent="0">
               <a:buNone/>
             </a:pPr>
             <a:r>
@@ -15557,6 +15877,13 @@
           </a:solidFill>
           <a:ln/>
         </p:spPr>
+        <p:txBody>
+          <a:bodyPr/>
+          <a:lstStyle/>
+          <a:p>
+            <a:endParaRPr lang="en-US"/>
+          </a:p>
+        </p:txBody>
       </p:sp>
       <p:sp>
         <p:nvSpPr>
@@ -15579,7 +15906,7 @@
           <a:bodyPr wrap="square" lIns="0" tIns="0" rIns="0" bIns="0" rtlCol="0" anchor="ctr"/>
           <a:lstStyle/>
           <a:p>
-            <a:pPr indent="0" marL="0">
+            <a:pPr marL="0" indent="0">
               <a:buNone/>
             </a:pPr>
             <a:r>
@@ -15618,7 +15945,7 @@
           <a:bodyPr wrap="square" lIns="0" tIns="0" rIns="0" bIns="0" rtlCol="0" anchor="ctr"/>
           <a:lstStyle/>
           <a:p>
-            <a:pPr indent="0" marL="0">
+            <a:pPr marL="0" indent="0">
               <a:buNone/>
             </a:pPr>
             <a:r>
@@ -15657,7 +15984,7 @@
           <a:bodyPr wrap="square" lIns="0" tIns="0" rIns="0" bIns="0" rtlCol="0" anchor="ctr"/>
           <a:lstStyle/>
           <a:p>
-            <a:pPr indent="0" marL="0">
+            <a:pPr marL="0" indent="0">
               <a:buNone/>
             </a:pPr>
             <a:r>
@@ -15696,7 +16023,7 @@
           <a:bodyPr wrap="square" lIns="0" tIns="0" rIns="0" bIns="0" rtlCol="0" anchor="ctr"/>
           <a:lstStyle/>
           <a:p>
-            <a:pPr indent="0" marL="0">
+            <a:pPr marL="0" indent="0">
               <a:buNone/>
             </a:pPr>
             <a:r>
@@ -15735,7 +16062,7 @@
           <a:bodyPr wrap="square" lIns="0" tIns="0" rIns="0" bIns="0" rtlCol="0" anchor="ctr"/>
           <a:lstStyle/>
           <a:p>
-            <a:pPr indent="0" marL="0">
+            <a:pPr marL="0" indent="0">
               <a:buNone/>
             </a:pPr>
             <a:r>
@@ -15774,7 +16101,7 @@
           <a:bodyPr wrap="square" lIns="0" tIns="0" rIns="0" bIns="0" rtlCol="0" anchor="ctr"/>
           <a:lstStyle/>
           <a:p>
-            <a:pPr indent="0" marL="0">
+            <a:pPr marL="0" indent="0">
               <a:buNone/>
             </a:pPr>
             <a:r>
@@ -15811,6 +16138,13 @@
           </a:solidFill>
           <a:ln/>
         </p:spPr>
+        <p:txBody>
+          <a:bodyPr/>
+          <a:lstStyle/>
+          <a:p>
+            <a:endParaRPr lang="en-US"/>
+          </a:p>
+        </p:txBody>
       </p:sp>
       <p:sp>
         <p:nvSpPr>
@@ -15833,7 +16167,7 @@
           <a:bodyPr wrap="square" lIns="0" tIns="0" rIns="0" bIns="0" rtlCol="0" anchor="ctr"/>
           <a:lstStyle/>
           <a:p>
-            <a:pPr indent="0" marL="0">
+            <a:pPr marL="0" indent="0">
               <a:buNone/>
             </a:pPr>
             <a:r>
@@ -15872,7 +16206,7 @@
           <a:bodyPr wrap="square" lIns="0" tIns="0" rIns="0" bIns="0" rtlCol="0" anchor="ctr"/>
           <a:lstStyle/>
           <a:p>
-            <a:pPr indent="0" marL="0">
+            <a:pPr marL="0" indent="0">
               <a:buNone/>
             </a:pPr>
             <a:r>
@@ -15911,7 +16245,7 @@
           <a:bodyPr wrap="square" lIns="0" tIns="0" rIns="0" bIns="0" rtlCol="0" anchor="ctr"/>
           <a:lstStyle/>
           <a:p>
-            <a:pPr indent="0" marL="0">
+            <a:pPr marL="0" indent="0">
               <a:buNone/>
             </a:pPr>
             <a:r>
@@ -16230,4 +16564,319 @@
     </a:ext>
   </a:extLst>
 </a:theme>
+</file>
+
+<file path=ppt/theme/theme2.xml><?xml version="1.0" encoding="utf-8"?>
+<a:theme xmlns:a="http://schemas.openxmlformats.org/drawingml/2006/main" name="Office Theme">
+  <a:themeElements>
+    <a:clrScheme name="Office">
+      <a:dk1>
+        <a:sysClr val="windowText" lastClr="000000"/>
+      </a:dk1>
+      <a:lt1>
+        <a:sysClr val="window" lastClr="FFFFFF"/>
+      </a:lt1>
+      <a:dk2>
+        <a:srgbClr val="0E2841"/>
+      </a:dk2>
+      <a:lt2>
+        <a:srgbClr val="E8E8E8"/>
+      </a:lt2>
+      <a:accent1>
+        <a:srgbClr val="156082"/>
+      </a:accent1>
+      <a:accent2>
+        <a:srgbClr val="E97132"/>
+      </a:accent2>
+      <a:accent3>
+        <a:srgbClr val="196B24"/>
+      </a:accent3>
+      <a:accent4>
+        <a:srgbClr val="0F9ED5"/>
+      </a:accent4>
+      <a:accent5>
+        <a:srgbClr val="A02B93"/>
+      </a:accent5>
+      <a:accent6>
+        <a:srgbClr val="4EA72E"/>
+      </a:accent6>
+      <a:hlink>
+        <a:srgbClr val="467886"/>
+      </a:hlink>
+      <a:folHlink>
+        <a:srgbClr val="96607D"/>
+      </a:folHlink>
+    </a:clrScheme>
+    <a:fontScheme name="Office">
+      <a:majorFont>
+        <a:latin typeface="Aptos Display" panose="02110004020202020204"/>
+        <a:ea typeface=""/>
+        <a:cs typeface=""/>
+        <a:font script="Jpan" typeface="游ゴシック Light"/>
+        <a:font script="Hang" typeface="맑은 고딕"/>
+        <a:font script="Hans" typeface="等线 Light"/>
+        <a:font script="Hant" typeface="新細明體"/>
+        <a:font script="Arab" typeface="Times New Roman"/>
+        <a:font script="Hebr" typeface="Times New Roman"/>
+        <a:font script="Thai" typeface="Angsana New"/>
+        <a:font script="Ethi" typeface="Nyala"/>
+        <a:font script="Beng" typeface="Vrinda"/>
+        <a:font script="Gujr" typeface="Shruti"/>
+        <a:font script="Khmr" typeface="MoolBoran"/>
+        <a:font script="Knda" typeface="Tunga"/>
+        <a:font script="Guru" typeface="Raavi"/>
+        <a:font script="Cans" typeface="Euphemia"/>
+        <a:font script="Cher" typeface="Plantagenet Cherokee"/>
+        <a:font script="Yiii" typeface="Microsoft Yi Baiti"/>
+        <a:font script="Tibt" typeface="Microsoft Himalaya"/>
+        <a:font script="Thaa" typeface="MV Boli"/>
+        <a:font script="Deva" typeface="Mangal"/>
+        <a:font script="Telu" typeface="Gautami"/>
+        <a:font script="Taml" typeface="Latha"/>
+        <a:font script="Syrc" typeface="Estrangelo Edessa"/>
+        <a:font script="Orya" typeface="Kalinga"/>
+        <a:font script="Mlym" typeface="Kartika"/>
+        <a:font script="Laoo" typeface="DokChampa"/>
+        <a:font script="Sinh" typeface="Iskoola Pota"/>
+        <a:font script="Mong" typeface="Mongolian Baiti"/>
+        <a:font script="Viet" typeface="Times New Roman"/>
+        <a:font script="Uigh" typeface="Microsoft Uighur"/>
+        <a:font script="Geor" typeface="Sylfaen"/>
+        <a:font script="Armn" typeface="Arial"/>
+        <a:font script="Bugi" typeface="Leelawadee UI"/>
+        <a:font script="Bopo" typeface="Microsoft JhengHei"/>
+        <a:font script="Java" typeface="Javanese Text"/>
+        <a:font script="Lisu" typeface="Segoe UI"/>
+        <a:font script="Mymr" typeface="Myanmar Text"/>
+        <a:font script="Nkoo" typeface="Ebrima"/>
+        <a:font script="Olck" typeface="Nirmala UI"/>
+        <a:font script="Osma" typeface="Ebrima"/>
+        <a:font script="Phag" typeface="Phagspa"/>
+        <a:font script="Syrn" typeface="Estrangelo Edessa"/>
+        <a:font script="Syrj" typeface="Estrangelo Edessa"/>
+        <a:font script="Syre" typeface="Estrangelo Edessa"/>
+        <a:font script="Sora" typeface="Nirmala UI"/>
+        <a:font script="Tale" typeface="Microsoft Tai Le"/>
+        <a:font script="Talu" typeface="Microsoft New Tai Lue"/>
+        <a:font script="Tfng" typeface="Ebrima"/>
+      </a:majorFont>
+      <a:minorFont>
+        <a:latin typeface="Aptos" panose="02110004020202020204"/>
+        <a:ea typeface=""/>
+        <a:cs typeface=""/>
+        <a:font script="Jpan" typeface="游ゴシック"/>
+        <a:font script="Hang" typeface="맑은 고딕"/>
+        <a:font script="Hans" typeface="等线"/>
+        <a:font script="Hant" typeface="新細明體"/>
+        <a:font script="Arab" typeface="Arial"/>
+        <a:font script="Hebr" typeface="Arial"/>
+        <a:font script="Thai" typeface="Cordia New"/>
+        <a:font script="Ethi" typeface="Nyala"/>
+        <a:font script="Beng" typeface="Vrinda"/>
+        <a:font script="Gujr" typeface="Shruti"/>
+        <a:font script="Khmr" typeface="DaunPenh"/>
+        <a:font script="Knda" typeface="Tunga"/>
+        <a:font script="Guru" typeface="Raavi"/>
+        <a:font script="Cans" typeface="Euphemia"/>
+        <a:font script="Cher" typeface="Plantagenet Cherokee"/>
+        <a:font script="Yiii" typeface="Microsoft Yi Baiti"/>
+        <a:font script="Tibt" typeface="Microsoft Himalaya"/>
+        <a:font script="Thaa" typeface="MV Boli"/>
+        <a:font script="Deva" typeface="Mangal"/>
+        <a:font script="Telu" typeface="Gautami"/>
+        <a:font script="Taml" typeface="Latha"/>
+        <a:font script="Syrc" typeface="Estrangelo Edessa"/>
+        <a:font script="Orya" typeface="Kalinga"/>
+        <a:font script="Mlym" typeface="Kartika"/>
+        <a:font script="Laoo" typeface="DokChampa"/>
+        <a:font script="Sinh" typeface="Iskoola Pota"/>
+        <a:font script="Mong" typeface="Mongolian Baiti"/>
+        <a:font script="Viet" typeface="Arial"/>
+        <a:font script="Uigh" typeface="Microsoft Uighur"/>
+        <a:font script="Geor" typeface="Sylfaen"/>
+        <a:font script="Armn" typeface="Arial"/>
+        <a:font script="Bugi" typeface="Leelawadee UI"/>
+        <a:font script="Bopo" typeface="Microsoft JhengHei"/>
+        <a:font script="Java" typeface="Javanese Text"/>
+        <a:font script="Lisu" typeface="Segoe UI"/>
+        <a:font script="Mymr" typeface="Myanmar Text"/>
+        <a:font script="Nkoo" typeface="Ebrima"/>
+        <a:font script="Olck" typeface="Nirmala UI"/>
+        <a:font script="Osma" typeface="Ebrima"/>
+        <a:font script="Phag" typeface="Phagspa"/>
+        <a:font script="Syrn" typeface="Estrangelo Edessa"/>
+        <a:font script="Syrj" typeface="Estrangelo Edessa"/>
+        <a:font script="Syre" typeface="Estrangelo Edessa"/>
+        <a:font script="Sora" typeface="Nirmala UI"/>
+        <a:font script="Tale" typeface="Microsoft Tai Le"/>
+        <a:font script="Talu" typeface="Microsoft New Tai Lue"/>
+        <a:font script="Tfng" typeface="Ebrima"/>
+      </a:minorFont>
+    </a:fontScheme>
+    <a:fmtScheme name="Office">
+      <a:fillStyleLst>
+        <a:solidFill>
+          <a:schemeClr val="phClr"/>
+        </a:solidFill>
+        <a:gradFill rotWithShape="1">
+          <a:gsLst>
+            <a:gs pos="0">
+              <a:schemeClr val="phClr">
+                <a:lumMod val="110000"/>
+                <a:satMod val="105000"/>
+                <a:tint val="67000"/>
+              </a:schemeClr>
+            </a:gs>
+            <a:gs pos="50000">
+              <a:schemeClr val="phClr">
+                <a:lumMod val="105000"/>
+                <a:satMod val="103000"/>
+                <a:tint val="73000"/>
+              </a:schemeClr>
+            </a:gs>
+            <a:gs pos="100000">
+              <a:schemeClr val="phClr">
+                <a:lumMod val="105000"/>
+                <a:satMod val="109000"/>
+                <a:tint val="81000"/>
+              </a:schemeClr>
+            </a:gs>
+          </a:gsLst>
+          <a:lin ang="5400000" scaled="0"/>
+        </a:gradFill>
+        <a:gradFill rotWithShape="1">
+          <a:gsLst>
+            <a:gs pos="0">
+              <a:schemeClr val="phClr">
+                <a:satMod val="103000"/>
+                <a:lumMod val="102000"/>
+                <a:tint val="94000"/>
+              </a:schemeClr>
+            </a:gs>
+            <a:gs pos="50000">
+              <a:schemeClr val="phClr">
+                <a:satMod val="110000"/>
+                <a:lumMod val="100000"/>
+                <a:shade val="100000"/>
+              </a:schemeClr>
+            </a:gs>
+            <a:gs pos="100000">
+              <a:schemeClr val="phClr">
+                <a:lumMod val="99000"/>
+                <a:satMod val="120000"/>
+                <a:shade val="78000"/>
+              </a:schemeClr>
+            </a:gs>
+          </a:gsLst>
+          <a:lin ang="5400000" scaled="0"/>
+        </a:gradFill>
+      </a:fillStyleLst>
+      <a:lnStyleLst>
+        <a:ln w="12700" cap="flat" cmpd="sng" algn="ctr">
+          <a:solidFill>
+            <a:schemeClr val="phClr"/>
+          </a:solidFill>
+          <a:prstDash val="solid"/>
+          <a:miter lim="800000"/>
+        </a:ln>
+        <a:ln w="19050" cap="flat" cmpd="sng" algn="ctr">
+          <a:solidFill>
+            <a:schemeClr val="phClr"/>
+          </a:solidFill>
+          <a:prstDash val="solid"/>
+          <a:miter lim="800000"/>
+        </a:ln>
+        <a:ln w="25400" cap="flat" cmpd="sng" algn="ctr">
+          <a:solidFill>
+            <a:schemeClr val="phClr"/>
+          </a:solidFill>
+          <a:prstDash val="solid"/>
+          <a:miter lim="800000"/>
+        </a:ln>
+      </a:lnStyleLst>
+      <a:effectStyleLst>
+        <a:effectStyle>
+          <a:effectLst/>
+        </a:effectStyle>
+        <a:effectStyle>
+          <a:effectLst/>
+        </a:effectStyle>
+        <a:effectStyle>
+          <a:effectLst>
+            <a:outerShdw blurRad="57150" dist="19050" dir="5400000" algn="ctr" rotWithShape="0">
+              <a:srgbClr val="000000">
+                <a:alpha val="63000"/>
+              </a:srgbClr>
+            </a:outerShdw>
+          </a:effectLst>
+        </a:effectStyle>
+      </a:effectStyleLst>
+      <a:bgFillStyleLst>
+        <a:solidFill>
+          <a:schemeClr val="phClr"/>
+        </a:solidFill>
+        <a:solidFill>
+          <a:schemeClr val="phClr">
+            <a:tint val="95000"/>
+            <a:satMod val="170000"/>
+          </a:schemeClr>
+        </a:solidFill>
+        <a:gradFill rotWithShape="1">
+          <a:gsLst>
+            <a:gs pos="0">
+              <a:schemeClr val="phClr">
+                <a:tint val="93000"/>
+                <a:satMod val="150000"/>
+                <a:shade val="98000"/>
+                <a:lumMod val="102000"/>
+              </a:schemeClr>
+            </a:gs>
+            <a:gs pos="50000">
+              <a:schemeClr val="phClr">
+                <a:tint val="98000"/>
+                <a:satMod val="130000"/>
+                <a:shade val="90000"/>
+                <a:lumMod val="103000"/>
+              </a:schemeClr>
+            </a:gs>
+            <a:gs pos="100000">
+              <a:schemeClr val="phClr">
+                <a:shade val="63000"/>
+                <a:satMod val="120000"/>
+              </a:schemeClr>
+            </a:gs>
+          </a:gsLst>
+          <a:lin ang="5400000" scaled="0"/>
+        </a:gradFill>
+      </a:bgFillStyleLst>
+    </a:fmtScheme>
+  </a:themeElements>
+  <a:objectDefaults>
+    <a:lnDef>
+      <a:spPr/>
+      <a:bodyPr/>
+      <a:lstStyle/>
+      <a:style>
+        <a:lnRef idx="2">
+          <a:schemeClr val="accent1"/>
+        </a:lnRef>
+        <a:fillRef idx="0">
+          <a:schemeClr val="accent1"/>
+        </a:fillRef>
+        <a:effectRef idx="1">
+          <a:schemeClr val="accent1"/>
+        </a:effectRef>
+        <a:fontRef idx="minor">
+          <a:schemeClr val="tx1"/>
+        </a:fontRef>
+      </a:style>
+    </a:lnDef>
+  </a:objectDefaults>
+  <a:extraClrSchemeLst/>
+  <a:extLst>
+    <a:ext uri="{05A4C25C-085E-4340-85A3-A5531E510DB2}">
+      <thm15:themeFamily xmlns:thm15="http://schemas.microsoft.com/office/thememl/2012/main" name="Office Theme" id="{2E142A2C-CD16-42D6-873A-C26D2A0506FA}" vid="{1BDDFF52-6CD6-40A5-AB3C-68EB2F1E4D0A}"/>
+    </a:ext>
+  </a:extLst>
+</a:theme>
 </file>